--- a/AYOMIKUN PYTHON SYNTHAX.pptx
+++ b/AYOMIKUN PYTHON SYNTHAX.pptx
@@ -6940,44 +6940,21 @@
           </a:p>
         </p:txBody>
       </p:sp>
-      <p:sp>
-        <p:nvSpPr>
-          <p:cNvPr id="3" name="Content Placeholder 2">
+      <p:pic>
+        <p:nvPicPr>
+          <p:cNvPr id="7" name="Content Placeholder 6">
             <a:extLst>
               <a:ext uri="{FF2B5EF4-FFF2-40B4-BE49-F238E27FC236}">
-                <a16:creationId xmlns:a16="http://schemas.microsoft.com/office/drawing/2014/main" id="{35C191FA-925A-D710-56C4-77855F8EEBA1}"/>
-              </a:ext>
-            </a:extLst>
-          </p:cNvPr>
-          <p:cNvSpPr>
-            <a:spLocks noGrp="1"/>
-          </p:cNvSpPr>
-          <p:nvPr>
-            <p:ph idx="1"/>
-          </p:nvPr>
-        </p:nvSpPr>
-        <p:spPr/>
-        <p:txBody>
-          <a:bodyPr/>
-          <a:lstStyle/>
-          <a:p>
-            <a:endParaRPr lang="en-US"/>
-          </a:p>
-        </p:txBody>
-      </p:sp>
-      <p:pic>
-        <p:nvPicPr>
-          <p:cNvPr id="5" name="Picture 4">
-            <a:extLst>
-              <a:ext uri="{FF2B5EF4-FFF2-40B4-BE49-F238E27FC236}">
-                <a16:creationId xmlns:a16="http://schemas.microsoft.com/office/drawing/2014/main" id="{3E582706-FD00-7626-B6A0-715A33E23740}"/>
+                <a16:creationId xmlns:a16="http://schemas.microsoft.com/office/drawing/2014/main" id="{89C4B062-2DAA-88AA-2A4F-4230427B25C4}"/>
               </a:ext>
             </a:extLst>
           </p:cNvPr>
           <p:cNvPicPr>
-            <a:picLocks noChangeAspect="1"/>
+            <a:picLocks noGrp="1" noChangeAspect="1"/>
           </p:cNvPicPr>
-          <p:nvPr/>
+          <p:nvPr>
+            <p:ph idx="1"/>
+          </p:nvPr>
         </p:nvPicPr>
         <p:blipFill>
           <a:blip r:embed="rId2"/>
@@ -6987,8 +6964,8 @@
         </p:blipFill>
         <p:spPr>
           <a:xfrm>
-            <a:off x="1295402" y="2659745"/>
-            <a:ext cx="9537096" cy="2639368"/>
+            <a:off x="1295400" y="2514601"/>
+            <a:ext cx="9601200" cy="3624942"/>
           </a:xfrm>
           <a:prstGeom prst="rect">
             <a:avLst/>
@@ -7176,60 +7153,90 @@
               <a:buNone/>
             </a:pPr>
             <a:r>
-              <a:rPr lang="en-US" sz="1750" b="1" dirty="0"/>
+              <a:rPr lang="en-US" sz="1750" b="1" dirty="0">
+                <a:latin typeface="Times New Roman" panose="02020603050405020304" pitchFamily="18" charset="0"/>
+                <a:cs typeface="Times New Roman" panose="02020603050405020304" pitchFamily="18" charset="0"/>
+              </a:rPr>
               <a:t>Key Features</a:t>
             </a:r>
           </a:p>
           <a:p>
             <a:r>
-              <a:rPr lang="en-US" sz="1750" dirty="0"/>
+              <a:rPr lang="en-US" sz="1750" dirty="0">
+                <a:latin typeface="Times New Roman" panose="02020603050405020304" pitchFamily="18" charset="0"/>
+                <a:cs typeface="Times New Roman" panose="02020603050405020304" pitchFamily="18" charset="0"/>
+              </a:rPr>
               <a:t>Automated inventory management </a:t>
             </a:r>
           </a:p>
           <a:p>
             <a:r>
-              <a:rPr lang="en-US" sz="1750" dirty="0"/>
+              <a:rPr lang="en-US" sz="1750" dirty="0">
+                <a:latin typeface="Times New Roman" panose="02020603050405020304" pitchFamily="18" charset="0"/>
+                <a:cs typeface="Times New Roman" panose="02020603050405020304" pitchFamily="18" charset="0"/>
+              </a:rPr>
               <a:t>Sales tracking </a:t>
             </a:r>
           </a:p>
           <a:p>
             <a:r>
-              <a:rPr lang="en-US" sz="1750" dirty="0"/>
+              <a:rPr lang="en-US" sz="1750" dirty="0">
+                <a:latin typeface="Times New Roman" panose="02020603050405020304" pitchFamily="18" charset="0"/>
+                <a:cs typeface="Times New Roman" panose="02020603050405020304" pitchFamily="18" charset="0"/>
+              </a:rPr>
               <a:t>Profit computation </a:t>
             </a:r>
           </a:p>
           <a:p>
             <a:r>
-              <a:rPr lang="en-US" sz="1750" dirty="0"/>
+              <a:rPr lang="en-US" sz="1750" dirty="0">
+                <a:latin typeface="Times New Roman" panose="02020603050405020304" pitchFamily="18" charset="0"/>
+                <a:cs typeface="Times New Roman" panose="02020603050405020304" pitchFamily="18" charset="0"/>
+              </a:rPr>
               <a:t>Income analysis </a:t>
             </a:r>
           </a:p>
           <a:p>
             <a:r>
-              <a:rPr lang="en-US" sz="1750" dirty="0"/>
+              <a:rPr lang="en-US" sz="1750" dirty="0">
+                <a:latin typeface="Times New Roman" panose="02020603050405020304" pitchFamily="18" charset="0"/>
+                <a:cs typeface="Times New Roman" panose="02020603050405020304" pitchFamily="18" charset="0"/>
+              </a:rPr>
               <a:t>Low-stock alerts </a:t>
             </a:r>
           </a:p>
           <a:p>
             <a:r>
-              <a:rPr lang="en-US" sz="1750" dirty="0"/>
+              <a:rPr lang="en-US" sz="1750" dirty="0">
+                <a:latin typeface="Times New Roman" panose="02020603050405020304" pitchFamily="18" charset="0"/>
+                <a:cs typeface="Times New Roman" panose="02020603050405020304" pitchFamily="18" charset="0"/>
+              </a:rPr>
               <a:t>Business dashboard </a:t>
             </a:r>
           </a:p>
           <a:p>
             <a:r>
-              <a:rPr lang="en-US" sz="1750" dirty="0"/>
+              <a:rPr lang="en-US" sz="1750" dirty="0">
+                <a:latin typeface="Times New Roman" panose="02020603050405020304" pitchFamily="18" charset="0"/>
+                <a:cs typeface="Times New Roman" panose="02020603050405020304" pitchFamily="18" charset="0"/>
+              </a:rPr>
               <a:t>Data visualization </a:t>
             </a:r>
           </a:p>
           <a:p>
             <a:r>
-              <a:rPr lang="en-US" sz="1750" dirty="0"/>
+              <a:rPr lang="en-US" sz="1750" dirty="0">
+                <a:latin typeface="Times New Roman" panose="02020603050405020304" pitchFamily="18" charset="0"/>
+                <a:cs typeface="Times New Roman" panose="02020603050405020304" pitchFamily="18" charset="0"/>
+              </a:rPr>
               <a:t>Real-time reporting</a:t>
             </a:r>
           </a:p>
           <a:p>
-            <a:endParaRPr lang="en-US" sz="1750" dirty="0"/>
+            <a:endParaRPr lang="en-US" sz="1750" dirty="0">
+              <a:latin typeface="Times New Roman" panose="02020603050405020304" pitchFamily="18" charset="0"/>
+              <a:cs typeface="Times New Roman" panose="02020603050405020304" pitchFamily="18" charset="0"/>
+            </a:endParaRPr>
           </a:p>
         </p:txBody>
       </p:sp>
@@ -7318,18 +7325,27 @@
           <a:lstStyle/>
           <a:p>
             <a:r>
-              <a:rPr lang="en-US" dirty="0"/>
+              <a:rPr lang="en-US" dirty="0">
+                <a:latin typeface="Times New Roman" panose="02020603050405020304" pitchFamily="18" charset="0"/>
+                <a:cs typeface="Times New Roman" panose="02020603050405020304" pitchFamily="18" charset="0"/>
+              </a:rPr>
               <a:t>The system successfully automates inventory operations by integrating stock management, sales analysis, financial computation, and visualization into a single platform.</a:t>
             </a:r>
           </a:p>
           <a:p>
             <a:r>
-              <a:rPr lang="en-US" dirty="0"/>
+              <a:rPr lang="en-US" dirty="0">
+                <a:latin typeface="Times New Roman" panose="02020603050405020304" pitchFamily="18" charset="0"/>
+                <a:cs typeface="Times New Roman" panose="02020603050405020304" pitchFamily="18" charset="0"/>
+              </a:rPr>
               <a:t>The system enhances efficiency, minimizes human errors, supports timely inventory replenishment, and provides real-time insights for better business decisions.</a:t>
             </a:r>
           </a:p>
           <a:p>
-            <a:endParaRPr lang="en-US" dirty="0"/>
+            <a:endParaRPr lang="en-US" dirty="0">
+              <a:latin typeface="Times New Roman" panose="02020603050405020304" pitchFamily="18" charset="0"/>
+              <a:cs typeface="Times New Roman" panose="02020603050405020304" pitchFamily="18" charset="0"/>
+            </a:endParaRPr>
           </a:p>
         </p:txBody>
       </p:sp>
@@ -7418,57 +7434,87 @@
           <a:lstStyle/>
           <a:p>
             <a:r>
-              <a:rPr lang="en-US" dirty="0"/>
+              <a:rPr lang="en-US" dirty="0">
+                <a:latin typeface="Times New Roman" panose="02020603050405020304" pitchFamily="18" charset="0"/>
+                <a:cs typeface="Times New Roman" panose="02020603050405020304" pitchFamily="18" charset="0"/>
+              </a:rPr>
               <a:t>Cloud database integration </a:t>
             </a:r>
           </a:p>
           <a:p>
             <a:r>
-              <a:rPr lang="en-US" dirty="0"/>
+              <a:rPr lang="en-US" dirty="0">
+                <a:latin typeface="Times New Roman" panose="02020603050405020304" pitchFamily="18" charset="0"/>
+                <a:cs typeface="Times New Roman" panose="02020603050405020304" pitchFamily="18" charset="0"/>
+              </a:rPr>
               <a:t>Barcode scanning QR Code support </a:t>
             </a:r>
           </a:p>
           <a:p>
             <a:r>
-              <a:rPr lang="en-US" dirty="0"/>
+              <a:rPr lang="en-US" dirty="0">
+                <a:latin typeface="Times New Roman" panose="02020603050405020304" pitchFamily="18" charset="0"/>
+                <a:cs typeface="Times New Roman" panose="02020603050405020304" pitchFamily="18" charset="0"/>
+              </a:rPr>
               <a:t>Web-based deployment </a:t>
             </a:r>
           </a:p>
           <a:p>
             <a:r>
-              <a:rPr lang="en-US" dirty="0"/>
+              <a:rPr lang="en-US" dirty="0">
+                <a:latin typeface="Times New Roman" panose="02020603050405020304" pitchFamily="18" charset="0"/>
+                <a:cs typeface="Times New Roman" panose="02020603050405020304" pitchFamily="18" charset="0"/>
+              </a:rPr>
               <a:t>Mobile application </a:t>
             </a:r>
           </a:p>
           <a:p>
             <a:r>
-              <a:rPr lang="en-US" dirty="0"/>
+              <a:rPr lang="en-US" dirty="0">
+                <a:latin typeface="Times New Roman" panose="02020603050405020304" pitchFamily="18" charset="0"/>
+                <a:cs typeface="Times New Roman" panose="02020603050405020304" pitchFamily="18" charset="0"/>
+              </a:rPr>
               <a:t>Multi-user authentication </a:t>
             </a:r>
           </a:p>
           <a:p>
             <a:r>
-              <a:rPr lang="en-US" dirty="0"/>
+              <a:rPr lang="en-US" dirty="0">
+                <a:latin typeface="Times New Roman" panose="02020603050405020304" pitchFamily="18" charset="0"/>
+                <a:cs typeface="Times New Roman" panose="02020603050405020304" pitchFamily="18" charset="0"/>
+              </a:rPr>
               <a:t>AI demand forecasting </a:t>
             </a:r>
           </a:p>
           <a:p>
             <a:r>
-              <a:rPr lang="en-US" dirty="0"/>
+              <a:rPr lang="en-US" dirty="0">
+                <a:latin typeface="Times New Roman" panose="02020603050405020304" pitchFamily="18" charset="0"/>
+                <a:cs typeface="Times New Roman" panose="02020603050405020304" pitchFamily="18" charset="0"/>
+              </a:rPr>
               <a:t>Email/SMS inventory alerts </a:t>
             </a:r>
           </a:p>
           <a:p>
             <a:r>
-              <a:rPr lang="en-US" dirty="0"/>
+              <a:rPr lang="en-US" dirty="0">
+                <a:latin typeface="Times New Roman" panose="02020603050405020304" pitchFamily="18" charset="0"/>
+                <a:cs typeface="Times New Roman" panose="02020603050405020304" pitchFamily="18" charset="0"/>
+              </a:rPr>
               <a:t>Interactive dashboards (Power BI or </a:t>
             </a:r>
             <a:r>
-              <a:rPr lang="en-US" dirty="0" err="1"/>
+              <a:rPr lang="en-US" dirty="0" err="1">
+                <a:latin typeface="Times New Roman" panose="02020603050405020304" pitchFamily="18" charset="0"/>
+                <a:cs typeface="Times New Roman" panose="02020603050405020304" pitchFamily="18" charset="0"/>
+              </a:rPr>
               <a:t>Plotly</a:t>
             </a:r>
             <a:r>
-              <a:rPr lang="en-US" dirty="0"/>
+              <a:rPr lang="en-US" dirty="0">
+                <a:latin typeface="Times New Roman" panose="02020603050405020304" pitchFamily="18" charset="0"/>
+                <a:cs typeface="Times New Roman" panose="02020603050405020304" pitchFamily="18" charset="0"/>
+              </a:rPr>
               <a:t>)</a:t>
             </a:r>
           </a:p>
@@ -8385,42 +8431,63 @@
               <a:buNone/>
             </a:pPr>
             <a:r>
-              <a:rPr lang="en-US" dirty="0"/>
+              <a:rPr lang="en-US" dirty="0">
+                <a:latin typeface="Times New Roman" panose="02020603050405020304" pitchFamily="18" charset="0"/>
+                <a:cs typeface="Times New Roman" panose="02020603050405020304" pitchFamily="18" charset="0"/>
+              </a:rPr>
               <a:t>The system benefits:</a:t>
             </a:r>
           </a:p>
           <a:p>
             <a:r>
-              <a:rPr lang="en-US" dirty="0"/>
+              <a:rPr lang="en-US" dirty="0">
+                <a:latin typeface="Times New Roman" panose="02020603050405020304" pitchFamily="18" charset="0"/>
+                <a:cs typeface="Times New Roman" panose="02020603050405020304" pitchFamily="18" charset="0"/>
+              </a:rPr>
               <a:t>Small and Medium Enterprises (SMEs) </a:t>
             </a:r>
           </a:p>
           <a:p>
             <a:r>
-              <a:rPr lang="en-US" dirty="0"/>
+              <a:rPr lang="en-US" dirty="0">
+                <a:latin typeface="Times New Roman" panose="02020603050405020304" pitchFamily="18" charset="0"/>
+                <a:cs typeface="Times New Roman" panose="02020603050405020304" pitchFamily="18" charset="0"/>
+              </a:rPr>
               <a:t>Retail stores </a:t>
             </a:r>
           </a:p>
           <a:p>
             <a:r>
-              <a:rPr lang="en-US" dirty="0"/>
+              <a:rPr lang="en-US" dirty="0">
+                <a:latin typeface="Times New Roman" panose="02020603050405020304" pitchFamily="18" charset="0"/>
+                <a:cs typeface="Times New Roman" panose="02020603050405020304" pitchFamily="18" charset="0"/>
+              </a:rPr>
               <a:t>Warehouses </a:t>
             </a:r>
           </a:p>
           <a:p>
             <a:r>
-              <a:rPr lang="en-US" dirty="0"/>
+              <a:rPr lang="en-US" dirty="0">
+                <a:latin typeface="Times New Roman" panose="02020603050405020304" pitchFamily="18" charset="0"/>
+                <a:cs typeface="Times New Roman" panose="02020603050405020304" pitchFamily="18" charset="0"/>
+              </a:rPr>
               <a:t>Pharmacies </a:t>
             </a:r>
           </a:p>
           <a:p>
             <a:r>
-              <a:rPr lang="en-US" dirty="0"/>
+              <a:rPr lang="en-US" dirty="0">
+                <a:latin typeface="Times New Roman" panose="02020603050405020304" pitchFamily="18" charset="0"/>
+                <a:cs typeface="Times New Roman" panose="02020603050405020304" pitchFamily="18" charset="0"/>
+              </a:rPr>
               <a:t>Supermarkets</a:t>
             </a:r>
           </a:p>
           <a:p>
-            <a:endParaRPr lang="en-US" dirty="0"/>
+            <a:endParaRPr lang="en-US" dirty="0">
+              <a:latin typeface="Times New Roman" panose="02020603050405020304" pitchFamily="18" charset="0"/>
+              <a:cs typeface="Times New Roman" panose="02020603050405020304" pitchFamily="18" charset="0"/>
+            </a:endParaRPr>
           </a:p>
         </p:txBody>
       </p:sp>
@@ -8504,55 +8571,70 @@
         <p:spPr/>
         <p:txBody>
           <a:bodyPr>
-            <a:normAutofit fontScale="92500" lnSpcReduction="20000"/>
+            <a:normAutofit lnSpcReduction="10000"/>
           </a:bodyPr>
           <a:lstStyle/>
           <a:p>
             <a:r>
-              <a:rPr lang="en-US" dirty="0"/>
+              <a:rPr lang="en-US" dirty="0">
+                <a:latin typeface="Times New Roman" panose="02020603050405020304" pitchFamily="18" charset="0"/>
+                <a:cs typeface="Times New Roman" panose="02020603050405020304" pitchFamily="18" charset="0"/>
+              </a:rPr>
               <a:t>Accurate inventory records </a:t>
             </a:r>
           </a:p>
           <a:p>
             <a:r>
-              <a:rPr lang="en-US" dirty="0"/>
+              <a:rPr lang="en-US" dirty="0">
+                <a:latin typeface="Times New Roman" panose="02020603050405020304" pitchFamily="18" charset="0"/>
+                <a:cs typeface="Times New Roman" panose="02020603050405020304" pitchFamily="18" charset="0"/>
+              </a:rPr>
               <a:t>Faster stock monitoring </a:t>
             </a:r>
           </a:p>
           <a:p>
             <a:r>
-              <a:rPr lang="en-US" dirty="0"/>
+              <a:rPr lang="en-US" dirty="0">
+                <a:latin typeface="Times New Roman" panose="02020603050405020304" pitchFamily="18" charset="0"/>
+                <a:cs typeface="Times New Roman" panose="02020603050405020304" pitchFamily="18" charset="0"/>
+              </a:rPr>
               <a:t>Reduced paperwork </a:t>
             </a:r>
           </a:p>
           <a:p>
             <a:r>
-              <a:rPr lang="en-US" dirty="0"/>
+              <a:rPr lang="en-US" dirty="0">
+                <a:latin typeface="Times New Roman" panose="02020603050405020304" pitchFamily="18" charset="0"/>
+                <a:cs typeface="Times New Roman" panose="02020603050405020304" pitchFamily="18" charset="0"/>
+              </a:rPr>
               <a:t>Improved productivity </a:t>
             </a:r>
           </a:p>
           <a:p>
             <a:r>
-              <a:rPr lang="en-US" dirty="0"/>
+              <a:rPr lang="en-US" dirty="0">
+                <a:latin typeface="Times New Roman" panose="02020603050405020304" pitchFamily="18" charset="0"/>
+                <a:cs typeface="Times New Roman" panose="02020603050405020304" pitchFamily="18" charset="0"/>
+              </a:rPr>
               <a:t>Better financial analysis </a:t>
             </a:r>
           </a:p>
           <a:p>
             <a:r>
-              <a:rPr lang="en-US" dirty="0"/>
+              <a:rPr lang="en-US" dirty="0">
+                <a:latin typeface="Times New Roman" panose="02020603050405020304" pitchFamily="18" charset="0"/>
+                <a:cs typeface="Times New Roman" panose="02020603050405020304" pitchFamily="18" charset="0"/>
+              </a:rPr>
               <a:t>Easy business monitoring </a:t>
             </a:r>
           </a:p>
           <a:p>
             <a:r>
-              <a:rPr lang="en-US" dirty="0"/>
-              <a:t>Supports informed decision-making </a:t>
-            </a:r>
-          </a:p>
-          <a:p>
-            <a:r>
-              <a:rPr lang="en-US" dirty="0"/>
-              <a:t>User-friendly interface </a:t>
+              <a:rPr lang="en-US" dirty="0">
+                <a:latin typeface="Times New Roman" panose="02020603050405020304" pitchFamily="18" charset="0"/>
+                <a:cs typeface="Times New Roman" panose="02020603050405020304" pitchFamily="18" charset="0"/>
+              </a:rPr>
+              <a:t>Supports informed decision-making  </a:t>
             </a:r>
           </a:p>
         </p:txBody>

--- a/AYOMIKUN PYTHON SYNTHAX.pptx
+++ b/AYOMIKUN PYTHON SYNTHAX.pptx
@@ -6,26 +6,30 @@
   </p:sldMasterIdLst>
   <p:sldIdLst>
     <p:sldId id="256" r:id="rId2"/>
-    <p:sldId id="269" r:id="rId3"/>
-    <p:sldId id="257" r:id="rId4"/>
-    <p:sldId id="258" r:id="rId5"/>
-    <p:sldId id="259" r:id="rId6"/>
-    <p:sldId id="260" r:id="rId7"/>
-    <p:sldId id="261" r:id="rId8"/>
-    <p:sldId id="262" r:id="rId9"/>
-    <p:sldId id="263" r:id="rId10"/>
-    <p:sldId id="264" r:id="rId11"/>
-    <p:sldId id="265" r:id="rId12"/>
-    <p:sldId id="266" r:id="rId13"/>
-    <p:sldId id="267" r:id="rId14"/>
-    <p:sldId id="268" r:id="rId15"/>
-    <p:sldId id="270" r:id="rId16"/>
-    <p:sldId id="271" r:id="rId17"/>
-    <p:sldId id="272" r:id="rId18"/>
-    <p:sldId id="273" r:id="rId19"/>
-    <p:sldId id="274" r:id="rId20"/>
-    <p:sldId id="276" r:id="rId21"/>
-    <p:sldId id="275" r:id="rId22"/>
+    <p:sldId id="278" r:id="rId3"/>
+    <p:sldId id="279" r:id="rId4"/>
+    <p:sldId id="269" r:id="rId5"/>
+    <p:sldId id="257" r:id="rId6"/>
+    <p:sldId id="258" r:id="rId7"/>
+    <p:sldId id="259" r:id="rId8"/>
+    <p:sldId id="260" r:id="rId9"/>
+    <p:sldId id="261" r:id="rId10"/>
+    <p:sldId id="262" r:id="rId11"/>
+    <p:sldId id="263" r:id="rId12"/>
+    <p:sldId id="264" r:id="rId13"/>
+    <p:sldId id="265" r:id="rId14"/>
+    <p:sldId id="266" r:id="rId15"/>
+    <p:sldId id="267" r:id="rId16"/>
+    <p:sldId id="277" r:id="rId17"/>
+    <p:sldId id="268" r:id="rId18"/>
+    <p:sldId id="270" r:id="rId19"/>
+    <p:sldId id="271" r:id="rId20"/>
+    <p:sldId id="272" r:id="rId21"/>
+    <p:sldId id="273" r:id="rId22"/>
+    <p:sldId id="274" r:id="rId23"/>
+    <p:sldId id="276" r:id="rId24"/>
+    <p:sldId id="280" r:id="rId25"/>
+    <p:sldId id="275" r:id="rId26"/>
   </p:sldIdLst>
   <p:sldSz cx="12192000" cy="6858000"/>
   <p:notesSz cx="6858000" cy="9144000"/>
@@ -463,7 +467,7 @@
           <a:p>
             <a:fld id="{D6D111B7-D0BA-4F94-AA57-BC0CCBE54C47}" type="datetimeFigureOut">
               <a:rPr lang="en-US" smtClean="0"/>
-              <a:t>7/7/2026</a:t>
+              <a:t>7/8/2026</a:t>
             </a:fld>
             <a:endParaRPr lang="en-US"/>
           </a:p>
@@ -787,7 +791,7 @@
           <a:p>
             <a:fld id="{D6D111B7-D0BA-4F94-AA57-BC0CCBE54C47}" type="datetimeFigureOut">
               <a:rPr lang="en-US" smtClean="0"/>
-              <a:t>7/7/2026</a:t>
+              <a:t>7/8/2026</a:t>
             </a:fld>
             <a:endParaRPr lang="en-US"/>
           </a:p>
@@ -1035,7 +1039,7 @@
           <a:p>
             <a:fld id="{D6D111B7-D0BA-4F94-AA57-BC0CCBE54C47}" type="datetimeFigureOut">
               <a:rPr lang="en-US" smtClean="0"/>
-              <a:t>7/7/2026</a:t>
+              <a:t>7/8/2026</a:t>
             </a:fld>
             <a:endParaRPr lang="en-US"/>
           </a:p>
@@ -1374,7 +1378,7 @@
           <a:p>
             <a:fld id="{D6D111B7-D0BA-4F94-AA57-BC0CCBE54C47}" type="datetimeFigureOut">
               <a:rPr lang="en-US" smtClean="0"/>
-              <a:t>7/7/2026</a:t>
+              <a:t>7/8/2026</a:t>
             </a:fld>
             <a:endParaRPr lang="en-US"/>
           </a:p>
@@ -1721,7 +1725,7 @@
           <a:p>
             <a:fld id="{D6D111B7-D0BA-4F94-AA57-BC0CCBE54C47}" type="datetimeFigureOut">
               <a:rPr lang="en-US" smtClean="0"/>
-              <a:t>7/7/2026</a:t>
+              <a:t>7/8/2026</a:t>
             </a:fld>
             <a:endParaRPr lang="en-US"/>
           </a:p>
@@ -2095,7 +2099,7 @@
           <a:p>
             <a:fld id="{D6D111B7-D0BA-4F94-AA57-BC0CCBE54C47}" type="datetimeFigureOut">
               <a:rPr lang="en-US" smtClean="0"/>
-              <a:t>7/7/2026</a:t>
+              <a:t>7/8/2026</a:t>
             </a:fld>
             <a:endParaRPr lang="en-US"/>
           </a:p>
@@ -2565,7 +2569,7 @@
           <a:p>
             <a:fld id="{D6D111B7-D0BA-4F94-AA57-BC0CCBE54C47}" type="datetimeFigureOut">
               <a:rPr lang="en-US" smtClean="0"/>
-              <a:t>7/7/2026</a:t>
+              <a:t>7/8/2026</a:t>
             </a:fld>
             <a:endParaRPr lang="en-US"/>
           </a:p>
@@ -2770,7 +2774,7 @@
           <a:p>
             <a:fld id="{D6D111B7-D0BA-4F94-AA57-BC0CCBE54C47}" type="datetimeFigureOut">
               <a:rPr lang="en-US" smtClean="0"/>
-              <a:t>7/7/2026</a:t>
+              <a:t>7/8/2026</a:t>
             </a:fld>
             <a:endParaRPr lang="en-US"/>
           </a:p>
@@ -2981,7 +2985,7 @@
           <a:p>
             <a:fld id="{D6D111B7-D0BA-4F94-AA57-BC0CCBE54C47}" type="datetimeFigureOut">
               <a:rPr lang="en-US" smtClean="0"/>
-              <a:t>7/7/2026</a:t>
+              <a:t>7/8/2026</a:t>
             </a:fld>
             <a:endParaRPr lang="en-US"/>
           </a:p>
@@ -3213,7 +3217,7 @@
           <a:p>
             <a:fld id="{D6D111B7-D0BA-4F94-AA57-BC0CCBE54C47}" type="datetimeFigureOut">
               <a:rPr lang="en-US" smtClean="0"/>
-              <a:t>7/7/2026</a:t>
+              <a:t>7/8/2026</a:t>
             </a:fld>
             <a:endParaRPr lang="en-US"/>
           </a:p>
@@ -3461,7 +3465,7 @@
           <a:p>
             <a:fld id="{D6D111B7-D0BA-4F94-AA57-BC0CCBE54C47}" type="datetimeFigureOut">
               <a:rPr lang="en-US" smtClean="0"/>
-              <a:t>7/7/2026</a:t>
+              <a:t>7/8/2026</a:t>
             </a:fld>
             <a:endParaRPr lang="en-US"/>
           </a:p>
@@ -3759,7 +3763,7 @@
           <a:p>
             <a:fld id="{D6D111B7-D0BA-4F94-AA57-BC0CCBE54C47}" type="datetimeFigureOut">
               <a:rPr lang="en-US" smtClean="0"/>
-              <a:t>7/7/2026</a:t>
+              <a:t>7/8/2026</a:t>
             </a:fld>
             <a:endParaRPr lang="en-US"/>
           </a:p>
@@ -4153,7 +4157,7 @@
           <a:p>
             <a:fld id="{D6D111B7-D0BA-4F94-AA57-BC0CCBE54C47}" type="datetimeFigureOut">
               <a:rPr lang="en-US" smtClean="0"/>
-              <a:t>7/7/2026</a:t>
+              <a:t>7/8/2026</a:t>
             </a:fld>
             <a:endParaRPr lang="en-US"/>
           </a:p>
@@ -4302,7 +4306,7 @@
           <a:p>
             <a:fld id="{D6D111B7-D0BA-4F94-AA57-BC0CCBE54C47}" type="datetimeFigureOut">
               <a:rPr lang="en-US" smtClean="0"/>
-              <a:t>7/7/2026</a:t>
+              <a:t>7/8/2026</a:t>
             </a:fld>
             <a:endParaRPr lang="en-US"/>
           </a:p>
@@ -4428,7 +4432,7 @@
           <a:p>
             <a:fld id="{D6D111B7-D0BA-4F94-AA57-BC0CCBE54C47}" type="datetimeFigureOut">
               <a:rPr lang="en-US" smtClean="0"/>
-              <a:t>7/7/2026</a:t>
+              <a:t>7/8/2026</a:t>
             </a:fld>
             <a:endParaRPr lang="en-US"/>
           </a:p>
@@ -4683,7 +4687,7 @@
           <a:p>
             <a:fld id="{D6D111B7-D0BA-4F94-AA57-BC0CCBE54C47}" type="datetimeFigureOut">
               <a:rPr lang="en-US" smtClean="0"/>
-              <a:t>7/7/2026</a:t>
+              <a:t>7/8/2026</a:t>
             </a:fld>
             <a:endParaRPr lang="en-US"/>
           </a:p>
@@ -4998,7 +5002,7 @@
           <a:p>
             <a:fld id="{D6D111B7-D0BA-4F94-AA57-BC0CCBE54C47}" type="datetimeFigureOut">
               <a:rPr lang="en-US" smtClean="0"/>
-              <a:t>7/7/2026</a:t>
+              <a:t>7/8/2026</a:t>
             </a:fld>
             <a:endParaRPr lang="en-US"/>
           </a:p>
@@ -5355,7 +5359,7 @@
           <a:p>
             <a:fld id="{D6D111B7-D0BA-4F94-AA57-BC0CCBE54C47}" type="datetimeFigureOut">
               <a:rPr lang="en-US" smtClean="0"/>
-              <a:t>7/7/2026</a:t>
+              <a:t>7/8/2026</a:t>
             </a:fld>
             <a:endParaRPr lang="en-US"/>
           </a:p>
@@ -6036,7 +6040,7 @@
           <p:cNvPr id="2" name="Title 1">
             <a:extLst>
               <a:ext uri="{FF2B5EF4-FFF2-40B4-BE49-F238E27FC236}">
-                <a16:creationId xmlns:a16="http://schemas.microsoft.com/office/drawing/2014/main" id="{F7CBB0CC-C1EC-AC85-896C-C412672C4CC2}"/>
+                <a16:creationId xmlns:a16="http://schemas.microsoft.com/office/drawing/2014/main" id="{187FD446-6B9A-CF56-5113-5BB60FA05A9B}"/>
               </a:ext>
             </a:extLst>
           </p:cNvPr>
@@ -6057,7 +6061,7 @@
                 <a:latin typeface="Times New Roman" panose="02020603050405020304" pitchFamily="18" charset="0"/>
                 <a:cs typeface="Times New Roman" panose="02020603050405020304" pitchFamily="18" charset="0"/>
               </a:rPr>
-              <a:t>Methodology</a:t>
+              <a:t>Scope of the Study</a:t>
             </a:r>
           </a:p>
         </p:txBody>
@@ -6067,7 +6071,7 @@
           <p:cNvPr id="3" name="Content Placeholder 2">
             <a:extLst>
               <a:ext uri="{FF2B5EF4-FFF2-40B4-BE49-F238E27FC236}">
-                <a16:creationId xmlns:a16="http://schemas.microsoft.com/office/drawing/2014/main" id="{47137AEE-3AA8-50E3-6098-37BEC5469B4D}"/>
+                <a16:creationId xmlns:a16="http://schemas.microsoft.com/office/drawing/2014/main" id="{20DF6BCA-CD4F-98E4-FDA7-1FADEB2A9FD8}"/>
               </a:ext>
             </a:extLst>
           </p:cNvPr>
@@ -6078,22 +6082,18 @@
             <p:ph idx="1"/>
           </p:nvPr>
         </p:nvSpPr>
-        <p:spPr/>
+        <p:spPr>
+          <a:xfrm>
+            <a:off x="1295401" y="2556931"/>
+            <a:ext cx="9601196" cy="3700649"/>
+          </a:xfrm>
+        </p:spPr>
         <p:txBody>
           <a:bodyPr>
-            <a:normAutofit fontScale="92500" lnSpcReduction="20000"/>
+            <a:normAutofit fontScale="85000" lnSpcReduction="20000"/>
           </a:bodyPr>
           <a:lstStyle/>
           <a:p>
-            <a:r>
-              <a:rPr lang="en-US" b="1" dirty="0">
-                <a:latin typeface="Times New Roman" panose="02020603050405020304" pitchFamily="18" charset="0"/>
-                <a:cs typeface="Times New Roman" panose="02020603050405020304" pitchFamily="18" charset="0"/>
-              </a:rPr>
-              <a:t>Development Methodology</a:t>
-            </a:r>
-          </a:p>
-          <a:p>
             <a:pPr marL="0" indent="0">
               <a:buNone/>
             </a:pPr>
@@ -6102,61 +6102,79 @@
                 <a:latin typeface="Times New Roman" panose="02020603050405020304" pitchFamily="18" charset="0"/>
                 <a:cs typeface="Times New Roman" panose="02020603050405020304" pitchFamily="18" charset="0"/>
               </a:rPr>
-              <a:t>The project followed these stages:</a:t>
-            </a:r>
-          </a:p>
-          <a:p>
-            <a:r>
-              <a:rPr lang="en-US" dirty="0">
-                <a:latin typeface="Times New Roman" panose="02020603050405020304" pitchFamily="18" charset="0"/>
-                <a:cs typeface="Times New Roman" panose="02020603050405020304" pitchFamily="18" charset="0"/>
-              </a:rPr>
-              <a:t>Requirement Analysis </a:t>
-            </a:r>
-          </a:p>
-          <a:p>
-            <a:r>
-              <a:rPr lang="en-US" dirty="0">
-                <a:latin typeface="Times New Roman" panose="02020603050405020304" pitchFamily="18" charset="0"/>
-                <a:cs typeface="Times New Roman" panose="02020603050405020304" pitchFamily="18" charset="0"/>
-              </a:rPr>
-              <a:t>System Design </a:t>
-            </a:r>
-          </a:p>
-          <a:p>
-            <a:r>
-              <a:rPr lang="en-US" dirty="0">
-                <a:latin typeface="Times New Roman" panose="02020603050405020304" pitchFamily="18" charset="0"/>
-                <a:cs typeface="Times New Roman" panose="02020603050405020304" pitchFamily="18" charset="0"/>
-              </a:rPr>
-              <a:t>Database Development </a:t>
-            </a:r>
-          </a:p>
-          <a:p>
-            <a:r>
-              <a:rPr lang="en-US" dirty="0">
-                <a:latin typeface="Times New Roman" panose="02020603050405020304" pitchFamily="18" charset="0"/>
-                <a:cs typeface="Times New Roman" panose="02020603050405020304" pitchFamily="18" charset="0"/>
-              </a:rPr>
-              <a:t>Python Implementation </a:t>
-            </a:r>
-          </a:p>
-          <a:p>
-            <a:r>
-              <a:rPr lang="en-US" dirty="0">
-                <a:latin typeface="Times New Roman" panose="02020603050405020304" pitchFamily="18" charset="0"/>
-                <a:cs typeface="Times New Roman" panose="02020603050405020304" pitchFamily="18" charset="0"/>
-              </a:rPr>
-              <a:t>Testing </a:t>
-            </a:r>
-          </a:p>
-          <a:p>
-            <a:r>
-              <a:rPr lang="en-US" dirty="0">
-                <a:latin typeface="Times New Roman" panose="02020603050405020304" pitchFamily="18" charset="0"/>
-                <a:cs typeface="Times New Roman" panose="02020603050405020304" pitchFamily="18" charset="0"/>
-              </a:rPr>
-              <a:t>Evaluation</a:t>
+              <a:t>The system provides:</a:t>
+            </a:r>
+          </a:p>
+          <a:p>
+            <a:r>
+              <a:rPr lang="en-US" dirty="0">
+                <a:latin typeface="Times New Roman" panose="02020603050405020304" pitchFamily="18" charset="0"/>
+                <a:cs typeface="Times New Roman" panose="02020603050405020304" pitchFamily="18" charset="0"/>
+              </a:rPr>
+              <a:t>Product registration </a:t>
+            </a:r>
+          </a:p>
+          <a:p>
+            <a:r>
+              <a:rPr lang="en-US" dirty="0">
+                <a:latin typeface="Times New Roman" panose="02020603050405020304" pitchFamily="18" charset="0"/>
+                <a:cs typeface="Times New Roman" panose="02020603050405020304" pitchFamily="18" charset="0"/>
+              </a:rPr>
+              <a:t>Inventory monitoring </a:t>
+            </a:r>
+          </a:p>
+          <a:p>
+            <a:r>
+              <a:rPr lang="en-US" dirty="0">
+                <a:latin typeface="Times New Roman" panose="02020603050405020304" pitchFamily="18" charset="0"/>
+                <a:cs typeface="Times New Roman" panose="02020603050405020304" pitchFamily="18" charset="0"/>
+              </a:rPr>
+              <a:t>Sales recording </a:t>
+            </a:r>
+          </a:p>
+          <a:p>
+            <a:r>
+              <a:rPr lang="en-US" dirty="0">
+                <a:latin typeface="Times New Roman" panose="02020603050405020304" pitchFamily="18" charset="0"/>
+                <a:cs typeface="Times New Roman" panose="02020603050405020304" pitchFamily="18" charset="0"/>
+              </a:rPr>
+              <a:t>Income calculation </a:t>
+            </a:r>
+          </a:p>
+          <a:p>
+            <a:r>
+              <a:rPr lang="en-US" dirty="0">
+                <a:latin typeface="Times New Roman" panose="02020603050405020304" pitchFamily="18" charset="0"/>
+                <a:cs typeface="Times New Roman" panose="02020603050405020304" pitchFamily="18" charset="0"/>
+              </a:rPr>
+              <a:t>Profit computation </a:t>
+            </a:r>
+          </a:p>
+          <a:p>
+            <a:r>
+              <a:rPr lang="en-US" dirty="0">
+                <a:latin typeface="Times New Roman" panose="02020603050405020304" pitchFamily="18" charset="0"/>
+                <a:cs typeface="Times New Roman" panose="02020603050405020304" pitchFamily="18" charset="0"/>
+              </a:rPr>
+              <a:t>Low-stock alerts </a:t>
+            </a:r>
+          </a:p>
+          <a:p>
+            <a:r>
+              <a:rPr lang="en-US" dirty="0">
+                <a:latin typeface="Times New Roman" panose="02020603050405020304" pitchFamily="18" charset="0"/>
+                <a:cs typeface="Times New Roman" panose="02020603050405020304" pitchFamily="18" charset="0"/>
+              </a:rPr>
+              <a:t>Dashboard visualization </a:t>
+            </a:r>
+          </a:p>
+          <a:p>
+            <a:r>
+              <a:rPr lang="en-US" dirty="0">
+                <a:latin typeface="Times New Roman" panose="02020603050405020304" pitchFamily="18" charset="0"/>
+                <a:cs typeface="Times New Roman" panose="02020603050405020304" pitchFamily="18" charset="0"/>
+              </a:rPr>
+              <a:t>Business performance reporting</a:t>
             </a:r>
           </a:p>
           <a:p>
@@ -6170,7 +6188,7 @@
     </p:spTree>
     <p:extLst>
       <p:ext uri="{BB962C8B-B14F-4D97-AF65-F5344CB8AC3E}">
-        <p14:creationId xmlns:p14="http://schemas.microsoft.com/office/powerpoint/2010/main" val="635706677"/>
+        <p14:creationId xmlns:p14="http://schemas.microsoft.com/office/powerpoint/2010/main" val="1624596919"/>
       </p:ext>
     </p:extLst>
   </p:cSld>
@@ -6202,7 +6220,7 @@
           <p:cNvPr id="2" name="Title 1">
             <a:extLst>
               <a:ext uri="{FF2B5EF4-FFF2-40B4-BE49-F238E27FC236}">
-                <a16:creationId xmlns:a16="http://schemas.microsoft.com/office/drawing/2014/main" id="{3166D65F-BA08-B49D-83F5-33F4713FA23E}"/>
+                <a16:creationId xmlns:a16="http://schemas.microsoft.com/office/drawing/2014/main" id="{58347B78-592F-8C00-8F19-B9C664D0FD65}"/>
               </a:ext>
             </a:extLst>
           </p:cNvPr>
@@ -6223,9 +6241,8 @@
                 <a:latin typeface="Times New Roman" panose="02020603050405020304" pitchFamily="18" charset="0"/>
                 <a:cs typeface="Times New Roman" panose="02020603050405020304" pitchFamily="18" charset="0"/>
               </a:rPr>
-              <a:t>Methodology</a:t>
-            </a:r>
-            <a:endParaRPr lang="en-US" dirty="0"/>
+              <a:t>Literature Review</a:t>
+            </a:r>
           </a:p>
         </p:txBody>
       </p:sp>
@@ -6234,7 +6251,7 @@
           <p:cNvPr id="3" name="Content Placeholder 2">
             <a:extLst>
               <a:ext uri="{FF2B5EF4-FFF2-40B4-BE49-F238E27FC236}">
-                <a16:creationId xmlns:a16="http://schemas.microsoft.com/office/drawing/2014/main" id="{40B89845-9133-59CB-650F-DBF8FF271B0E}"/>
+                <a16:creationId xmlns:a16="http://schemas.microsoft.com/office/drawing/2014/main" id="{8DFBDBE9-ED59-D858-8188-C2738396677D}"/>
               </a:ext>
             </a:extLst>
           </p:cNvPr>
@@ -6260,16 +6277,52 @@
                 <a:latin typeface="Times New Roman" panose="02020603050405020304" pitchFamily="18" charset="0"/>
                 <a:cs typeface="Times New Roman" panose="02020603050405020304" pitchFamily="18" charset="0"/>
               </a:rPr>
-              <a:t>Programming Language:</a:t>
-            </a:r>
-          </a:p>
-          <a:p>
-            <a:r>
-              <a:rPr lang="en-US" dirty="0">
-                <a:latin typeface="Times New Roman" panose="02020603050405020304" pitchFamily="18" charset="0"/>
-                <a:cs typeface="Times New Roman" panose="02020603050405020304" pitchFamily="18" charset="0"/>
-              </a:rPr>
-              <a:t>Python </a:t>
+              <a:t>Previous inventory systems focused mainly on:</a:t>
+            </a:r>
+          </a:p>
+          <a:p>
+            <a:r>
+              <a:rPr lang="en-US" dirty="0">
+                <a:latin typeface="Times New Roman" panose="02020603050405020304" pitchFamily="18" charset="0"/>
+                <a:cs typeface="Times New Roman" panose="02020603050405020304" pitchFamily="18" charset="0"/>
+              </a:rPr>
+              <a:t>Manual record keeping </a:t>
+            </a:r>
+          </a:p>
+          <a:p>
+            <a:r>
+              <a:rPr lang="en-US" dirty="0">
+                <a:latin typeface="Times New Roman" panose="02020603050405020304" pitchFamily="18" charset="0"/>
+                <a:cs typeface="Times New Roman" panose="02020603050405020304" pitchFamily="18" charset="0"/>
+              </a:rPr>
+              <a:t>Spreadsheet management </a:t>
+            </a:r>
+          </a:p>
+          <a:p>
+            <a:r>
+              <a:rPr lang="en-US" dirty="0">
+                <a:latin typeface="Times New Roman" panose="02020603050405020304" pitchFamily="18" charset="0"/>
+                <a:cs typeface="Times New Roman" panose="02020603050405020304" pitchFamily="18" charset="0"/>
+              </a:rPr>
+              <a:t>Barcode systems </a:t>
+            </a:r>
+          </a:p>
+          <a:p>
+            <a:r>
+              <a:rPr lang="en-US" dirty="0">
+                <a:latin typeface="Times New Roman" panose="02020603050405020304" pitchFamily="18" charset="0"/>
+                <a:cs typeface="Times New Roman" panose="02020603050405020304" pitchFamily="18" charset="0"/>
+              </a:rPr>
+              <a:t>RFID technologies </a:t>
+            </a:r>
+          </a:p>
+          <a:p>
+            <a:r>
+              <a:rPr lang="en-US" dirty="0">
+                <a:latin typeface="Times New Roman" panose="02020603050405020304" pitchFamily="18" charset="0"/>
+                <a:cs typeface="Times New Roman" panose="02020603050405020304" pitchFamily="18" charset="0"/>
+              </a:rPr>
+              <a:t>Enterprise Resource Planning (ERP) </a:t>
             </a:r>
           </a:p>
           <a:p>
@@ -6281,66 +6334,21 @@
                 <a:latin typeface="Times New Roman" panose="02020603050405020304" pitchFamily="18" charset="0"/>
                 <a:cs typeface="Times New Roman" panose="02020603050405020304" pitchFamily="18" charset="0"/>
               </a:rPr>
-              <a:t>Libraries Used:</a:t>
-            </a:r>
-          </a:p>
-          <a:p>
-            <a:r>
-              <a:rPr lang="en-US" dirty="0">
-                <a:latin typeface="Times New Roman" panose="02020603050405020304" pitchFamily="18" charset="0"/>
-                <a:cs typeface="Times New Roman" panose="02020603050405020304" pitchFamily="18" charset="0"/>
-              </a:rPr>
-              <a:t>Pandas </a:t>
-            </a:r>
-          </a:p>
-          <a:p>
-            <a:r>
-              <a:rPr lang="en-US" dirty="0">
-                <a:latin typeface="Times New Roman" panose="02020603050405020304" pitchFamily="18" charset="0"/>
-                <a:cs typeface="Times New Roman" panose="02020603050405020304" pitchFamily="18" charset="0"/>
-              </a:rPr>
-              <a:t>NumPy </a:t>
-            </a:r>
-          </a:p>
-          <a:p>
-            <a:r>
-              <a:rPr lang="en-US" dirty="0">
-                <a:latin typeface="Times New Roman" panose="02020603050405020304" pitchFamily="18" charset="0"/>
-                <a:cs typeface="Times New Roman" panose="02020603050405020304" pitchFamily="18" charset="0"/>
-              </a:rPr>
-              <a:t>Matplotlib </a:t>
-            </a:r>
-          </a:p>
-          <a:p>
-            <a:pPr marL="0" indent="0">
-              <a:buNone/>
-            </a:pPr>
-            <a:r>
-              <a:rPr lang="en-US" dirty="0">
-                <a:latin typeface="Times New Roman" panose="02020603050405020304" pitchFamily="18" charset="0"/>
-                <a:cs typeface="Times New Roman" panose="02020603050405020304" pitchFamily="18" charset="0"/>
-              </a:rPr>
-              <a:t>Development Environment:</a:t>
-            </a:r>
-          </a:p>
-          <a:p>
-            <a:r>
-              <a:rPr lang="en-US" dirty="0">
-                <a:latin typeface="Times New Roman" panose="02020603050405020304" pitchFamily="18" charset="0"/>
-                <a:cs typeface="Times New Roman" panose="02020603050405020304" pitchFamily="18" charset="0"/>
-              </a:rPr>
-              <a:t>Jupyter Notebook </a:t>
-            </a:r>
-          </a:p>
-          <a:p>
-            <a:endParaRPr lang="en-US" dirty="0"/>
+              <a:t>Research shows that integrating inventory management with data visualization improves business performance and decision-making.</a:t>
+            </a:r>
+          </a:p>
+          <a:p>
+            <a:endParaRPr lang="en-US" dirty="0">
+              <a:latin typeface="Times New Roman" panose="02020603050405020304" pitchFamily="18" charset="0"/>
+              <a:cs typeface="Times New Roman" panose="02020603050405020304" pitchFamily="18" charset="0"/>
+            </a:endParaRPr>
           </a:p>
         </p:txBody>
       </p:sp>
     </p:spTree>
     <p:extLst>
       <p:ext uri="{BB962C8B-B14F-4D97-AF65-F5344CB8AC3E}">
-        <p14:creationId xmlns:p14="http://schemas.microsoft.com/office/powerpoint/2010/main" val="1655476587"/>
+        <p14:creationId xmlns:p14="http://schemas.microsoft.com/office/powerpoint/2010/main" val="3825717509"/>
       </p:ext>
     </p:extLst>
   </p:cSld>
@@ -6372,7 +6380,7 @@
           <p:cNvPr id="2" name="Title 1">
             <a:extLst>
               <a:ext uri="{FF2B5EF4-FFF2-40B4-BE49-F238E27FC236}">
-                <a16:creationId xmlns:a16="http://schemas.microsoft.com/office/drawing/2014/main" id="{C47C7A32-2008-BB0B-618A-6B2CA2F68BD4}"/>
+                <a16:creationId xmlns:a16="http://schemas.microsoft.com/office/drawing/2014/main" id="{F7CBB0CC-C1EC-AC85-896C-C412672C4CC2}"/>
               </a:ext>
             </a:extLst>
           </p:cNvPr>
@@ -6393,7 +6401,7 @@
                 <a:latin typeface="Times New Roman" panose="02020603050405020304" pitchFamily="18" charset="0"/>
                 <a:cs typeface="Times New Roman" panose="02020603050405020304" pitchFamily="18" charset="0"/>
               </a:rPr>
-              <a:t>System Architecture</a:t>
+              <a:t>Methodology</a:t>
             </a:r>
           </a:p>
         </p:txBody>
@@ -6403,7 +6411,7 @@
           <p:cNvPr id="3" name="Content Placeholder 2">
             <a:extLst>
               <a:ext uri="{FF2B5EF4-FFF2-40B4-BE49-F238E27FC236}">
-                <a16:creationId xmlns:a16="http://schemas.microsoft.com/office/drawing/2014/main" id="{8D5A35EF-1A0B-F342-2019-8E04301F7DEC}"/>
+                <a16:creationId xmlns:a16="http://schemas.microsoft.com/office/drawing/2014/main" id="{47137AEE-3AA8-50E3-6098-37BEC5469B4D}"/>
               </a:ext>
             </a:extLst>
           </p:cNvPr>
@@ -6417,172 +6425,82 @@
         <p:spPr/>
         <p:txBody>
           <a:bodyPr>
-            <a:normAutofit lnSpcReduction="10000"/>
+            <a:normAutofit fontScale="92500" lnSpcReduction="20000"/>
           </a:bodyPr>
           <a:lstStyle/>
           <a:p>
             <a:r>
-              <a:rPr lang="en-US" dirty="0">
-                <a:latin typeface="Times New Roman" panose="02020603050405020304" pitchFamily="18" charset="0"/>
-                <a:cs typeface="Times New Roman" panose="02020603050405020304" pitchFamily="18" charset="0"/>
-              </a:rPr>
-              <a:t>User  </a:t>
-            </a:r>
-            <a:r>
-              <a:rPr lang="en-US" dirty="0">
-                <a:latin typeface="Times New Roman" panose="02020603050405020304" pitchFamily="18" charset="0"/>
-                <a:cs typeface="Times New Roman" panose="02020603050405020304" pitchFamily="18" charset="0"/>
-                <a:sym typeface="Wingdings" panose="05000000000000000000" pitchFamily="2" charset="2"/>
-              </a:rPr>
-              <a:t></a:t>
-            </a:r>
-            <a:r>
-              <a:rPr lang="en-US" dirty="0">
-                <a:latin typeface="Times New Roman" panose="02020603050405020304" pitchFamily="18" charset="0"/>
-                <a:cs typeface="Times New Roman" panose="02020603050405020304" pitchFamily="18" charset="0"/>
-              </a:rPr>
-              <a:t> Inventory Database </a:t>
-            </a:r>
-            <a:r>
-              <a:rPr lang="en-US" dirty="0">
-                <a:latin typeface="Times New Roman" panose="02020603050405020304" pitchFamily="18" charset="0"/>
-                <a:cs typeface="Times New Roman" panose="02020603050405020304" pitchFamily="18" charset="0"/>
-                <a:sym typeface="Wingdings" panose="05000000000000000000" pitchFamily="2" charset="2"/>
-              </a:rPr>
-              <a:t></a:t>
-            </a:r>
-            <a:r>
-              <a:rPr lang="en-US" dirty="0">
-                <a:latin typeface="Times New Roman" panose="02020603050405020304" pitchFamily="18" charset="0"/>
-                <a:cs typeface="Times New Roman" panose="02020603050405020304" pitchFamily="18" charset="0"/>
-              </a:rPr>
-              <a:t> Python Processing Engine </a:t>
-            </a:r>
-            <a:r>
-              <a:rPr lang="en-US" dirty="0">
-                <a:latin typeface="Times New Roman" panose="02020603050405020304" pitchFamily="18" charset="0"/>
-                <a:cs typeface="Times New Roman" panose="02020603050405020304" pitchFamily="18" charset="0"/>
-                <a:sym typeface="Wingdings" panose="05000000000000000000" pitchFamily="2" charset="2"/>
-              </a:rPr>
-              <a:t></a:t>
-            </a:r>
-            <a:r>
-              <a:rPr lang="en-US" dirty="0">
-                <a:latin typeface="Times New Roman" panose="02020603050405020304" pitchFamily="18" charset="0"/>
-                <a:cs typeface="Times New Roman" panose="02020603050405020304" pitchFamily="18" charset="0"/>
-              </a:rPr>
-              <a:t> Sales Module </a:t>
-            </a:r>
-            <a:r>
-              <a:rPr lang="en-US" dirty="0">
-                <a:latin typeface="Times New Roman" panose="02020603050405020304" pitchFamily="18" charset="0"/>
-                <a:cs typeface="Times New Roman" panose="02020603050405020304" pitchFamily="18" charset="0"/>
-                <a:sym typeface="Wingdings" panose="05000000000000000000" pitchFamily="2" charset="2"/>
-              </a:rPr>
-              <a:t></a:t>
-            </a:r>
-            <a:r>
-              <a:rPr lang="en-US" dirty="0">
-                <a:latin typeface="Times New Roman" panose="02020603050405020304" pitchFamily="18" charset="0"/>
-                <a:cs typeface="Times New Roman" panose="02020603050405020304" pitchFamily="18" charset="0"/>
-              </a:rPr>
-              <a:t> Profit Calculation </a:t>
-            </a:r>
-            <a:r>
-              <a:rPr lang="en-US" dirty="0">
-                <a:latin typeface="Times New Roman" panose="02020603050405020304" pitchFamily="18" charset="0"/>
-                <a:cs typeface="Times New Roman" panose="02020603050405020304" pitchFamily="18" charset="0"/>
-                <a:sym typeface="Wingdings" panose="05000000000000000000" pitchFamily="2" charset="2"/>
-              </a:rPr>
-              <a:t></a:t>
-            </a:r>
-            <a:r>
-              <a:rPr lang="en-US" dirty="0">
-                <a:latin typeface="Times New Roman" panose="02020603050405020304" pitchFamily="18" charset="0"/>
-                <a:cs typeface="Times New Roman" panose="02020603050405020304" pitchFamily="18" charset="0"/>
-              </a:rPr>
-              <a:t> Income Calculation </a:t>
-            </a:r>
-            <a:r>
-              <a:rPr lang="en-US" dirty="0">
-                <a:latin typeface="Times New Roman" panose="02020603050405020304" pitchFamily="18" charset="0"/>
-                <a:cs typeface="Times New Roman" panose="02020603050405020304" pitchFamily="18" charset="0"/>
-                <a:sym typeface="Wingdings" panose="05000000000000000000" pitchFamily="2" charset="2"/>
-              </a:rPr>
-              <a:t></a:t>
-            </a:r>
-            <a:r>
-              <a:rPr lang="en-US" dirty="0">
-                <a:latin typeface="Times New Roman" panose="02020603050405020304" pitchFamily="18" charset="0"/>
-                <a:cs typeface="Times New Roman" panose="02020603050405020304" pitchFamily="18" charset="0"/>
-              </a:rPr>
-              <a:t> Low Stock Detection </a:t>
-            </a:r>
-            <a:r>
-              <a:rPr lang="en-US" dirty="0">
-                <a:latin typeface="Times New Roman" panose="02020603050405020304" pitchFamily="18" charset="0"/>
-                <a:cs typeface="Times New Roman" panose="02020603050405020304" pitchFamily="18" charset="0"/>
-                <a:sym typeface="Wingdings" panose="05000000000000000000" pitchFamily="2" charset="2"/>
-              </a:rPr>
-              <a:t></a:t>
-            </a:r>
-            <a:r>
-              <a:rPr lang="en-US" dirty="0">
-                <a:latin typeface="Times New Roman" panose="02020603050405020304" pitchFamily="18" charset="0"/>
-                <a:cs typeface="Times New Roman" panose="02020603050405020304" pitchFamily="18" charset="0"/>
-              </a:rPr>
-              <a:t> Dashboard Visualization </a:t>
-            </a:r>
-            <a:r>
-              <a:rPr lang="en-US" dirty="0">
-                <a:latin typeface="Times New Roman" panose="02020603050405020304" pitchFamily="18" charset="0"/>
-                <a:cs typeface="Times New Roman" panose="02020603050405020304" pitchFamily="18" charset="0"/>
-                <a:sym typeface="Wingdings" panose="05000000000000000000" pitchFamily="2" charset="2"/>
-              </a:rPr>
-              <a:t></a:t>
-            </a:r>
-            <a:r>
-              <a:rPr lang="en-US" dirty="0">
-                <a:latin typeface="Times New Roman" panose="02020603050405020304" pitchFamily="18" charset="0"/>
-                <a:cs typeface="Times New Roman" panose="02020603050405020304" pitchFamily="18" charset="0"/>
-              </a:rPr>
-              <a:t> Reports</a:t>
-            </a:r>
-          </a:p>
-          <a:p>
-            <a:r>
-              <a:rPr lang="en-US" dirty="0">
-                <a:latin typeface="Times New Roman" panose="02020603050405020304" pitchFamily="18" charset="0"/>
-                <a:cs typeface="Times New Roman" panose="02020603050405020304" pitchFamily="18" charset="0"/>
-              </a:rPr>
-              <a:t>User inputs data </a:t>
-            </a:r>
-          </a:p>
-          <a:p>
-            <a:r>
-              <a:rPr lang="en-US" dirty="0">
-                <a:latin typeface="Times New Roman" panose="02020603050405020304" pitchFamily="18" charset="0"/>
-                <a:cs typeface="Times New Roman" panose="02020603050405020304" pitchFamily="18" charset="0"/>
-              </a:rPr>
-              <a:t>Database stores information </a:t>
-            </a:r>
-          </a:p>
-          <a:p>
-            <a:r>
-              <a:rPr lang="en-US" dirty="0">
-                <a:latin typeface="Times New Roman" panose="02020603050405020304" pitchFamily="18" charset="0"/>
-                <a:cs typeface="Times New Roman" panose="02020603050405020304" pitchFamily="18" charset="0"/>
-              </a:rPr>
-              <a:t>Python processes transactions </a:t>
-            </a:r>
-          </a:p>
-          <a:p>
-            <a:r>
-              <a:rPr lang="en-US" dirty="0">
-                <a:latin typeface="Times New Roman" panose="02020603050405020304" pitchFamily="18" charset="0"/>
-                <a:cs typeface="Times New Roman" panose="02020603050405020304" pitchFamily="18" charset="0"/>
-              </a:rPr>
-              <a:t>Dashboard displays reports</a:t>
+              <a:rPr lang="en-US" b="1" dirty="0">
+                <a:latin typeface="Times New Roman" panose="02020603050405020304" pitchFamily="18" charset="0"/>
+                <a:cs typeface="Times New Roman" panose="02020603050405020304" pitchFamily="18" charset="0"/>
+              </a:rPr>
+              <a:t>Development Methodology</a:t>
+            </a:r>
+          </a:p>
+          <a:p>
+            <a:pPr marL="0" indent="0">
+              <a:buNone/>
+            </a:pPr>
+            <a:r>
+              <a:rPr lang="en-US" dirty="0">
+                <a:latin typeface="Times New Roman" panose="02020603050405020304" pitchFamily="18" charset="0"/>
+                <a:cs typeface="Times New Roman" panose="02020603050405020304" pitchFamily="18" charset="0"/>
+              </a:rPr>
+              <a:t>The project followed these stages:</a:t>
+            </a:r>
+          </a:p>
+          <a:p>
+            <a:r>
+              <a:rPr lang="en-US" dirty="0">
+                <a:latin typeface="Times New Roman" panose="02020603050405020304" pitchFamily="18" charset="0"/>
+                <a:cs typeface="Times New Roman" panose="02020603050405020304" pitchFamily="18" charset="0"/>
+              </a:rPr>
+              <a:t>Requirement Analysis </a:t>
+            </a:r>
+          </a:p>
+          <a:p>
+            <a:r>
+              <a:rPr lang="en-US" dirty="0">
+                <a:latin typeface="Times New Roman" panose="02020603050405020304" pitchFamily="18" charset="0"/>
+                <a:cs typeface="Times New Roman" panose="02020603050405020304" pitchFamily="18" charset="0"/>
+              </a:rPr>
+              <a:t>System Design </a:t>
+            </a:r>
+          </a:p>
+          <a:p>
+            <a:r>
+              <a:rPr lang="en-US" dirty="0">
+                <a:latin typeface="Times New Roman" panose="02020603050405020304" pitchFamily="18" charset="0"/>
+                <a:cs typeface="Times New Roman" panose="02020603050405020304" pitchFamily="18" charset="0"/>
+              </a:rPr>
+              <a:t>Database Development </a:t>
+            </a:r>
+          </a:p>
+          <a:p>
+            <a:r>
+              <a:rPr lang="en-US" dirty="0">
+                <a:latin typeface="Times New Roman" panose="02020603050405020304" pitchFamily="18" charset="0"/>
+                <a:cs typeface="Times New Roman" panose="02020603050405020304" pitchFamily="18" charset="0"/>
+              </a:rPr>
+              <a:t>Python Implementation </a:t>
+            </a:r>
+          </a:p>
+          <a:p>
+            <a:r>
+              <a:rPr lang="en-US" dirty="0">
+                <a:latin typeface="Times New Roman" panose="02020603050405020304" pitchFamily="18" charset="0"/>
+                <a:cs typeface="Times New Roman" panose="02020603050405020304" pitchFamily="18" charset="0"/>
+              </a:rPr>
+              <a:t>Testing </a:t>
+            </a:r>
+          </a:p>
+          <a:p>
+            <a:r>
+              <a:rPr lang="en-US" dirty="0">
+                <a:latin typeface="Times New Roman" panose="02020603050405020304" pitchFamily="18" charset="0"/>
+                <a:cs typeface="Times New Roman" panose="02020603050405020304" pitchFamily="18" charset="0"/>
+              </a:rPr>
+              <a:t>Evaluation</a:t>
             </a:r>
           </a:p>
           <a:p>
@@ -6596,7 +6514,7 @@
     </p:spTree>
     <p:extLst>
       <p:ext uri="{BB962C8B-B14F-4D97-AF65-F5344CB8AC3E}">
-        <p14:creationId xmlns:p14="http://schemas.microsoft.com/office/powerpoint/2010/main" val="2407849959"/>
+        <p14:creationId xmlns:p14="http://schemas.microsoft.com/office/powerpoint/2010/main" val="635706677"/>
       </p:ext>
     </p:extLst>
   </p:cSld>
@@ -6628,6 +6546,432 @@
           <p:cNvPr id="2" name="Title 1">
             <a:extLst>
               <a:ext uri="{FF2B5EF4-FFF2-40B4-BE49-F238E27FC236}">
+                <a16:creationId xmlns:a16="http://schemas.microsoft.com/office/drawing/2014/main" id="{3166D65F-BA08-B49D-83F5-33F4713FA23E}"/>
+              </a:ext>
+            </a:extLst>
+          </p:cNvPr>
+          <p:cNvSpPr>
+            <a:spLocks noGrp="1"/>
+          </p:cNvSpPr>
+          <p:nvPr>
+            <p:ph type="title"/>
+          </p:nvPr>
+        </p:nvSpPr>
+        <p:spPr/>
+        <p:txBody>
+          <a:bodyPr/>
+          <a:lstStyle/>
+          <a:p>
+            <a:r>
+              <a:rPr lang="en-US" dirty="0">
+                <a:latin typeface="Times New Roman" panose="02020603050405020304" pitchFamily="18" charset="0"/>
+                <a:cs typeface="Times New Roman" panose="02020603050405020304" pitchFamily="18" charset="0"/>
+              </a:rPr>
+              <a:t>Methodology</a:t>
+            </a:r>
+            <a:endParaRPr lang="en-US" dirty="0"/>
+          </a:p>
+        </p:txBody>
+      </p:sp>
+      <p:sp>
+        <p:nvSpPr>
+          <p:cNvPr id="3" name="Content Placeholder 2">
+            <a:extLst>
+              <a:ext uri="{FF2B5EF4-FFF2-40B4-BE49-F238E27FC236}">
+                <a16:creationId xmlns:a16="http://schemas.microsoft.com/office/drawing/2014/main" id="{40B89845-9133-59CB-650F-DBF8FF271B0E}"/>
+              </a:ext>
+            </a:extLst>
+          </p:cNvPr>
+          <p:cNvSpPr>
+            <a:spLocks noGrp="1"/>
+          </p:cNvSpPr>
+          <p:nvPr>
+            <p:ph idx="1"/>
+          </p:nvPr>
+        </p:nvSpPr>
+        <p:spPr/>
+        <p:txBody>
+          <a:bodyPr>
+            <a:normAutofit fontScale="92500" lnSpcReduction="20000"/>
+          </a:bodyPr>
+          <a:lstStyle/>
+          <a:p>
+            <a:pPr marL="0" indent="0">
+              <a:buNone/>
+            </a:pPr>
+            <a:r>
+              <a:rPr lang="en-US" dirty="0">
+                <a:latin typeface="Times New Roman" panose="02020603050405020304" pitchFamily="18" charset="0"/>
+                <a:cs typeface="Times New Roman" panose="02020603050405020304" pitchFamily="18" charset="0"/>
+              </a:rPr>
+              <a:t>Programming Language:</a:t>
+            </a:r>
+          </a:p>
+          <a:p>
+            <a:r>
+              <a:rPr lang="en-US" dirty="0">
+                <a:latin typeface="Times New Roman" panose="02020603050405020304" pitchFamily="18" charset="0"/>
+                <a:cs typeface="Times New Roman" panose="02020603050405020304" pitchFamily="18" charset="0"/>
+              </a:rPr>
+              <a:t>Python </a:t>
+            </a:r>
+          </a:p>
+          <a:p>
+            <a:pPr marL="0" indent="0">
+              <a:buNone/>
+            </a:pPr>
+            <a:r>
+              <a:rPr lang="en-US" dirty="0">
+                <a:latin typeface="Times New Roman" panose="02020603050405020304" pitchFamily="18" charset="0"/>
+                <a:cs typeface="Times New Roman" panose="02020603050405020304" pitchFamily="18" charset="0"/>
+              </a:rPr>
+              <a:t>Libraries Used:</a:t>
+            </a:r>
+          </a:p>
+          <a:p>
+            <a:r>
+              <a:rPr lang="en-US" dirty="0">
+                <a:latin typeface="Times New Roman" panose="02020603050405020304" pitchFamily="18" charset="0"/>
+                <a:cs typeface="Times New Roman" panose="02020603050405020304" pitchFamily="18" charset="0"/>
+              </a:rPr>
+              <a:t>Pandas </a:t>
+            </a:r>
+          </a:p>
+          <a:p>
+            <a:r>
+              <a:rPr lang="en-US" dirty="0">
+                <a:latin typeface="Times New Roman" panose="02020603050405020304" pitchFamily="18" charset="0"/>
+                <a:cs typeface="Times New Roman" panose="02020603050405020304" pitchFamily="18" charset="0"/>
+              </a:rPr>
+              <a:t>NumPy </a:t>
+            </a:r>
+          </a:p>
+          <a:p>
+            <a:r>
+              <a:rPr lang="en-US" dirty="0">
+                <a:latin typeface="Times New Roman" panose="02020603050405020304" pitchFamily="18" charset="0"/>
+                <a:cs typeface="Times New Roman" panose="02020603050405020304" pitchFamily="18" charset="0"/>
+              </a:rPr>
+              <a:t>Matplotlib </a:t>
+            </a:r>
+          </a:p>
+          <a:p>
+            <a:pPr marL="0" indent="0">
+              <a:buNone/>
+            </a:pPr>
+            <a:r>
+              <a:rPr lang="en-US" dirty="0">
+                <a:latin typeface="Times New Roman" panose="02020603050405020304" pitchFamily="18" charset="0"/>
+                <a:cs typeface="Times New Roman" panose="02020603050405020304" pitchFamily="18" charset="0"/>
+              </a:rPr>
+              <a:t>Development Environment:</a:t>
+            </a:r>
+          </a:p>
+          <a:p>
+            <a:r>
+              <a:rPr lang="en-US" dirty="0">
+                <a:latin typeface="Times New Roman" panose="02020603050405020304" pitchFamily="18" charset="0"/>
+                <a:cs typeface="Times New Roman" panose="02020603050405020304" pitchFamily="18" charset="0"/>
+              </a:rPr>
+              <a:t>Jupyter Notebook </a:t>
+            </a:r>
+          </a:p>
+          <a:p>
+            <a:endParaRPr lang="en-US" dirty="0"/>
+          </a:p>
+        </p:txBody>
+      </p:sp>
+    </p:spTree>
+    <p:extLst>
+      <p:ext uri="{BB962C8B-B14F-4D97-AF65-F5344CB8AC3E}">
+        <p14:creationId xmlns:p14="http://schemas.microsoft.com/office/powerpoint/2010/main" val="1655476587"/>
+      </p:ext>
+    </p:extLst>
+  </p:cSld>
+  <p:clrMapOvr>
+    <a:masterClrMapping/>
+  </p:clrMapOvr>
+</p:sld>
+</file>
+
+<file path=ppt/slides/slide14.xml><?xml version="1.0" encoding="utf-8"?>
+<p:sld xmlns:a="http://schemas.openxmlformats.org/drawingml/2006/main" xmlns:r="http://schemas.openxmlformats.org/officeDocument/2006/relationships" xmlns:p="http://schemas.openxmlformats.org/presentationml/2006/main">
+  <p:cSld>
+    <p:spTree>
+      <p:nvGrpSpPr>
+        <p:cNvPr id="1" name=""/>
+        <p:cNvGrpSpPr/>
+        <p:nvPr/>
+      </p:nvGrpSpPr>
+      <p:grpSpPr>
+        <a:xfrm>
+          <a:off x="0" y="0"/>
+          <a:ext cx="0" cy="0"/>
+          <a:chOff x="0" y="0"/>
+          <a:chExt cx="0" cy="0"/>
+        </a:xfrm>
+      </p:grpSpPr>
+      <p:sp>
+        <p:nvSpPr>
+          <p:cNvPr id="2" name="Title 1">
+            <a:extLst>
+              <a:ext uri="{FF2B5EF4-FFF2-40B4-BE49-F238E27FC236}">
+                <a16:creationId xmlns:a16="http://schemas.microsoft.com/office/drawing/2014/main" id="{C47C7A32-2008-BB0B-618A-6B2CA2F68BD4}"/>
+              </a:ext>
+            </a:extLst>
+          </p:cNvPr>
+          <p:cNvSpPr>
+            <a:spLocks noGrp="1"/>
+          </p:cNvSpPr>
+          <p:nvPr>
+            <p:ph type="title"/>
+          </p:nvPr>
+        </p:nvSpPr>
+        <p:spPr/>
+        <p:txBody>
+          <a:bodyPr/>
+          <a:lstStyle/>
+          <a:p>
+            <a:r>
+              <a:rPr lang="en-US" dirty="0">
+                <a:latin typeface="Times New Roman" panose="02020603050405020304" pitchFamily="18" charset="0"/>
+                <a:cs typeface="Times New Roman" panose="02020603050405020304" pitchFamily="18" charset="0"/>
+              </a:rPr>
+              <a:t>System Architecture</a:t>
+            </a:r>
+          </a:p>
+        </p:txBody>
+      </p:sp>
+      <p:sp>
+        <p:nvSpPr>
+          <p:cNvPr id="3" name="Content Placeholder 2">
+            <a:extLst>
+              <a:ext uri="{FF2B5EF4-FFF2-40B4-BE49-F238E27FC236}">
+                <a16:creationId xmlns:a16="http://schemas.microsoft.com/office/drawing/2014/main" id="{8D5A35EF-1A0B-F342-2019-8E04301F7DEC}"/>
+              </a:ext>
+            </a:extLst>
+          </p:cNvPr>
+          <p:cNvSpPr>
+            <a:spLocks noGrp="1"/>
+          </p:cNvSpPr>
+          <p:nvPr>
+            <p:ph idx="1"/>
+          </p:nvPr>
+        </p:nvSpPr>
+        <p:spPr/>
+        <p:txBody>
+          <a:bodyPr>
+            <a:normAutofit lnSpcReduction="10000"/>
+          </a:bodyPr>
+          <a:lstStyle/>
+          <a:p>
+            <a:r>
+              <a:rPr lang="en-US" dirty="0">
+                <a:latin typeface="Times New Roman" panose="02020603050405020304" pitchFamily="18" charset="0"/>
+                <a:cs typeface="Times New Roman" panose="02020603050405020304" pitchFamily="18" charset="0"/>
+              </a:rPr>
+              <a:t>User  </a:t>
+            </a:r>
+            <a:r>
+              <a:rPr lang="en-US" dirty="0">
+                <a:latin typeface="Times New Roman" panose="02020603050405020304" pitchFamily="18" charset="0"/>
+                <a:cs typeface="Times New Roman" panose="02020603050405020304" pitchFamily="18" charset="0"/>
+                <a:sym typeface="Wingdings" panose="05000000000000000000" pitchFamily="2" charset="2"/>
+              </a:rPr>
+              <a:t></a:t>
+            </a:r>
+            <a:r>
+              <a:rPr lang="en-US" dirty="0">
+                <a:latin typeface="Times New Roman" panose="02020603050405020304" pitchFamily="18" charset="0"/>
+                <a:cs typeface="Times New Roman" panose="02020603050405020304" pitchFamily="18" charset="0"/>
+              </a:rPr>
+              <a:t> Inventory Database </a:t>
+            </a:r>
+            <a:r>
+              <a:rPr lang="en-US" dirty="0">
+                <a:latin typeface="Times New Roman" panose="02020603050405020304" pitchFamily="18" charset="0"/>
+                <a:cs typeface="Times New Roman" panose="02020603050405020304" pitchFamily="18" charset="0"/>
+                <a:sym typeface="Wingdings" panose="05000000000000000000" pitchFamily="2" charset="2"/>
+              </a:rPr>
+              <a:t></a:t>
+            </a:r>
+            <a:r>
+              <a:rPr lang="en-US" dirty="0">
+                <a:latin typeface="Times New Roman" panose="02020603050405020304" pitchFamily="18" charset="0"/>
+                <a:cs typeface="Times New Roman" panose="02020603050405020304" pitchFamily="18" charset="0"/>
+              </a:rPr>
+              <a:t> Python Processing Engine </a:t>
+            </a:r>
+            <a:r>
+              <a:rPr lang="en-US" dirty="0">
+                <a:latin typeface="Times New Roman" panose="02020603050405020304" pitchFamily="18" charset="0"/>
+                <a:cs typeface="Times New Roman" panose="02020603050405020304" pitchFamily="18" charset="0"/>
+                <a:sym typeface="Wingdings" panose="05000000000000000000" pitchFamily="2" charset="2"/>
+              </a:rPr>
+              <a:t></a:t>
+            </a:r>
+            <a:r>
+              <a:rPr lang="en-US" dirty="0">
+                <a:latin typeface="Times New Roman" panose="02020603050405020304" pitchFamily="18" charset="0"/>
+                <a:cs typeface="Times New Roman" panose="02020603050405020304" pitchFamily="18" charset="0"/>
+              </a:rPr>
+              <a:t> Sales Module </a:t>
+            </a:r>
+            <a:r>
+              <a:rPr lang="en-US" dirty="0">
+                <a:latin typeface="Times New Roman" panose="02020603050405020304" pitchFamily="18" charset="0"/>
+                <a:cs typeface="Times New Roman" panose="02020603050405020304" pitchFamily="18" charset="0"/>
+                <a:sym typeface="Wingdings" panose="05000000000000000000" pitchFamily="2" charset="2"/>
+              </a:rPr>
+              <a:t></a:t>
+            </a:r>
+            <a:r>
+              <a:rPr lang="en-US" dirty="0">
+                <a:latin typeface="Times New Roman" panose="02020603050405020304" pitchFamily="18" charset="0"/>
+                <a:cs typeface="Times New Roman" panose="02020603050405020304" pitchFamily="18" charset="0"/>
+              </a:rPr>
+              <a:t> Profit Calculation </a:t>
+            </a:r>
+            <a:r>
+              <a:rPr lang="en-US" dirty="0">
+                <a:latin typeface="Times New Roman" panose="02020603050405020304" pitchFamily="18" charset="0"/>
+                <a:cs typeface="Times New Roman" panose="02020603050405020304" pitchFamily="18" charset="0"/>
+                <a:sym typeface="Wingdings" panose="05000000000000000000" pitchFamily="2" charset="2"/>
+              </a:rPr>
+              <a:t></a:t>
+            </a:r>
+            <a:r>
+              <a:rPr lang="en-US" dirty="0">
+                <a:latin typeface="Times New Roman" panose="02020603050405020304" pitchFamily="18" charset="0"/>
+                <a:cs typeface="Times New Roman" panose="02020603050405020304" pitchFamily="18" charset="0"/>
+              </a:rPr>
+              <a:t> Income Calculation </a:t>
+            </a:r>
+            <a:r>
+              <a:rPr lang="en-US" dirty="0">
+                <a:latin typeface="Times New Roman" panose="02020603050405020304" pitchFamily="18" charset="0"/>
+                <a:cs typeface="Times New Roman" panose="02020603050405020304" pitchFamily="18" charset="0"/>
+                <a:sym typeface="Wingdings" panose="05000000000000000000" pitchFamily="2" charset="2"/>
+              </a:rPr>
+              <a:t></a:t>
+            </a:r>
+            <a:r>
+              <a:rPr lang="en-US" dirty="0">
+                <a:latin typeface="Times New Roman" panose="02020603050405020304" pitchFamily="18" charset="0"/>
+                <a:cs typeface="Times New Roman" panose="02020603050405020304" pitchFamily="18" charset="0"/>
+              </a:rPr>
+              <a:t> Low Stock Detection </a:t>
+            </a:r>
+            <a:r>
+              <a:rPr lang="en-US" dirty="0">
+                <a:latin typeface="Times New Roman" panose="02020603050405020304" pitchFamily="18" charset="0"/>
+                <a:cs typeface="Times New Roman" panose="02020603050405020304" pitchFamily="18" charset="0"/>
+                <a:sym typeface="Wingdings" panose="05000000000000000000" pitchFamily="2" charset="2"/>
+              </a:rPr>
+              <a:t></a:t>
+            </a:r>
+            <a:r>
+              <a:rPr lang="en-US" dirty="0">
+                <a:latin typeface="Times New Roman" panose="02020603050405020304" pitchFamily="18" charset="0"/>
+                <a:cs typeface="Times New Roman" panose="02020603050405020304" pitchFamily="18" charset="0"/>
+              </a:rPr>
+              <a:t> Dashboard Visualization </a:t>
+            </a:r>
+            <a:r>
+              <a:rPr lang="en-US" dirty="0">
+                <a:latin typeface="Times New Roman" panose="02020603050405020304" pitchFamily="18" charset="0"/>
+                <a:cs typeface="Times New Roman" panose="02020603050405020304" pitchFamily="18" charset="0"/>
+                <a:sym typeface="Wingdings" panose="05000000000000000000" pitchFamily="2" charset="2"/>
+              </a:rPr>
+              <a:t></a:t>
+            </a:r>
+            <a:r>
+              <a:rPr lang="en-US" dirty="0">
+                <a:latin typeface="Times New Roman" panose="02020603050405020304" pitchFamily="18" charset="0"/>
+                <a:cs typeface="Times New Roman" panose="02020603050405020304" pitchFamily="18" charset="0"/>
+              </a:rPr>
+              <a:t> Reports</a:t>
+            </a:r>
+          </a:p>
+          <a:p>
+            <a:r>
+              <a:rPr lang="en-US" dirty="0">
+                <a:latin typeface="Times New Roman" panose="02020603050405020304" pitchFamily="18" charset="0"/>
+                <a:cs typeface="Times New Roman" panose="02020603050405020304" pitchFamily="18" charset="0"/>
+              </a:rPr>
+              <a:t>User inputs data </a:t>
+            </a:r>
+          </a:p>
+          <a:p>
+            <a:r>
+              <a:rPr lang="en-US" dirty="0">
+                <a:latin typeface="Times New Roman" panose="02020603050405020304" pitchFamily="18" charset="0"/>
+                <a:cs typeface="Times New Roman" panose="02020603050405020304" pitchFamily="18" charset="0"/>
+              </a:rPr>
+              <a:t>Database stores information </a:t>
+            </a:r>
+          </a:p>
+          <a:p>
+            <a:r>
+              <a:rPr lang="en-US" dirty="0">
+                <a:latin typeface="Times New Roman" panose="02020603050405020304" pitchFamily="18" charset="0"/>
+                <a:cs typeface="Times New Roman" panose="02020603050405020304" pitchFamily="18" charset="0"/>
+              </a:rPr>
+              <a:t>Python processes transactions </a:t>
+            </a:r>
+          </a:p>
+          <a:p>
+            <a:r>
+              <a:rPr lang="en-US" dirty="0">
+                <a:latin typeface="Times New Roman" panose="02020603050405020304" pitchFamily="18" charset="0"/>
+                <a:cs typeface="Times New Roman" panose="02020603050405020304" pitchFamily="18" charset="0"/>
+              </a:rPr>
+              <a:t>Dashboard displays reports</a:t>
+            </a:r>
+          </a:p>
+          <a:p>
+            <a:endParaRPr lang="en-US" dirty="0">
+              <a:latin typeface="Times New Roman" panose="02020603050405020304" pitchFamily="18" charset="0"/>
+              <a:cs typeface="Times New Roman" panose="02020603050405020304" pitchFamily="18" charset="0"/>
+            </a:endParaRPr>
+          </a:p>
+        </p:txBody>
+      </p:sp>
+    </p:spTree>
+    <p:extLst>
+      <p:ext uri="{BB962C8B-B14F-4D97-AF65-F5344CB8AC3E}">
+        <p14:creationId xmlns:p14="http://schemas.microsoft.com/office/powerpoint/2010/main" val="2407849959"/>
+      </p:ext>
+    </p:extLst>
+  </p:cSld>
+  <p:clrMapOvr>
+    <a:masterClrMapping/>
+  </p:clrMapOvr>
+</p:sld>
+</file>
+
+<file path=ppt/slides/slide15.xml><?xml version="1.0" encoding="utf-8"?>
+<p:sld xmlns:a="http://schemas.openxmlformats.org/drawingml/2006/main" xmlns:r="http://schemas.openxmlformats.org/officeDocument/2006/relationships" xmlns:p="http://schemas.openxmlformats.org/presentationml/2006/main">
+  <p:cSld>
+    <p:spTree>
+      <p:nvGrpSpPr>
+        <p:cNvPr id="1" name=""/>
+        <p:cNvGrpSpPr/>
+        <p:nvPr/>
+      </p:nvGrpSpPr>
+      <p:grpSpPr>
+        <a:xfrm>
+          <a:off x="0" y="0"/>
+          <a:ext cx="0" cy="0"/>
+          <a:chOff x="0" y="0"/>
+          <a:chExt cx="0" cy="0"/>
+        </a:xfrm>
+      </p:grpSpPr>
+      <p:sp>
+        <p:nvSpPr>
+          <p:cNvPr id="2" name="Title 1">
+            <a:extLst>
+              <a:ext uri="{FF2B5EF4-FFF2-40B4-BE49-F238E27FC236}">
                 <a16:creationId xmlns:a16="http://schemas.microsoft.com/office/drawing/2014/main" id="{4C5F24EC-F417-AA96-D17E-A6730128959E}"/>
               </a:ext>
             </a:extLst>
@@ -6793,7 +7137,69 @@
 </p:sld>
 </file>
 
-<file path=ppt/slides/slide14.xml><?xml version="1.0" encoding="utf-8"?>
+<file path=ppt/slides/slide16.xml><?xml version="1.0" encoding="utf-8"?>
+<p:sld xmlns:a="http://schemas.openxmlformats.org/drawingml/2006/main" xmlns:r="http://schemas.openxmlformats.org/officeDocument/2006/relationships" xmlns:p="http://schemas.openxmlformats.org/presentationml/2006/main">
+  <p:cSld>
+    <p:spTree>
+      <p:nvGrpSpPr>
+        <p:cNvPr id="1" name=""/>
+        <p:cNvGrpSpPr/>
+        <p:nvPr/>
+      </p:nvGrpSpPr>
+      <p:grpSpPr>
+        <a:xfrm>
+          <a:off x="0" y="0"/>
+          <a:ext cx="0" cy="0"/>
+          <a:chOff x="0" y="0"/>
+          <a:chExt cx="0" cy="0"/>
+        </a:xfrm>
+      </p:grpSpPr>
+      <p:pic>
+        <p:nvPicPr>
+          <p:cNvPr id="5" name="Content Placeholder 4">
+            <a:extLst>
+              <a:ext uri="{FF2B5EF4-FFF2-40B4-BE49-F238E27FC236}">
+                <a16:creationId xmlns:a16="http://schemas.microsoft.com/office/drawing/2014/main" id="{87D03434-4547-BF5B-F4B6-EF4A4E352F10}"/>
+              </a:ext>
+            </a:extLst>
+          </p:cNvPr>
+          <p:cNvPicPr>
+            <a:picLocks noGrp="1" noChangeAspect="1"/>
+          </p:cNvPicPr>
+          <p:nvPr>
+            <p:ph idx="1"/>
+          </p:nvPr>
+        </p:nvPicPr>
+        <p:blipFill>
+          <a:blip r:embed="rId2"/>
+          <a:stretch>
+            <a:fillRect/>
+          </a:stretch>
+        </p:blipFill>
+        <p:spPr>
+          <a:xfrm>
+            <a:off x="917497" y="1297235"/>
+            <a:ext cx="10540703" cy="4263529"/>
+          </a:xfrm>
+          <a:prstGeom prst="rect">
+            <a:avLst/>
+          </a:prstGeom>
+        </p:spPr>
+      </p:pic>
+    </p:spTree>
+    <p:extLst>
+      <p:ext uri="{BB962C8B-B14F-4D97-AF65-F5344CB8AC3E}">
+        <p14:creationId xmlns:p14="http://schemas.microsoft.com/office/powerpoint/2010/main" val="1203252619"/>
+      </p:ext>
+    </p:extLst>
+  </p:cSld>
+  <p:clrMapOvr>
+    <a:masterClrMapping/>
+  </p:clrMapOvr>
+</p:sld>
+</file>
+
+<file path=ppt/slides/slide17.xml><?xml version="1.0" encoding="utf-8"?>
 <p:sld xmlns:a="http://schemas.openxmlformats.org/drawingml/2006/main" xmlns:r="http://schemas.openxmlformats.org/officeDocument/2006/relationships" xmlns:p="http://schemas.openxmlformats.org/presentationml/2006/main">
   <p:cSld>
     <p:spTree>
@@ -6892,7 +7298,7 @@
 </p:sld>
 </file>
 
-<file path=ppt/slides/slide15.xml><?xml version="1.0" encoding="utf-8"?>
+<file path=ppt/slides/slide18.xml><?xml version="1.0" encoding="utf-8"?>
 <p:sld xmlns:a="http://schemas.openxmlformats.org/drawingml/2006/main" xmlns:r="http://schemas.openxmlformats.org/officeDocument/2006/relationships" xmlns:p="http://schemas.openxmlformats.org/presentationml/2006/main">
   <p:cSld>
     <p:spTree>
@@ -6985,7 +7391,7 @@
 </p:sld>
 </file>
 
-<file path=ppt/slides/slide16.xml><?xml version="1.0" encoding="utf-8"?>
+<file path=ppt/slides/slide19.xml><?xml version="1.0" encoding="utf-8"?>
 <p:sld xmlns:a="http://schemas.openxmlformats.org/drawingml/2006/main" xmlns:r="http://schemas.openxmlformats.org/officeDocument/2006/relationships" xmlns:p="http://schemas.openxmlformats.org/presentationml/2006/main">
   <p:cSld>
     <p:spTree>
@@ -7078,461 +7484,6 @@
 </p:sld>
 </file>
 
-<file path=ppt/slides/slide17.xml><?xml version="1.0" encoding="utf-8"?>
-<p:sld xmlns:a="http://schemas.openxmlformats.org/drawingml/2006/main" xmlns:r="http://schemas.openxmlformats.org/officeDocument/2006/relationships" xmlns:p="http://schemas.openxmlformats.org/presentationml/2006/main">
-  <p:cSld>
-    <p:spTree>
-      <p:nvGrpSpPr>
-        <p:cNvPr id="1" name=""/>
-        <p:cNvGrpSpPr/>
-        <p:nvPr/>
-      </p:nvGrpSpPr>
-      <p:grpSpPr>
-        <a:xfrm>
-          <a:off x="0" y="0"/>
-          <a:ext cx="0" cy="0"/>
-          <a:chOff x="0" y="0"/>
-          <a:chExt cx="0" cy="0"/>
-        </a:xfrm>
-      </p:grpSpPr>
-      <p:sp>
-        <p:nvSpPr>
-          <p:cNvPr id="2" name="Title 1">
-            <a:extLst>
-              <a:ext uri="{FF2B5EF4-FFF2-40B4-BE49-F238E27FC236}">
-                <a16:creationId xmlns:a16="http://schemas.microsoft.com/office/drawing/2014/main" id="{0F30EB64-06AA-2A35-A137-AC24B492890C}"/>
-              </a:ext>
-            </a:extLst>
-          </p:cNvPr>
-          <p:cNvSpPr>
-            <a:spLocks noGrp="1"/>
-          </p:cNvSpPr>
-          <p:nvPr>
-            <p:ph type="title"/>
-          </p:nvPr>
-        </p:nvSpPr>
-        <p:spPr/>
-        <p:txBody>
-          <a:bodyPr/>
-          <a:lstStyle/>
-          <a:p>
-            <a:r>
-              <a:rPr lang="en-US" dirty="0">
-                <a:latin typeface="Times New Roman" panose="02020603050405020304" pitchFamily="18" charset="0"/>
-                <a:cs typeface="Times New Roman" panose="02020603050405020304" pitchFamily="18" charset="0"/>
-              </a:rPr>
-              <a:t>Summary</a:t>
-            </a:r>
-          </a:p>
-        </p:txBody>
-      </p:sp>
-      <p:sp>
-        <p:nvSpPr>
-          <p:cNvPr id="3" name="Content Placeholder 2">
-            <a:extLst>
-              <a:ext uri="{FF2B5EF4-FFF2-40B4-BE49-F238E27FC236}">
-                <a16:creationId xmlns:a16="http://schemas.microsoft.com/office/drawing/2014/main" id="{BA62B9DE-891C-6A9B-F1B7-A0426B574468}"/>
-              </a:ext>
-            </a:extLst>
-          </p:cNvPr>
-          <p:cNvSpPr>
-            <a:spLocks noGrp="1"/>
-          </p:cNvSpPr>
-          <p:nvPr>
-            <p:ph idx="1"/>
-          </p:nvPr>
-        </p:nvSpPr>
-        <p:spPr/>
-        <p:txBody>
-          <a:bodyPr>
-            <a:noAutofit/>
-          </a:bodyPr>
-          <a:lstStyle/>
-          <a:p>
-            <a:pPr marL="0" indent="0">
-              <a:buNone/>
-            </a:pPr>
-            <a:r>
-              <a:rPr lang="en-US" sz="1750" b="1" dirty="0">
-                <a:latin typeface="Times New Roman" panose="02020603050405020304" pitchFamily="18" charset="0"/>
-                <a:cs typeface="Times New Roman" panose="02020603050405020304" pitchFamily="18" charset="0"/>
-              </a:rPr>
-              <a:t>Key Features</a:t>
-            </a:r>
-          </a:p>
-          <a:p>
-            <a:r>
-              <a:rPr lang="en-US" sz="1750" dirty="0">
-                <a:latin typeface="Times New Roman" panose="02020603050405020304" pitchFamily="18" charset="0"/>
-                <a:cs typeface="Times New Roman" panose="02020603050405020304" pitchFamily="18" charset="0"/>
-              </a:rPr>
-              <a:t>Automated inventory management </a:t>
-            </a:r>
-          </a:p>
-          <a:p>
-            <a:r>
-              <a:rPr lang="en-US" sz="1750" dirty="0">
-                <a:latin typeface="Times New Roman" panose="02020603050405020304" pitchFamily="18" charset="0"/>
-                <a:cs typeface="Times New Roman" panose="02020603050405020304" pitchFamily="18" charset="0"/>
-              </a:rPr>
-              <a:t>Sales tracking </a:t>
-            </a:r>
-          </a:p>
-          <a:p>
-            <a:r>
-              <a:rPr lang="en-US" sz="1750" dirty="0">
-                <a:latin typeface="Times New Roman" panose="02020603050405020304" pitchFamily="18" charset="0"/>
-                <a:cs typeface="Times New Roman" panose="02020603050405020304" pitchFamily="18" charset="0"/>
-              </a:rPr>
-              <a:t>Profit computation </a:t>
-            </a:r>
-          </a:p>
-          <a:p>
-            <a:r>
-              <a:rPr lang="en-US" sz="1750" dirty="0">
-                <a:latin typeface="Times New Roman" panose="02020603050405020304" pitchFamily="18" charset="0"/>
-                <a:cs typeface="Times New Roman" panose="02020603050405020304" pitchFamily="18" charset="0"/>
-              </a:rPr>
-              <a:t>Income analysis </a:t>
-            </a:r>
-          </a:p>
-          <a:p>
-            <a:r>
-              <a:rPr lang="en-US" sz="1750" dirty="0">
-                <a:latin typeface="Times New Roman" panose="02020603050405020304" pitchFamily="18" charset="0"/>
-                <a:cs typeface="Times New Roman" panose="02020603050405020304" pitchFamily="18" charset="0"/>
-              </a:rPr>
-              <a:t>Low-stock alerts </a:t>
-            </a:r>
-          </a:p>
-          <a:p>
-            <a:r>
-              <a:rPr lang="en-US" sz="1750" dirty="0">
-                <a:latin typeface="Times New Roman" panose="02020603050405020304" pitchFamily="18" charset="0"/>
-                <a:cs typeface="Times New Roman" panose="02020603050405020304" pitchFamily="18" charset="0"/>
-              </a:rPr>
-              <a:t>Business dashboard </a:t>
-            </a:r>
-          </a:p>
-          <a:p>
-            <a:r>
-              <a:rPr lang="en-US" sz="1750" dirty="0">
-                <a:latin typeface="Times New Roman" panose="02020603050405020304" pitchFamily="18" charset="0"/>
-                <a:cs typeface="Times New Roman" panose="02020603050405020304" pitchFamily="18" charset="0"/>
-              </a:rPr>
-              <a:t>Data visualization </a:t>
-            </a:r>
-          </a:p>
-          <a:p>
-            <a:r>
-              <a:rPr lang="en-US" sz="1750" dirty="0">
-                <a:latin typeface="Times New Roman" panose="02020603050405020304" pitchFamily="18" charset="0"/>
-                <a:cs typeface="Times New Roman" panose="02020603050405020304" pitchFamily="18" charset="0"/>
-              </a:rPr>
-              <a:t>Real-time reporting</a:t>
-            </a:r>
-          </a:p>
-          <a:p>
-            <a:endParaRPr lang="en-US" sz="1750" dirty="0">
-              <a:latin typeface="Times New Roman" panose="02020603050405020304" pitchFamily="18" charset="0"/>
-              <a:cs typeface="Times New Roman" panose="02020603050405020304" pitchFamily="18" charset="0"/>
-            </a:endParaRPr>
-          </a:p>
-        </p:txBody>
-      </p:sp>
-    </p:spTree>
-    <p:extLst>
-      <p:ext uri="{BB962C8B-B14F-4D97-AF65-F5344CB8AC3E}">
-        <p14:creationId xmlns:p14="http://schemas.microsoft.com/office/powerpoint/2010/main" val="1510451051"/>
-      </p:ext>
-    </p:extLst>
-  </p:cSld>
-  <p:clrMapOvr>
-    <a:masterClrMapping/>
-  </p:clrMapOvr>
-</p:sld>
-</file>
-
-<file path=ppt/slides/slide18.xml><?xml version="1.0" encoding="utf-8"?>
-<p:sld xmlns:a="http://schemas.openxmlformats.org/drawingml/2006/main" xmlns:r="http://schemas.openxmlformats.org/officeDocument/2006/relationships" xmlns:p="http://schemas.openxmlformats.org/presentationml/2006/main">
-  <p:cSld>
-    <p:spTree>
-      <p:nvGrpSpPr>
-        <p:cNvPr id="1" name=""/>
-        <p:cNvGrpSpPr/>
-        <p:nvPr/>
-      </p:nvGrpSpPr>
-      <p:grpSpPr>
-        <a:xfrm>
-          <a:off x="0" y="0"/>
-          <a:ext cx="0" cy="0"/>
-          <a:chOff x="0" y="0"/>
-          <a:chExt cx="0" cy="0"/>
-        </a:xfrm>
-      </p:grpSpPr>
-      <p:sp>
-        <p:nvSpPr>
-          <p:cNvPr id="2" name="Title 1">
-            <a:extLst>
-              <a:ext uri="{FF2B5EF4-FFF2-40B4-BE49-F238E27FC236}">
-                <a16:creationId xmlns:a16="http://schemas.microsoft.com/office/drawing/2014/main" id="{4F91714A-6597-8482-D38E-A1C2037A20A4}"/>
-              </a:ext>
-            </a:extLst>
-          </p:cNvPr>
-          <p:cNvSpPr>
-            <a:spLocks noGrp="1"/>
-          </p:cNvSpPr>
-          <p:nvPr>
-            <p:ph type="title"/>
-          </p:nvPr>
-        </p:nvSpPr>
-        <p:spPr/>
-        <p:txBody>
-          <a:bodyPr>
-            <a:normAutofit/>
-          </a:bodyPr>
-          <a:lstStyle/>
-          <a:p>
-            <a:r>
-              <a:rPr lang="en-US" dirty="0">
-                <a:latin typeface="Times New Roman" panose="02020603050405020304" pitchFamily="18" charset="0"/>
-                <a:cs typeface="Times New Roman" panose="02020603050405020304" pitchFamily="18" charset="0"/>
-              </a:rPr>
-              <a:t>Conclusion</a:t>
-            </a:r>
-          </a:p>
-        </p:txBody>
-      </p:sp>
-      <p:sp>
-        <p:nvSpPr>
-          <p:cNvPr id="3" name="Content Placeholder 2">
-            <a:extLst>
-              <a:ext uri="{FF2B5EF4-FFF2-40B4-BE49-F238E27FC236}">
-                <a16:creationId xmlns:a16="http://schemas.microsoft.com/office/drawing/2014/main" id="{055F38D2-926A-8E51-B450-BDBB8F72C531}"/>
-              </a:ext>
-            </a:extLst>
-          </p:cNvPr>
-          <p:cNvSpPr>
-            <a:spLocks noGrp="1"/>
-          </p:cNvSpPr>
-          <p:nvPr>
-            <p:ph idx="1"/>
-          </p:nvPr>
-        </p:nvSpPr>
-        <p:spPr/>
-        <p:txBody>
-          <a:bodyPr/>
-          <a:lstStyle/>
-          <a:p>
-            <a:r>
-              <a:rPr lang="en-US" dirty="0">
-                <a:latin typeface="Times New Roman" panose="02020603050405020304" pitchFamily="18" charset="0"/>
-                <a:cs typeface="Times New Roman" panose="02020603050405020304" pitchFamily="18" charset="0"/>
-              </a:rPr>
-              <a:t>The system successfully automates inventory operations by integrating stock management, sales analysis, financial computation, and visualization into a single platform.</a:t>
-            </a:r>
-          </a:p>
-          <a:p>
-            <a:r>
-              <a:rPr lang="en-US" dirty="0">
-                <a:latin typeface="Times New Roman" panose="02020603050405020304" pitchFamily="18" charset="0"/>
-                <a:cs typeface="Times New Roman" panose="02020603050405020304" pitchFamily="18" charset="0"/>
-              </a:rPr>
-              <a:t>The system enhances efficiency, minimizes human errors, supports timely inventory replenishment, and provides real-time insights for better business decisions.</a:t>
-            </a:r>
-          </a:p>
-          <a:p>
-            <a:endParaRPr lang="en-US" dirty="0">
-              <a:latin typeface="Times New Roman" panose="02020603050405020304" pitchFamily="18" charset="0"/>
-              <a:cs typeface="Times New Roman" panose="02020603050405020304" pitchFamily="18" charset="0"/>
-            </a:endParaRPr>
-          </a:p>
-        </p:txBody>
-      </p:sp>
-    </p:spTree>
-    <p:extLst>
-      <p:ext uri="{BB962C8B-B14F-4D97-AF65-F5344CB8AC3E}">
-        <p14:creationId xmlns:p14="http://schemas.microsoft.com/office/powerpoint/2010/main" val="520599717"/>
-      </p:ext>
-    </p:extLst>
-  </p:cSld>
-  <p:clrMapOvr>
-    <a:masterClrMapping/>
-  </p:clrMapOvr>
-</p:sld>
-</file>
-
-<file path=ppt/slides/slide19.xml><?xml version="1.0" encoding="utf-8"?>
-<p:sld xmlns:a="http://schemas.openxmlformats.org/drawingml/2006/main" xmlns:r="http://schemas.openxmlformats.org/officeDocument/2006/relationships" xmlns:p="http://schemas.openxmlformats.org/presentationml/2006/main">
-  <p:cSld>
-    <p:spTree>
-      <p:nvGrpSpPr>
-        <p:cNvPr id="1" name=""/>
-        <p:cNvGrpSpPr/>
-        <p:nvPr/>
-      </p:nvGrpSpPr>
-      <p:grpSpPr>
-        <a:xfrm>
-          <a:off x="0" y="0"/>
-          <a:ext cx="0" cy="0"/>
-          <a:chOff x="0" y="0"/>
-          <a:chExt cx="0" cy="0"/>
-        </a:xfrm>
-      </p:grpSpPr>
-      <p:sp>
-        <p:nvSpPr>
-          <p:cNvPr id="2" name="Title 1">
-            <a:extLst>
-              <a:ext uri="{FF2B5EF4-FFF2-40B4-BE49-F238E27FC236}">
-                <a16:creationId xmlns:a16="http://schemas.microsoft.com/office/drawing/2014/main" id="{66EA689D-10D7-AA02-3F16-1689E3F35EFF}"/>
-              </a:ext>
-            </a:extLst>
-          </p:cNvPr>
-          <p:cNvSpPr>
-            <a:spLocks noGrp="1"/>
-          </p:cNvSpPr>
-          <p:nvPr>
-            <p:ph type="title"/>
-          </p:nvPr>
-        </p:nvSpPr>
-        <p:spPr/>
-        <p:txBody>
-          <a:bodyPr/>
-          <a:lstStyle/>
-          <a:p>
-            <a:r>
-              <a:rPr lang="en-US" dirty="0">
-                <a:latin typeface="Times New Roman" panose="02020603050405020304" pitchFamily="18" charset="0"/>
-                <a:cs typeface="Times New Roman" panose="02020603050405020304" pitchFamily="18" charset="0"/>
-              </a:rPr>
-              <a:t>Recommendations</a:t>
-            </a:r>
-          </a:p>
-        </p:txBody>
-      </p:sp>
-      <p:sp>
-        <p:nvSpPr>
-          <p:cNvPr id="3" name="Content Placeholder 2">
-            <a:extLst>
-              <a:ext uri="{FF2B5EF4-FFF2-40B4-BE49-F238E27FC236}">
-                <a16:creationId xmlns:a16="http://schemas.microsoft.com/office/drawing/2014/main" id="{788E01B0-9F77-C630-FBE7-A936675D3735}"/>
-              </a:ext>
-            </a:extLst>
-          </p:cNvPr>
-          <p:cNvSpPr>
-            <a:spLocks noGrp="1"/>
-          </p:cNvSpPr>
-          <p:nvPr>
-            <p:ph idx="1"/>
-          </p:nvPr>
-        </p:nvSpPr>
-        <p:spPr/>
-        <p:txBody>
-          <a:bodyPr>
-            <a:normAutofit fontScale="92500" lnSpcReduction="20000"/>
-          </a:bodyPr>
-          <a:lstStyle/>
-          <a:p>
-            <a:r>
-              <a:rPr lang="en-US" dirty="0">
-                <a:latin typeface="Times New Roman" panose="02020603050405020304" pitchFamily="18" charset="0"/>
-                <a:cs typeface="Times New Roman" panose="02020603050405020304" pitchFamily="18" charset="0"/>
-              </a:rPr>
-              <a:t>Cloud database integration </a:t>
-            </a:r>
-          </a:p>
-          <a:p>
-            <a:r>
-              <a:rPr lang="en-US" dirty="0">
-                <a:latin typeface="Times New Roman" panose="02020603050405020304" pitchFamily="18" charset="0"/>
-                <a:cs typeface="Times New Roman" panose="02020603050405020304" pitchFamily="18" charset="0"/>
-              </a:rPr>
-              <a:t>Barcode scanning QR Code support </a:t>
-            </a:r>
-          </a:p>
-          <a:p>
-            <a:r>
-              <a:rPr lang="en-US" dirty="0">
-                <a:latin typeface="Times New Roman" panose="02020603050405020304" pitchFamily="18" charset="0"/>
-                <a:cs typeface="Times New Roman" panose="02020603050405020304" pitchFamily="18" charset="0"/>
-              </a:rPr>
-              <a:t>Web-based deployment </a:t>
-            </a:r>
-          </a:p>
-          <a:p>
-            <a:r>
-              <a:rPr lang="en-US" dirty="0">
-                <a:latin typeface="Times New Roman" panose="02020603050405020304" pitchFamily="18" charset="0"/>
-                <a:cs typeface="Times New Roman" panose="02020603050405020304" pitchFamily="18" charset="0"/>
-              </a:rPr>
-              <a:t>Mobile application </a:t>
-            </a:r>
-          </a:p>
-          <a:p>
-            <a:r>
-              <a:rPr lang="en-US" dirty="0">
-                <a:latin typeface="Times New Roman" panose="02020603050405020304" pitchFamily="18" charset="0"/>
-                <a:cs typeface="Times New Roman" panose="02020603050405020304" pitchFamily="18" charset="0"/>
-              </a:rPr>
-              <a:t>Multi-user authentication </a:t>
-            </a:r>
-          </a:p>
-          <a:p>
-            <a:r>
-              <a:rPr lang="en-US" dirty="0">
-                <a:latin typeface="Times New Roman" panose="02020603050405020304" pitchFamily="18" charset="0"/>
-                <a:cs typeface="Times New Roman" panose="02020603050405020304" pitchFamily="18" charset="0"/>
-              </a:rPr>
-              <a:t>AI demand forecasting </a:t>
-            </a:r>
-          </a:p>
-          <a:p>
-            <a:r>
-              <a:rPr lang="en-US" dirty="0">
-                <a:latin typeface="Times New Roman" panose="02020603050405020304" pitchFamily="18" charset="0"/>
-                <a:cs typeface="Times New Roman" panose="02020603050405020304" pitchFamily="18" charset="0"/>
-              </a:rPr>
-              <a:t>Email/SMS inventory alerts </a:t>
-            </a:r>
-          </a:p>
-          <a:p>
-            <a:r>
-              <a:rPr lang="en-US" dirty="0">
-                <a:latin typeface="Times New Roman" panose="02020603050405020304" pitchFamily="18" charset="0"/>
-                <a:cs typeface="Times New Roman" panose="02020603050405020304" pitchFamily="18" charset="0"/>
-              </a:rPr>
-              <a:t>Interactive dashboards (Power BI or </a:t>
-            </a:r>
-            <a:r>
-              <a:rPr lang="en-US" dirty="0" err="1">
-                <a:latin typeface="Times New Roman" panose="02020603050405020304" pitchFamily="18" charset="0"/>
-                <a:cs typeface="Times New Roman" panose="02020603050405020304" pitchFamily="18" charset="0"/>
-              </a:rPr>
-              <a:t>Plotly</a:t>
-            </a:r>
-            <a:r>
-              <a:rPr lang="en-US" dirty="0">
-                <a:latin typeface="Times New Roman" panose="02020603050405020304" pitchFamily="18" charset="0"/>
-                <a:cs typeface="Times New Roman" panose="02020603050405020304" pitchFamily="18" charset="0"/>
-              </a:rPr>
-              <a:t>)</a:t>
-            </a:r>
-          </a:p>
-        </p:txBody>
-      </p:sp>
-    </p:spTree>
-    <p:extLst>
-      <p:ext uri="{BB962C8B-B14F-4D97-AF65-F5344CB8AC3E}">
-        <p14:creationId xmlns:p14="http://schemas.microsoft.com/office/powerpoint/2010/main" val="1772330607"/>
-      </p:ext>
-    </p:extLst>
-  </p:cSld>
-  <p:clrMapOvr>
-    <a:masterClrMapping/>
-  </p:clrMapOvr>
-</p:sld>
-</file>
-
 <file path=ppt/slides/slide2.xml><?xml version="1.0" encoding="utf-8"?>
 <p:sld xmlns:a="http://schemas.openxmlformats.org/drawingml/2006/main" xmlns:r="http://schemas.openxmlformats.org/officeDocument/2006/relationships" xmlns:p="http://schemas.openxmlformats.org/presentationml/2006/main">
   <p:cSld>
@@ -7555,7 +7506,7 @@
           <p:cNvPr id="2" name="Title 1">
             <a:extLst>
               <a:ext uri="{FF2B5EF4-FFF2-40B4-BE49-F238E27FC236}">
-                <a16:creationId xmlns:a16="http://schemas.microsoft.com/office/drawing/2014/main" id="{565E9767-F83D-78F8-858D-5E714B46CA12}"/>
+                <a16:creationId xmlns:a16="http://schemas.microsoft.com/office/drawing/2014/main" id="{FAEF834B-146C-2728-A7D1-5153329C6125}"/>
               </a:ext>
             </a:extLst>
           </p:cNvPr>
@@ -7576,7 +7527,7 @@
                 <a:latin typeface="Times New Roman" panose="02020603050405020304" pitchFamily="18" charset="0"/>
                 <a:cs typeface="Times New Roman" panose="02020603050405020304" pitchFamily="18" charset="0"/>
               </a:rPr>
-              <a:t>Background of the Study</a:t>
+              <a:t>Table of Contents		</a:t>
             </a:r>
           </a:p>
         </p:txBody>
@@ -7586,7 +7537,7 @@
           <p:cNvPr id="3" name="Content Placeholder 2">
             <a:extLst>
               <a:ext uri="{FF2B5EF4-FFF2-40B4-BE49-F238E27FC236}">
-                <a16:creationId xmlns:a16="http://schemas.microsoft.com/office/drawing/2014/main" id="{1720E463-D506-FD6E-805D-8815B052E6F9}"/>
+                <a16:creationId xmlns:a16="http://schemas.microsoft.com/office/drawing/2014/main" id="{007868B3-D138-5BF8-E514-8B63CAB4FF11}"/>
               </a:ext>
             </a:extLst>
           </p:cNvPr>
@@ -7600,7 +7551,7 @@
         <p:spPr/>
         <p:txBody>
           <a:bodyPr>
-            <a:normAutofit fontScale="92500" lnSpcReduction="10000"/>
+            <a:normAutofit lnSpcReduction="10000"/>
           </a:bodyPr>
           <a:lstStyle/>
           <a:p>
@@ -7609,43 +7560,61 @@
                 <a:latin typeface="Times New Roman" panose="02020603050405020304" pitchFamily="18" charset="0"/>
                 <a:cs typeface="Times New Roman" panose="02020603050405020304" pitchFamily="18" charset="0"/>
               </a:rPr>
-              <a:t>Inventory is a valuable business asset that requires efficient management.</a:t>
-            </a:r>
-          </a:p>
-          <a:p>
-            <a:r>
-              <a:rPr lang="en-US" dirty="0">
-                <a:latin typeface="Times New Roman" panose="02020603050405020304" pitchFamily="18" charset="0"/>
-                <a:cs typeface="Times New Roman" panose="02020603050405020304" pitchFamily="18" charset="0"/>
-              </a:rPr>
-              <a:t>Many SMEs still use manual record-keeping methods. </a:t>
-            </a:r>
-          </a:p>
-          <a:p>
-            <a:r>
-              <a:rPr lang="en-US" dirty="0">
-                <a:latin typeface="Times New Roman" panose="02020603050405020304" pitchFamily="18" charset="0"/>
-                <a:cs typeface="Times New Roman" panose="02020603050405020304" pitchFamily="18" charset="0"/>
-              </a:rPr>
-              <a:t>Manual systems often result in inaccurate stock records, delayed reporting, and poor decision-making. </a:t>
-            </a:r>
-          </a:p>
-          <a:p>
-            <a:r>
-              <a:rPr lang="en-US" dirty="0">
-                <a:latin typeface="Times New Roman" panose="02020603050405020304" pitchFamily="18" charset="0"/>
-                <a:cs typeface="Times New Roman" panose="02020603050405020304" pitchFamily="18" charset="0"/>
-              </a:rPr>
-              <a:t>Computerized inventory systems improve efficiency through automation and real-time monitoring. </a:t>
-            </a:r>
-          </a:p>
-          <a:p>
-            <a:r>
-              <a:rPr lang="en-US" dirty="0">
-                <a:latin typeface="Times New Roman" panose="02020603050405020304" pitchFamily="18" charset="0"/>
-                <a:cs typeface="Times New Roman" panose="02020603050405020304" pitchFamily="18" charset="0"/>
-              </a:rPr>
-              <a:t>This project integrates inventory control with business analytics to enhance operational performance.</a:t>
+              <a:t>Background of the Study</a:t>
+            </a:r>
+          </a:p>
+          <a:p>
+            <a:r>
+              <a:rPr lang="en-US" dirty="0">
+                <a:latin typeface="Times New Roman" panose="02020603050405020304" pitchFamily="18" charset="0"/>
+                <a:cs typeface="Times New Roman" panose="02020603050405020304" pitchFamily="18" charset="0"/>
+              </a:rPr>
+              <a:t>Statement of the Problem	</a:t>
+            </a:r>
+          </a:p>
+          <a:p>
+            <a:r>
+              <a:rPr lang="en-US" dirty="0">
+                <a:latin typeface="Times New Roman" panose="02020603050405020304" pitchFamily="18" charset="0"/>
+                <a:cs typeface="Times New Roman" panose="02020603050405020304" pitchFamily="18" charset="0"/>
+              </a:rPr>
+              <a:t>Aim and Objectives</a:t>
+            </a:r>
+          </a:p>
+          <a:p>
+            <a:r>
+              <a:rPr lang="en-US" dirty="0">
+                <a:latin typeface="Times New Roman" panose="02020603050405020304" pitchFamily="18" charset="0"/>
+                <a:cs typeface="Times New Roman" panose="02020603050405020304" pitchFamily="18" charset="0"/>
+              </a:rPr>
+              <a:t>Significance of the study	</a:t>
+            </a:r>
+          </a:p>
+          <a:p>
+            <a:r>
+              <a:rPr lang="en-US" dirty="0">
+                <a:latin typeface="Times New Roman" panose="02020603050405020304" pitchFamily="18" charset="0"/>
+                <a:cs typeface="Times New Roman" panose="02020603050405020304" pitchFamily="18" charset="0"/>
+              </a:rPr>
+              <a:t>Advantages</a:t>
+            </a:r>
+          </a:p>
+          <a:p>
+            <a:r>
+              <a:rPr lang="en-US" dirty="0">
+                <a:latin typeface="Times New Roman" panose="02020603050405020304" pitchFamily="18" charset="0"/>
+                <a:cs typeface="Times New Roman" panose="02020603050405020304" pitchFamily="18" charset="0"/>
+              </a:rPr>
+              <a:t>Scope of the study</a:t>
+            </a:r>
+          </a:p>
+          <a:p>
+            <a:r>
+              <a:rPr lang="en-US" dirty="0">
+                <a:latin typeface="Times New Roman" panose="02020603050405020304" pitchFamily="18" charset="0"/>
+                <a:cs typeface="Times New Roman" panose="02020603050405020304" pitchFamily="18" charset="0"/>
+              </a:rPr>
+              <a:t>Literature Review				</a:t>
             </a:r>
           </a:p>
         </p:txBody>
@@ -7653,7 +7622,7 @@
     </p:spTree>
     <p:extLst>
       <p:ext uri="{BB962C8B-B14F-4D97-AF65-F5344CB8AC3E}">
-        <p14:creationId xmlns:p14="http://schemas.microsoft.com/office/powerpoint/2010/main" val="3794067814"/>
+        <p14:creationId xmlns:p14="http://schemas.microsoft.com/office/powerpoint/2010/main" val="2921905385"/>
       </p:ext>
     </p:extLst>
   </p:cSld>
@@ -7685,6 +7654,461 @@
           <p:cNvPr id="2" name="Title 1">
             <a:extLst>
               <a:ext uri="{FF2B5EF4-FFF2-40B4-BE49-F238E27FC236}">
+                <a16:creationId xmlns:a16="http://schemas.microsoft.com/office/drawing/2014/main" id="{0F30EB64-06AA-2A35-A137-AC24B492890C}"/>
+              </a:ext>
+            </a:extLst>
+          </p:cNvPr>
+          <p:cNvSpPr>
+            <a:spLocks noGrp="1"/>
+          </p:cNvSpPr>
+          <p:nvPr>
+            <p:ph type="title"/>
+          </p:nvPr>
+        </p:nvSpPr>
+        <p:spPr/>
+        <p:txBody>
+          <a:bodyPr/>
+          <a:lstStyle/>
+          <a:p>
+            <a:r>
+              <a:rPr lang="en-US" dirty="0">
+                <a:latin typeface="Times New Roman" panose="02020603050405020304" pitchFamily="18" charset="0"/>
+                <a:cs typeface="Times New Roman" panose="02020603050405020304" pitchFamily="18" charset="0"/>
+              </a:rPr>
+              <a:t>Summary</a:t>
+            </a:r>
+          </a:p>
+        </p:txBody>
+      </p:sp>
+      <p:sp>
+        <p:nvSpPr>
+          <p:cNvPr id="3" name="Content Placeholder 2">
+            <a:extLst>
+              <a:ext uri="{FF2B5EF4-FFF2-40B4-BE49-F238E27FC236}">
+                <a16:creationId xmlns:a16="http://schemas.microsoft.com/office/drawing/2014/main" id="{BA62B9DE-891C-6A9B-F1B7-A0426B574468}"/>
+              </a:ext>
+            </a:extLst>
+          </p:cNvPr>
+          <p:cNvSpPr>
+            <a:spLocks noGrp="1"/>
+          </p:cNvSpPr>
+          <p:nvPr>
+            <p:ph idx="1"/>
+          </p:nvPr>
+        </p:nvSpPr>
+        <p:spPr/>
+        <p:txBody>
+          <a:bodyPr>
+            <a:noAutofit/>
+          </a:bodyPr>
+          <a:lstStyle/>
+          <a:p>
+            <a:pPr marL="0" indent="0">
+              <a:buNone/>
+            </a:pPr>
+            <a:r>
+              <a:rPr lang="en-US" sz="1750" b="1" dirty="0">
+                <a:latin typeface="Times New Roman" panose="02020603050405020304" pitchFamily="18" charset="0"/>
+                <a:cs typeface="Times New Roman" panose="02020603050405020304" pitchFamily="18" charset="0"/>
+              </a:rPr>
+              <a:t>Key Features</a:t>
+            </a:r>
+          </a:p>
+          <a:p>
+            <a:r>
+              <a:rPr lang="en-US" sz="1750" dirty="0">
+                <a:latin typeface="Times New Roman" panose="02020603050405020304" pitchFamily="18" charset="0"/>
+                <a:cs typeface="Times New Roman" panose="02020603050405020304" pitchFamily="18" charset="0"/>
+              </a:rPr>
+              <a:t>Automated inventory management </a:t>
+            </a:r>
+          </a:p>
+          <a:p>
+            <a:r>
+              <a:rPr lang="en-US" sz="1750" dirty="0">
+                <a:latin typeface="Times New Roman" panose="02020603050405020304" pitchFamily="18" charset="0"/>
+                <a:cs typeface="Times New Roman" panose="02020603050405020304" pitchFamily="18" charset="0"/>
+              </a:rPr>
+              <a:t>Sales tracking </a:t>
+            </a:r>
+          </a:p>
+          <a:p>
+            <a:r>
+              <a:rPr lang="en-US" sz="1750" dirty="0">
+                <a:latin typeface="Times New Roman" panose="02020603050405020304" pitchFamily="18" charset="0"/>
+                <a:cs typeface="Times New Roman" panose="02020603050405020304" pitchFamily="18" charset="0"/>
+              </a:rPr>
+              <a:t>Profit computation </a:t>
+            </a:r>
+          </a:p>
+          <a:p>
+            <a:r>
+              <a:rPr lang="en-US" sz="1750" dirty="0">
+                <a:latin typeface="Times New Roman" panose="02020603050405020304" pitchFamily="18" charset="0"/>
+                <a:cs typeface="Times New Roman" panose="02020603050405020304" pitchFamily="18" charset="0"/>
+              </a:rPr>
+              <a:t>Income analysis </a:t>
+            </a:r>
+          </a:p>
+          <a:p>
+            <a:r>
+              <a:rPr lang="en-US" sz="1750" dirty="0">
+                <a:latin typeface="Times New Roman" panose="02020603050405020304" pitchFamily="18" charset="0"/>
+                <a:cs typeface="Times New Roman" panose="02020603050405020304" pitchFamily="18" charset="0"/>
+              </a:rPr>
+              <a:t>Low-stock alerts </a:t>
+            </a:r>
+          </a:p>
+          <a:p>
+            <a:r>
+              <a:rPr lang="en-US" sz="1750" dirty="0">
+                <a:latin typeface="Times New Roman" panose="02020603050405020304" pitchFamily="18" charset="0"/>
+                <a:cs typeface="Times New Roman" panose="02020603050405020304" pitchFamily="18" charset="0"/>
+              </a:rPr>
+              <a:t>Business dashboard </a:t>
+            </a:r>
+          </a:p>
+          <a:p>
+            <a:r>
+              <a:rPr lang="en-US" sz="1750" dirty="0">
+                <a:latin typeface="Times New Roman" panose="02020603050405020304" pitchFamily="18" charset="0"/>
+                <a:cs typeface="Times New Roman" panose="02020603050405020304" pitchFamily="18" charset="0"/>
+              </a:rPr>
+              <a:t>Data visualization </a:t>
+            </a:r>
+          </a:p>
+          <a:p>
+            <a:r>
+              <a:rPr lang="en-US" sz="1750" dirty="0">
+                <a:latin typeface="Times New Roman" panose="02020603050405020304" pitchFamily="18" charset="0"/>
+                <a:cs typeface="Times New Roman" panose="02020603050405020304" pitchFamily="18" charset="0"/>
+              </a:rPr>
+              <a:t>Real-time reporting</a:t>
+            </a:r>
+          </a:p>
+          <a:p>
+            <a:endParaRPr lang="en-US" sz="1750" dirty="0">
+              <a:latin typeface="Times New Roman" panose="02020603050405020304" pitchFamily="18" charset="0"/>
+              <a:cs typeface="Times New Roman" panose="02020603050405020304" pitchFamily="18" charset="0"/>
+            </a:endParaRPr>
+          </a:p>
+        </p:txBody>
+      </p:sp>
+    </p:spTree>
+    <p:extLst>
+      <p:ext uri="{BB962C8B-B14F-4D97-AF65-F5344CB8AC3E}">
+        <p14:creationId xmlns:p14="http://schemas.microsoft.com/office/powerpoint/2010/main" val="1510451051"/>
+      </p:ext>
+    </p:extLst>
+  </p:cSld>
+  <p:clrMapOvr>
+    <a:masterClrMapping/>
+  </p:clrMapOvr>
+</p:sld>
+</file>
+
+<file path=ppt/slides/slide21.xml><?xml version="1.0" encoding="utf-8"?>
+<p:sld xmlns:a="http://schemas.openxmlformats.org/drawingml/2006/main" xmlns:r="http://schemas.openxmlformats.org/officeDocument/2006/relationships" xmlns:p="http://schemas.openxmlformats.org/presentationml/2006/main">
+  <p:cSld>
+    <p:spTree>
+      <p:nvGrpSpPr>
+        <p:cNvPr id="1" name=""/>
+        <p:cNvGrpSpPr/>
+        <p:nvPr/>
+      </p:nvGrpSpPr>
+      <p:grpSpPr>
+        <a:xfrm>
+          <a:off x="0" y="0"/>
+          <a:ext cx="0" cy="0"/>
+          <a:chOff x="0" y="0"/>
+          <a:chExt cx="0" cy="0"/>
+        </a:xfrm>
+      </p:grpSpPr>
+      <p:sp>
+        <p:nvSpPr>
+          <p:cNvPr id="2" name="Title 1">
+            <a:extLst>
+              <a:ext uri="{FF2B5EF4-FFF2-40B4-BE49-F238E27FC236}">
+                <a16:creationId xmlns:a16="http://schemas.microsoft.com/office/drawing/2014/main" id="{4F91714A-6597-8482-D38E-A1C2037A20A4}"/>
+              </a:ext>
+            </a:extLst>
+          </p:cNvPr>
+          <p:cNvSpPr>
+            <a:spLocks noGrp="1"/>
+          </p:cNvSpPr>
+          <p:nvPr>
+            <p:ph type="title"/>
+          </p:nvPr>
+        </p:nvSpPr>
+        <p:spPr/>
+        <p:txBody>
+          <a:bodyPr>
+            <a:normAutofit/>
+          </a:bodyPr>
+          <a:lstStyle/>
+          <a:p>
+            <a:r>
+              <a:rPr lang="en-US" dirty="0">
+                <a:latin typeface="Times New Roman" panose="02020603050405020304" pitchFamily="18" charset="0"/>
+                <a:cs typeface="Times New Roman" panose="02020603050405020304" pitchFamily="18" charset="0"/>
+              </a:rPr>
+              <a:t>Conclusion</a:t>
+            </a:r>
+          </a:p>
+        </p:txBody>
+      </p:sp>
+      <p:sp>
+        <p:nvSpPr>
+          <p:cNvPr id="3" name="Content Placeholder 2">
+            <a:extLst>
+              <a:ext uri="{FF2B5EF4-FFF2-40B4-BE49-F238E27FC236}">
+                <a16:creationId xmlns:a16="http://schemas.microsoft.com/office/drawing/2014/main" id="{055F38D2-926A-8E51-B450-BDBB8F72C531}"/>
+              </a:ext>
+            </a:extLst>
+          </p:cNvPr>
+          <p:cNvSpPr>
+            <a:spLocks noGrp="1"/>
+          </p:cNvSpPr>
+          <p:nvPr>
+            <p:ph idx="1"/>
+          </p:nvPr>
+        </p:nvSpPr>
+        <p:spPr/>
+        <p:txBody>
+          <a:bodyPr/>
+          <a:lstStyle/>
+          <a:p>
+            <a:r>
+              <a:rPr lang="en-US" dirty="0">
+                <a:latin typeface="Times New Roman" panose="02020603050405020304" pitchFamily="18" charset="0"/>
+                <a:cs typeface="Times New Roman" panose="02020603050405020304" pitchFamily="18" charset="0"/>
+              </a:rPr>
+              <a:t>The system successfully automates inventory operations by integrating stock management, sales analysis, financial computation, and visualization into a single platform.</a:t>
+            </a:r>
+          </a:p>
+          <a:p>
+            <a:r>
+              <a:rPr lang="en-US" dirty="0">
+                <a:latin typeface="Times New Roman" panose="02020603050405020304" pitchFamily="18" charset="0"/>
+                <a:cs typeface="Times New Roman" panose="02020603050405020304" pitchFamily="18" charset="0"/>
+              </a:rPr>
+              <a:t>The system enhances efficiency, minimizes human errors, supports timely inventory replenishment, and provides real-time insights for better business decisions.</a:t>
+            </a:r>
+          </a:p>
+          <a:p>
+            <a:endParaRPr lang="en-US" dirty="0">
+              <a:latin typeface="Times New Roman" panose="02020603050405020304" pitchFamily="18" charset="0"/>
+              <a:cs typeface="Times New Roman" panose="02020603050405020304" pitchFamily="18" charset="0"/>
+            </a:endParaRPr>
+          </a:p>
+        </p:txBody>
+      </p:sp>
+    </p:spTree>
+    <p:extLst>
+      <p:ext uri="{BB962C8B-B14F-4D97-AF65-F5344CB8AC3E}">
+        <p14:creationId xmlns:p14="http://schemas.microsoft.com/office/powerpoint/2010/main" val="520599717"/>
+      </p:ext>
+    </p:extLst>
+  </p:cSld>
+  <p:clrMapOvr>
+    <a:masterClrMapping/>
+  </p:clrMapOvr>
+</p:sld>
+</file>
+
+<file path=ppt/slides/slide22.xml><?xml version="1.0" encoding="utf-8"?>
+<p:sld xmlns:a="http://schemas.openxmlformats.org/drawingml/2006/main" xmlns:r="http://schemas.openxmlformats.org/officeDocument/2006/relationships" xmlns:p="http://schemas.openxmlformats.org/presentationml/2006/main">
+  <p:cSld>
+    <p:spTree>
+      <p:nvGrpSpPr>
+        <p:cNvPr id="1" name=""/>
+        <p:cNvGrpSpPr/>
+        <p:nvPr/>
+      </p:nvGrpSpPr>
+      <p:grpSpPr>
+        <a:xfrm>
+          <a:off x="0" y="0"/>
+          <a:ext cx="0" cy="0"/>
+          <a:chOff x="0" y="0"/>
+          <a:chExt cx="0" cy="0"/>
+        </a:xfrm>
+      </p:grpSpPr>
+      <p:sp>
+        <p:nvSpPr>
+          <p:cNvPr id="2" name="Title 1">
+            <a:extLst>
+              <a:ext uri="{FF2B5EF4-FFF2-40B4-BE49-F238E27FC236}">
+                <a16:creationId xmlns:a16="http://schemas.microsoft.com/office/drawing/2014/main" id="{66EA689D-10D7-AA02-3F16-1689E3F35EFF}"/>
+              </a:ext>
+            </a:extLst>
+          </p:cNvPr>
+          <p:cNvSpPr>
+            <a:spLocks noGrp="1"/>
+          </p:cNvSpPr>
+          <p:nvPr>
+            <p:ph type="title"/>
+          </p:nvPr>
+        </p:nvSpPr>
+        <p:spPr/>
+        <p:txBody>
+          <a:bodyPr/>
+          <a:lstStyle/>
+          <a:p>
+            <a:r>
+              <a:rPr lang="en-US" dirty="0">
+                <a:latin typeface="Times New Roman" panose="02020603050405020304" pitchFamily="18" charset="0"/>
+                <a:cs typeface="Times New Roman" panose="02020603050405020304" pitchFamily="18" charset="0"/>
+              </a:rPr>
+              <a:t>Recommendations</a:t>
+            </a:r>
+          </a:p>
+        </p:txBody>
+      </p:sp>
+      <p:sp>
+        <p:nvSpPr>
+          <p:cNvPr id="3" name="Content Placeholder 2">
+            <a:extLst>
+              <a:ext uri="{FF2B5EF4-FFF2-40B4-BE49-F238E27FC236}">
+                <a16:creationId xmlns:a16="http://schemas.microsoft.com/office/drawing/2014/main" id="{788E01B0-9F77-C630-FBE7-A936675D3735}"/>
+              </a:ext>
+            </a:extLst>
+          </p:cNvPr>
+          <p:cNvSpPr>
+            <a:spLocks noGrp="1"/>
+          </p:cNvSpPr>
+          <p:nvPr>
+            <p:ph idx="1"/>
+          </p:nvPr>
+        </p:nvSpPr>
+        <p:spPr/>
+        <p:txBody>
+          <a:bodyPr>
+            <a:normAutofit fontScale="92500" lnSpcReduction="20000"/>
+          </a:bodyPr>
+          <a:lstStyle/>
+          <a:p>
+            <a:r>
+              <a:rPr lang="en-US" dirty="0">
+                <a:latin typeface="Times New Roman" panose="02020603050405020304" pitchFamily="18" charset="0"/>
+                <a:cs typeface="Times New Roman" panose="02020603050405020304" pitchFamily="18" charset="0"/>
+              </a:rPr>
+              <a:t>Cloud database integration </a:t>
+            </a:r>
+          </a:p>
+          <a:p>
+            <a:r>
+              <a:rPr lang="en-US" dirty="0">
+                <a:latin typeface="Times New Roman" panose="02020603050405020304" pitchFamily="18" charset="0"/>
+                <a:cs typeface="Times New Roman" panose="02020603050405020304" pitchFamily="18" charset="0"/>
+              </a:rPr>
+              <a:t>Barcode scanning QR Code support </a:t>
+            </a:r>
+          </a:p>
+          <a:p>
+            <a:r>
+              <a:rPr lang="en-US" dirty="0">
+                <a:latin typeface="Times New Roman" panose="02020603050405020304" pitchFamily="18" charset="0"/>
+                <a:cs typeface="Times New Roman" panose="02020603050405020304" pitchFamily="18" charset="0"/>
+              </a:rPr>
+              <a:t>Web-based deployment </a:t>
+            </a:r>
+          </a:p>
+          <a:p>
+            <a:r>
+              <a:rPr lang="en-US" dirty="0">
+                <a:latin typeface="Times New Roman" panose="02020603050405020304" pitchFamily="18" charset="0"/>
+                <a:cs typeface="Times New Roman" panose="02020603050405020304" pitchFamily="18" charset="0"/>
+              </a:rPr>
+              <a:t>Mobile application </a:t>
+            </a:r>
+          </a:p>
+          <a:p>
+            <a:r>
+              <a:rPr lang="en-US" dirty="0">
+                <a:latin typeface="Times New Roman" panose="02020603050405020304" pitchFamily="18" charset="0"/>
+                <a:cs typeface="Times New Roman" panose="02020603050405020304" pitchFamily="18" charset="0"/>
+              </a:rPr>
+              <a:t>Multi-user authentication </a:t>
+            </a:r>
+          </a:p>
+          <a:p>
+            <a:r>
+              <a:rPr lang="en-US" dirty="0">
+                <a:latin typeface="Times New Roman" panose="02020603050405020304" pitchFamily="18" charset="0"/>
+                <a:cs typeface="Times New Roman" panose="02020603050405020304" pitchFamily="18" charset="0"/>
+              </a:rPr>
+              <a:t>AI demand forecasting </a:t>
+            </a:r>
+          </a:p>
+          <a:p>
+            <a:r>
+              <a:rPr lang="en-US" dirty="0">
+                <a:latin typeface="Times New Roman" panose="02020603050405020304" pitchFamily="18" charset="0"/>
+                <a:cs typeface="Times New Roman" panose="02020603050405020304" pitchFamily="18" charset="0"/>
+              </a:rPr>
+              <a:t>Email/SMS inventory alerts </a:t>
+            </a:r>
+          </a:p>
+          <a:p>
+            <a:r>
+              <a:rPr lang="en-US" dirty="0">
+                <a:latin typeface="Times New Roman" panose="02020603050405020304" pitchFamily="18" charset="0"/>
+                <a:cs typeface="Times New Roman" panose="02020603050405020304" pitchFamily="18" charset="0"/>
+              </a:rPr>
+              <a:t>Interactive dashboards (Power BI or </a:t>
+            </a:r>
+            <a:r>
+              <a:rPr lang="en-US" dirty="0" err="1">
+                <a:latin typeface="Times New Roman" panose="02020603050405020304" pitchFamily="18" charset="0"/>
+                <a:cs typeface="Times New Roman" panose="02020603050405020304" pitchFamily="18" charset="0"/>
+              </a:rPr>
+              <a:t>Plotly</a:t>
+            </a:r>
+            <a:r>
+              <a:rPr lang="en-US" dirty="0">
+                <a:latin typeface="Times New Roman" panose="02020603050405020304" pitchFamily="18" charset="0"/>
+                <a:cs typeface="Times New Roman" panose="02020603050405020304" pitchFamily="18" charset="0"/>
+              </a:rPr>
+              <a:t>)</a:t>
+            </a:r>
+          </a:p>
+        </p:txBody>
+      </p:sp>
+    </p:spTree>
+    <p:extLst>
+      <p:ext uri="{BB962C8B-B14F-4D97-AF65-F5344CB8AC3E}">
+        <p14:creationId xmlns:p14="http://schemas.microsoft.com/office/powerpoint/2010/main" val="1772330607"/>
+      </p:ext>
+    </p:extLst>
+  </p:cSld>
+  <p:clrMapOvr>
+    <a:masterClrMapping/>
+  </p:clrMapOvr>
+</p:sld>
+</file>
+
+<file path=ppt/slides/slide23.xml><?xml version="1.0" encoding="utf-8"?>
+<p:sld xmlns:a="http://schemas.openxmlformats.org/drawingml/2006/main" xmlns:r="http://schemas.openxmlformats.org/officeDocument/2006/relationships" xmlns:p="http://schemas.openxmlformats.org/presentationml/2006/main">
+  <p:cSld>
+    <p:spTree>
+      <p:nvGrpSpPr>
+        <p:cNvPr id="1" name=""/>
+        <p:cNvGrpSpPr/>
+        <p:nvPr/>
+      </p:nvGrpSpPr>
+      <p:grpSpPr>
+        <a:xfrm>
+          <a:off x="0" y="0"/>
+          <a:ext cx="0" cy="0"/>
+          <a:chOff x="0" y="0"/>
+          <a:chExt cx="0" cy="0"/>
+        </a:xfrm>
+      </p:grpSpPr>
+      <p:sp>
+        <p:nvSpPr>
+          <p:cNvPr id="2" name="Title 1">
+            <a:extLst>
+              <a:ext uri="{FF2B5EF4-FFF2-40B4-BE49-F238E27FC236}">
                 <a16:creationId xmlns:a16="http://schemas.microsoft.com/office/drawing/2014/main" id="{E0162037-895C-B6D2-5E0E-5C6AF4791A3A}"/>
               </a:ext>
             </a:extLst>
@@ -7793,7 +8217,236 @@
 </p:sld>
 </file>
 
-<file path=ppt/slides/slide21.xml><?xml version="1.0" encoding="utf-8"?>
+<file path=ppt/slides/slide24.xml><?xml version="1.0" encoding="utf-8"?>
+<p:sld xmlns:a="http://schemas.openxmlformats.org/drawingml/2006/main" xmlns:r="http://schemas.openxmlformats.org/officeDocument/2006/relationships" xmlns:p="http://schemas.openxmlformats.org/presentationml/2006/main">
+  <p:cSld>
+    <p:spTree>
+      <p:nvGrpSpPr>
+        <p:cNvPr id="1" name=""/>
+        <p:cNvGrpSpPr/>
+        <p:nvPr/>
+      </p:nvGrpSpPr>
+      <p:grpSpPr>
+        <a:xfrm>
+          <a:off x="0" y="0"/>
+          <a:ext cx="0" cy="0"/>
+          <a:chOff x="0" y="0"/>
+          <a:chExt cx="0" cy="0"/>
+        </a:xfrm>
+      </p:grpSpPr>
+      <p:sp>
+        <p:nvSpPr>
+          <p:cNvPr id="2" name="Title 1">
+            <a:extLst>
+              <a:ext uri="{FF2B5EF4-FFF2-40B4-BE49-F238E27FC236}">
+                <a16:creationId xmlns:a16="http://schemas.microsoft.com/office/drawing/2014/main" id="{0D0E80DB-A7B6-7D03-F76A-EA85EE1DF459}"/>
+              </a:ext>
+            </a:extLst>
+          </p:cNvPr>
+          <p:cNvSpPr>
+            <a:spLocks noGrp="1"/>
+          </p:cNvSpPr>
+          <p:nvPr>
+            <p:ph type="title"/>
+          </p:nvPr>
+        </p:nvSpPr>
+        <p:spPr/>
+        <p:txBody>
+          <a:bodyPr/>
+          <a:lstStyle/>
+          <a:p>
+            <a:r>
+              <a:rPr lang="en-US" dirty="0">
+                <a:latin typeface="Times New Roman" panose="02020603050405020304" pitchFamily="18" charset="0"/>
+                <a:cs typeface="Times New Roman" panose="02020603050405020304" pitchFamily="18" charset="0"/>
+              </a:rPr>
+              <a:t>References</a:t>
+            </a:r>
+          </a:p>
+        </p:txBody>
+      </p:sp>
+      <p:sp>
+        <p:nvSpPr>
+          <p:cNvPr id="3" name="Content Placeholder 2">
+            <a:extLst>
+              <a:ext uri="{FF2B5EF4-FFF2-40B4-BE49-F238E27FC236}">
+                <a16:creationId xmlns:a16="http://schemas.microsoft.com/office/drawing/2014/main" id="{857A4CA8-8258-5F28-0E9C-ADD0F6D499C1}"/>
+              </a:ext>
+            </a:extLst>
+          </p:cNvPr>
+          <p:cNvSpPr>
+            <a:spLocks noGrp="1"/>
+          </p:cNvSpPr>
+          <p:nvPr>
+            <p:ph idx="1"/>
+          </p:nvPr>
+        </p:nvSpPr>
+        <p:spPr/>
+        <p:txBody>
+          <a:bodyPr>
+            <a:normAutofit fontScale="85000" lnSpcReduction="20000"/>
+          </a:bodyPr>
+          <a:lstStyle/>
+          <a:p>
+            <a:r>
+              <a:rPr lang="en-US" dirty="0">
+                <a:latin typeface="Times New Roman" panose="02020603050405020304" pitchFamily="18" charset="0"/>
+                <a:cs typeface="Times New Roman" panose="02020603050405020304" pitchFamily="18" charset="0"/>
+              </a:rPr>
+              <a:t>Chopra, S., &amp; Meindl, P. (2019). </a:t>
+            </a:r>
+            <a:r>
+              <a:rPr lang="en-US" i="1" dirty="0">
+                <a:latin typeface="Times New Roman" panose="02020603050405020304" pitchFamily="18" charset="0"/>
+                <a:cs typeface="Times New Roman" panose="02020603050405020304" pitchFamily="18" charset="0"/>
+              </a:rPr>
+              <a:t>Supply Chain Management: Strategy, Planning, and Operation</a:t>
+            </a:r>
+            <a:r>
+              <a:rPr lang="en-US" dirty="0">
+                <a:latin typeface="Times New Roman" panose="02020603050405020304" pitchFamily="18" charset="0"/>
+                <a:cs typeface="Times New Roman" panose="02020603050405020304" pitchFamily="18" charset="0"/>
+              </a:rPr>
+              <a:t> (7th ed.). Pearson.</a:t>
+            </a:r>
+          </a:p>
+          <a:p>
+            <a:r>
+              <a:rPr lang="en-US" dirty="0">
+                <a:latin typeface="Times New Roman" panose="02020603050405020304" pitchFamily="18" charset="0"/>
+                <a:cs typeface="Times New Roman" panose="02020603050405020304" pitchFamily="18" charset="0"/>
+              </a:rPr>
+              <a:t>Heizer, J., Render, B., &amp; Munson, C. (2020). </a:t>
+            </a:r>
+            <a:r>
+              <a:rPr lang="en-US" i="1" dirty="0">
+                <a:latin typeface="Times New Roman" panose="02020603050405020304" pitchFamily="18" charset="0"/>
+                <a:cs typeface="Times New Roman" panose="02020603050405020304" pitchFamily="18" charset="0"/>
+              </a:rPr>
+              <a:t>Operations Management</a:t>
+            </a:r>
+            <a:r>
+              <a:rPr lang="en-US" dirty="0">
+                <a:latin typeface="Times New Roman" panose="02020603050405020304" pitchFamily="18" charset="0"/>
+                <a:cs typeface="Times New Roman" panose="02020603050405020304" pitchFamily="18" charset="0"/>
+              </a:rPr>
+              <a:t> (13th ed.). Pearson.</a:t>
+            </a:r>
+          </a:p>
+          <a:p>
+            <a:r>
+              <a:rPr lang="en-US" dirty="0">
+                <a:latin typeface="Times New Roman" panose="02020603050405020304" pitchFamily="18" charset="0"/>
+                <a:cs typeface="Times New Roman" panose="02020603050405020304" pitchFamily="18" charset="0"/>
+              </a:rPr>
+              <a:t>McKinney, W. (2022). </a:t>
+            </a:r>
+            <a:r>
+              <a:rPr lang="en-US" i="1" dirty="0">
+                <a:latin typeface="Times New Roman" panose="02020603050405020304" pitchFamily="18" charset="0"/>
+                <a:cs typeface="Times New Roman" panose="02020603050405020304" pitchFamily="18" charset="0"/>
+              </a:rPr>
+              <a:t>Python for Data Analysis</a:t>
+            </a:r>
+            <a:r>
+              <a:rPr lang="en-US" dirty="0">
+                <a:latin typeface="Times New Roman" panose="02020603050405020304" pitchFamily="18" charset="0"/>
+                <a:cs typeface="Times New Roman" panose="02020603050405020304" pitchFamily="18" charset="0"/>
+              </a:rPr>
+              <a:t> (3rd ed.). O'Reilly Media.</a:t>
+            </a:r>
+          </a:p>
+          <a:p>
+            <a:r>
+              <a:rPr lang="en-US" dirty="0">
+                <a:latin typeface="Times New Roman" panose="02020603050405020304" pitchFamily="18" charset="0"/>
+                <a:cs typeface="Times New Roman" panose="02020603050405020304" pitchFamily="18" charset="0"/>
+              </a:rPr>
+              <a:t>Wes McKinney. (2022). </a:t>
+            </a:r>
+            <a:r>
+              <a:rPr lang="en-US" i="1" dirty="0">
+                <a:latin typeface="Times New Roman" panose="02020603050405020304" pitchFamily="18" charset="0"/>
+                <a:cs typeface="Times New Roman" panose="02020603050405020304" pitchFamily="18" charset="0"/>
+              </a:rPr>
+              <a:t>Python for Data Analysis</a:t>
+            </a:r>
+            <a:r>
+              <a:rPr lang="en-US" dirty="0">
+                <a:latin typeface="Times New Roman" panose="02020603050405020304" pitchFamily="18" charset="0"/>
+                <a:cs typeface="Times New Roman" panose="02020603050405020304" pitchFamily="18" charset="0"/>
+              </a:rPr>
+              <a:t>. O'Reilly.</a:t>
+            </a:r>
+          </a:p>
+          <a:p>
+            <a:r>
+              <a:rPr lang="en-US" dirty="0">
+                <a:latin typeface="Times New Roman" panose="02020603050405020304" pitchFamily="18" charset="0"/>
+                <a:cs typeface="Times New Roman" panose="02020603050405020304" pitchFamily="18" charset="0"/>
+              </a:rPr>
+              <a:t>Van Rossum, G., &amp; Drake, F. L. (2009). </a:t>
+            </a:r>
+            <a:r>
+              <a:rPr lang="en-US" i="1" dirty="0">
+                <a:latin typeface="Times New Roman" panose="02020603050405020304" pitchFamily="18" charset="0"/>
+                <a:cs typeface="Times New Roman" panose="02020603050405020304" pitchFamily="18" charset="0"/>
+              </a:rPr>
+              <a:t>Python 3 Reference Manual</a:t>
+            </a:r>
+            <a:r>
+              <a:rPr lang="en-US" dirty="0">
+                <a:latin typeface="Times New Roman" panose="02020603050405020304" pitchFamily="18" charset="0"/>
+                <a:cs typeface="Times New Roman" panose="02020603050405020304" pitchFamily="18" charset="0"/>
+              </a:rPr>
+              <a:t>. CreateSpace.</a:t>
+            </a:r>
+          </a:p>
+          <a:p>
+            <a:r>
+              <a:rPr lang="en-US" dirty="0">
+                <a:latin typeface="Times New Roman" panose="02020603050405020304" pitchFamily="18" charset="0"/>
+                <a:cs typeface="Times New Roman" panose="02020603050405020304" pitchFamily="18" charset="0"/>
+              </a:rPr>
+              <a:t>Hunter, J. D. (2007). Matplotlib: A 2D Graphics Environment. </a:t>
+            </a:r>
+            <a:r>
+              <a:rPr lang="en-US" i="1" dirty="0">
+                <a:latin typeface="Times New Roman" panose="02020603050405020304" pitchFamily="18" charset="0"/>
+                <a:cs typeface="Times New Roman" panose="02020603050405020304" pitchFamily="18" charset="0"/>
+              </a:rPr>
+              <a:t>Computing in Science &amp; Engineering, 9</a:t>
+            </a:r>
+            <a:r>
+              <a:rPr lang="en-US" dirty="0">
+                <a:latin typeface="Times New Roman" panose="02020603050405020304" pitchFamily="18" charset="0"/>
+                <a:cs typeface="Times New Roman" panose="02020603050405020304" pitchFamily="18" charset="0"/>
+              </a:rPr>
+              <a:t>(3), 90–95.</a:t>
+            </a:r>
+          </a:p>
+          <a:p>
+            <a:endParaRPr lang="en-US" dirty="0">
+              <a:latin typeface="Times New Roman" panose="02020603050405020304" pitchFamily="18" charset="0"/>
+              <a:cs typeface="Times New Roman" panose="02020603050405020304" pitchFamily="18" charset="0"/>
+            </a:endParaRPr>
+          </a:p>
+        </p:txBody>
+      </p:sp>
+    </p:spTree>
+    <p:extLst>
+      <p:ext uri="{BB962C8B-B14F-4D97-AF65-F5344CB8AC3E}">
+        <p14:creationId xmlns:p14="http://schemas.microsoft.com/office/powerpoint/2010/main" val="4078051552"/>
+      </p:ext>
+    </p:extLst>
+  </p:cSld>
+  <p:clrMapOvr>
+    <a:masterClrMapping/>
+  </p:clrMapOvr>
+</p:sld>
+</file>
+
+<file path=ppt/slides/slide25.xml><?xml version="1.0" encoding="utf-8"?>
 <p:sld xmlns:a="http://schemas.openxmlformats.org/drawingml/2006/main" xmlns:r="http://schemas.openxmlformats.org/officeDocument/2006/relationships" xmlns:p="http://schemas.openxmlformats.org/presentationml/2006/main">
   <p:cSld>
     <p:spTree>
@@ -7945,7 +8598,7 @@
           <p:cNvPr id="2" name="Title 1">
             <a:extLst>
               <a:ext uri="{FF2B5EF4-FFF2-40B4-BE49-F238E27FC236}">
-                <a16:creationId xmlns:a16="http://schemas.microsoft.com/office/drawing/2014/main" id="{63015D2D-436D-7A54-A226-723CB646B1F7}"/>
+                <a16:creationId xmlns:a16="http://schemas.microsoft.com/office/drawing/2014/main" id="{995CCEAE-31DD-4BD0-453C-90960E48AB55}"/>
               </a:ext>
             </a:extLst>
           </p:cNvPr>
@@ -7958,18 +8611,17 @@
         </p:nvSpPr>
         <p:spPr/>
         <p:txBody>
-          <a:bodyPr>
-            <a:normAutofit/>
-          </a:bodyPr>
-          <a:lstStyle/>
-          <a:p>
-            <a:r>
-              <a:rPr lang="en-US" dirty="0">
-                <a:latin typeface="Times New Roman" panose="02020603050405020304" pitchFamily="18" charset="0"/>
-                <a:cs typeface="Times New Roman" panose="02020603050405020304" pitchFamily="18" charset="0"/>
-              </a:rPr>
-              <a:t>Statement of the Problem</a:t>
-            </a:r>
+          <a:bodyPr/>
+          <a:lstStyle/>
+          <a:p>
+            <a:r>
+              <a:rPr lang="en-US" dirty="0">
+                <a:latin typeface="Times New Roman" panose="02020603050405020304" pitchFamily="18" charset="0"/>
+                <a:cs typeface="Times New Roman" panose="02020603050405020304" pitchFamily="18" charset="0"/>
+              </a:rPr>
+              <a:t>Table of Contents</a:t>
+            </a:r>
+            <a:endParaRPr lang="en-US" dirty="0"/>
           </a:p>
         </p:txBody>
       </p:sp>
@@ -7978,7 +8630,7 @@
           <p:cNvPr id="3" name="Content Placeholder 2">
             <a:extLst>
               <a:ext uri="{FF2B5EF4-FFF2-40B4-BE49-F238E27FC236}">
-                <a16:creationId xmlns:a16="http://schemas.microsoft.com/office/drawing/2014/main" id="{9DEE6128-B8C7-624F-A0FC-3B8A79709D43}"/>
+                <a16:creationId xmlns:a16="http://schemas.microsoft.com/office/drawing/2014/main" id="{CBF24BF3-917A-5B8A-A910-744E4593FF74}"/>
               </a:ext>
             </a:extLst>
           </p:cNvPr>
@@ -7992,96 +8644,88 @@
         <p:spPr/>
         <p:txBody>
           <a:bodyPr>
-            <a:normAutofit fontScale="85000" lnSpcReduction="20000"/>
+            <a:normAutofit fontScale="92500" lnSpcReduction="20000"/>
           </a:bodyPr>
           <a:lstStyle/>
           <a:p>
-            <a:pPr marL="0" indent="0">
-              <a:buNone/>
-            </a:pPr>
-            <a:r>
-              <a:rPr lang="en-US" dirty="0">
-                <a:latin typeface="Times New Roman" panose="02020603050405020304" pitchFamily="18" charset="0"/>
-                <a:cs typeface="Times New Roman" panose="02020603050405020304" pitchFamily="18" charset="0"/>
-              </a:rPr>
-              <a:t>Existing inventory systems face several challenges:</a:t>
-            </a:r>
-          </a:p>
-          <a:p>
-            <a:r>
-              <a:rPr lang="en-US" dirty="0">
-                <a:latin typeface="Times New Roman" panose="02020603050405020304" pitchFamily="18" charset="0"/>
-                <a:cs typeface="Times New Roman" panose="02020603050405020304" pitchFamily="18" charset="0"/>
-              </a:rPr>
-              <a:t>Inaccurate stock records </a:t>
-            </a:r>
-          </a:p>
-          <a:p>
-            <a:r>
-              <a:rPr lang="en-US" dirty="0">
-                <a:latin typeface="Times New Roman" panose="02020603050405020304" pitchFamily="18" charset="0"/>
-                <a:cs typeface="Times New Roman" panose="02020603050405020304" pitchFamily="18" charset="0"/>
-              </a:rPr>
-              <a:t>Human errors during calculations </a:t>
-            </a:r>
-          </a:p>
-          <a:p>
-            <a:r>
-              <a:rPr lang="en-US" dirty="0">
-                <a:latin typeface="Times New Roman" panose="02020603050405020304" pitchFamily="18" charset="0"/>
-                <a:cs typeface="Times New Roman" panose="02020603050405020304" pitchFamily="18" charset="0"/>
-              </a:rPr>
-              <a:t>Difficulty monitoring sales performance </a:t>
-            </a:r>
-          </a:p>
-          <a:p>
-            <a:r>
-              <a:rPr lang="en-US" dirty="0">
-                <a:latin typeface="Times New Roman" panose="02020603050405020304" pitchFamily="18" charset="0"/>
-                <a:cs typeface="Times New Roman" panose="02020603050405020304" pitchFamily="18" charset="0"/>
-              </a:rPr>
-              <a:t>Delayed stock replenishment </a:t>
-            </a:r>
-          </a:p>
-          <a:p>
-            <a:r>
-              <a:rPr lang="en-US" dirty="0">
-                <a:latin typeface="Times New Roman" panose="02020603050405020304" pitchFamily="18" charset="0"/>
-                <a:cs typeface="Times New Roman" panose="02020603050405020304" pitchFamily="18" charset="0"/>
-              </a:rPr>
-              <a:t>Poor financial reporting </a:t>
-            </a:r>
-          </a:p>
-          <a:p>
-            <a:r>
-              <a:rPr lang="en-US" dirty="0">
-                <a:latin typeface="Times New Roman" panose="02020603050405020304" pitchFamily="18" charset="0"/>
-                <a:cs typeface="Times New Roman" panose="02020603050405020304" pitchFamily="18" charset="0"/>
-              </a:rPr>
-              <a:t>Lack of real-time business insights </a:t>
-            </a:r>
-          </a:p>
-          <a:p>
-            <a:r>
-              <a:rPr lang="en-US" dirty="0">
-                <a:latin typeface="Times New Roman" panose="02020603050405020304" pitchFamily="18" charset="0"/>
-                <a:cs typeface="Times New Roman" panose="02020603050405020304" pitchFamily="18" charset="0"/>
-              </a:rPr>
-              <a:t>Time-consuming manual inventory management</a:t>
-            </a:r>
-          </a:p>
-          <a:p>
-            <a:endParaRPr lang="en-US" dirty="0">
-              <a:latin typeface="Times New Roman" panose="02020603050405020304" pitchFamily="18" charset="0"/>
-              <a:cs typeface="Times New Roman" panose="02020603050405020304" pitchFamily="18" charset="0"/>
-            </a:endParaRPr>
+            <a:r>
+              <a:rPr lang="en-US" dirty="0">
+                <a:latin typeface="Times New Roman" panose="02020603050405020304" pitchFamily="18" charset="0"/>
+                <a:cs typeface="Times New Roman" panose="02020603050405020304" pitchFamily="18" charset="0"/>
+              </a:rPr>
+              <a:t>Methodology	</a:t>
+            </a:r>
+          </a:p>
+          <a:p>
+            <a:r>
+              <a:rPr lang="en-US" dirty="0">
+                <a:latin typeface="Times New Roman" panose="02020603050405020304" pitchFamily="18" charset="0"/>
+                <a:cs typeface="Times New Roman" panose="02020603050405020304" pitchFamily="18" charset="0"/>
+              </a:rPr>
+              <a:t>System Architecture</a:t>
+            </a:r>
+          </a:p>
+          <a:p>
+            <a:r>
+              <a:rPr lang="en-US" dirty="0">
+                <a:latin typeface="Times New Roman" panose="02020603050405020304" pitchFamily="18" charset="0"/>
+                <a:cs typeface="Times New Roman" panose="02020603050405020304" pitchFamily="18" charset="0"/>
+              </a:rPr>
+              <a:t>System Modules</a:t>
+            </a:r>
+          </a:p>
+          <a:p>
+            <a:r>
+              <a:rPr lang="en-US" dirty="0">
+                <a:latin typeface="Times New Roman" panose="02020603050405020304" pitchFamily="18" charset="0"/>
+                <a:cs typeface="Times New Roman" panose="02020603050405020304" pitchFamily="18" charset="0"/>
+              </a:rPr>
+              <a:t>Dashboard Visualization				</a:t>
+            </a:r>
+          </a:p>
+          <a:p>
+            <a:r>
+              <a:rPr lang="en-US" dirty="0">
+                <a:latin typeface="Times New Roman" panose="02020603050405020304" pitchFamily="18" charset="0"/>
+                <a:cs typeface="Times New Roman" panose="02020603050405020304" pitchFamily="18" charset="0"/>
+              </a:rPr>
+              <a:t>Results and Discussion				</a:t>
+            </a:r>
+          </a:p>
+          <a:p>
+            <a:r>
+              <a:rPr lang="en-US" dirty="0">
+                <a:latin typeface="Times New Roman" panose="02020603050405020304" pitchFamily="18" charset="0"/>
+                <a:cs typeface="Times New Roman" panose="02020603050405020304" pitchFamily="18" charset="0"/>
+              </a:rPr>
+              <a:t>Conclusion and Recommendations</a:t>
+            </a:r>
+          </a:p>
+          <a:p>
+            <a:r>
+              <a:rPr lang="en-US" dirty="0">
+                <a:latin typeface="Times New Roman" panose="02020603050405020304" pitchFamily="18" charset="0"/>
+                <a:cs typeface="Times New Roman" panose="02020603050405020304" pitchFamily="18" charset="0"/>
+              </a:rPr>
+              <a:t>Contribution to Knowledge		</a:t>
+            </a:r>
+          </a:p>
+          <a:p>
+            <a:r>
+              <a:rPr lang="en-US" dirty="0">
+                <a:latin typeface="Times New Roman" panose="02020603050405020304" pitchFamily="18" charset="0"/>
+                <a:cs typeface="Times New Roman" panose="02020603050405020304" pitchFamily="18" charset="0"/>
+              </a:rPr>
+              <a:t>References</a:t>
+            </a:r>
+            <a:endParaRPr lang="en-US" dirty="0"/>
           </a:p>
         </p:txBody>
       </p:sp>
     </p:spTree>
     <p:extLst>
       <p:ext uri="{BB962C8B-B14F-4D97-AF65-F5344CB8AC3E}">
-        <p14:creationId xmlns:p14="http://schemas.microsoft.com/office/powerpoint/2010/main" val="3379191828"/>
+        <p14:creationId xmlns:p14="http://schemas.microsoft.com/office/powerpoint/2010/main" val="3191724934"/>
       </p:ext>
     </p:extLst>
   </p:cSld>
@@ -8113,7 +8757,7 @@
           <p:cNvPr id="2" name="Title 1">
             <a:extLst>
               <a:ext uri="{FF2B5EF4-FFF2-40B4-BE49-F238E27FC236}">
-                <a16:creationId xmlns:a16="http://schemas.microsoft.com/office/drawing/2014/main" id="{B8153ED6-F1C4-4D29-2A58-6EBD5FBFC104}"/>
+                <a16:creationId xmlns:a16="http://schemas.microsoft.com/office/drawing/2014/main" id="{565E9767-F83D-78F8-858D-5E714B46CA12}"/>
               </a:ext>
             </a:extLst>
           </p:cNvPr>
@@ -8134,7 +8778,7 @@
                 <a:latin typeface="Times New Roman" panose="02020603050405020304" pitchFamily="18" charset="0"/>
                 <a:cs typeface="Times New Roman" panose="02020603050405020304" pitchFamily="18" charset="0"/>
               </a:rPr>
-              <a:t>Aim</a:t>
+              <a:t>Background of the Study</a:t>
             </a:r>
           </a:p>
         </p:txBody>
@@ -8144,7 +8788,7 @@
           <p:cNvPr id="3" name="Content Placeholder 2">
             <a:extLst>
               <a:ext uri="{FF2B5EF4-FFF2-40B4-BE49-F238E27FC236}">
-                <a16:creationId xmlns:a16="http://schemas.microsoft.com/office/drawing/2014/main" id="{E3E611CC-6A22-026B-84AB-CF19B3944F97}"/>
+                <a16:creationId xmlns:a16="http://schemas.microsoft.com/office/drawing/2014/main" id="{1720E463-D506-FD6E-805D-8815B052E6F9}"/>
               </a:ext>
             </a:extLst>
           </p:cNvPr>
@@ -8158,7 +8802,7 @@
         <p:spPr/>
         <p:txBody>
           <a:bodyPr>
-            <a:normAutofit/>
+            <a:normAutofit fontScale="92500" lnSpcReduction="10000"/>
           </a:bodyPr>
           <a:lstStyle/>
           <a:p>
@@ -8167,21 +8811,51 @@
                 <a:latin typeface="Times New Roman" panose="02020603050405020304" pitchFamily="18" charset="0"/>
                 <a:cs typeface="Times New Roman" panose="02020603050405020304" pitchFamily="18" charset="0"/>
               </a:rPr>
-              <a:t>To develop a Smart Inventory Management System that automates inventory control, sales tracking, profit computation, and business visualization using Python.</a:t>
-            </a:r>
-          </a:p>
-          <a:p>
-            <a:endParaRPr lang="en-US" dirty="0">
-              <a:latin typeface="Times New Roman" panose="02020603050405020304" pitchFamily="18" charset="0"/>
-              <a:cs typeface="Times New Roman" panose="02020603050405020304" pitchFamily="18" charset="0"/>
-            </a:endParaRPr>
+              <a:t>Inventory is a valuable business asset that requires efficient management.</a:t>
+            </a:r>
+          </a:p>
+          <a:p>
+            <a:r>
+              <a:rPr lang="en-US" dirty="0">
+                <a:latin typeface="Times New Roman" panose="02020603050405020304" pitchFamily="18" charset="0"/>
+                <a:cs typeface="Times New Roman" panose="02020603050405020304" pitchFamily="18" charset="0"/>
+              </a:rPr>
+              <a:t>Many SMEs still use manual record-keeping methods. </a:t>
+            </a:r>
+          </a:p>
+          <a:p>
+            <a:r>
+              <a:rPr lang="en-US" dirty="0">
+                <a:latin typeface="Times New Roman" panose="02020603050405020304" pitchFamily="18" charset="0"/>
+                <a:cs typeface="Times New Roman" panose="02020603050405020304" pitchFamily="18" charset="0"/>
+              </a:rPr>
+              <a:t>Manual systems often result in inaccurate stock records, delayed reporting, and poor decision-making. </a:t>
+            </a:r>
+          </a:p>
+          <a:p>
+            <a:r>
+              <a:rPr lang="en-US" dirty="0">
+                <a:latin typeface="Times New Roman" panose="02020603050405020304" pitchFamily="18" charset="0"/>
+                <a:cs typeface="Times New Roman" panose="02020603050405020304" pitchFamily="18" charset="0"/>
+              </a:rPr>
+              <a:t>Computerized inventory systems improve efficiency through automation and real-time monitoring. </a:t>
+            </a:r>
+          </a:p>
+          <a:p>
+            <a:r>
+              <a:rPr lang="en-US" dirty="0">
+                <a:latin typeface="Times New Roman" panose="02020603050405020304" pitchFamily="18" charset="0"/>
+                <a:cs typeface="Times New Roman" panose="02020603050405020304" pitchFamily="18" charset="0"/>
+              </a:rPr>
+              <a:t>This project integrates inventory control with business analytics to enhance operational performance.</a:t>
+            </a:r>
           </a:p>
         </p:txBody>
       </p:sp>
     </p:spTree>
     <p:extLst>
       <p:ext uri="{BB962C8B-B14F-4D97-AF65-F5344CB8AC3E}">
-        <p14:creationId xmlns:p14="http://schemas.microsoft.com/office/powerpoint/2010/main" val="2735495295"/>
+        <p14:creationId xmlns:p14="http://schemas.microsoft.com/office/powerpoint/2010/main" val="3794067814"/>
       </p:ext>
     </p:extLst>
   </p:cSld>
@@ -8213,7 +8887,7 @@
           <p:cNvPr id="2" name="Title 1">
             <a:extLst>
               <a:ext uri="{FF2B5EF4-FFF2-40B4-BE49-F238E27FC236}">
-                <a16:creationId xmlns:a16="http://schemas.microsoft.com/office/drawing/2014/main" id="{BA0BA177-C910-540F-3F18-BCD8B747BF26}"/>
+                <a16:creationId xmlns:a16="http://schemas.microsoft.com/office/drawing/2014/main" id="{63015D2D-436D-7A54-A226-723CB646B1F7}"/>
               </a:ext>
             </a:extLst>
           </p:cNvPr>
@@ -8226,15 +8900,17 @@
         </p:nvSpPr>
         <p:spPr/>
         <p:txBody>
-          <a:bodyPr/>
-          <a:lstStyle/>
-          <a:p>
-            <a:r>
-              <a:rPr lang="en-US" dirty="0">
-                <a:latin typeface="Times New Roman" panose="02020603050405020304" pitchFamily="18" charset="0"/>
-                <a:cs typeface="Times New Roman" panose="02020603050405020304" pitchFamily="18" charset="0"/>
-              </a:rPr>
-              <a:t>Objectives</a:t>
+          <a:bodyPr>
+            <a:normAutofit/>
+          </a:bodyPr>
+          <a:lstStyle/>
+          <a:p>
+            <a:r>
+              <a:rPr lang="en-US" dirty="0">
+                <a:latin typeface="Times New Roman" panose="02020603050405020304" pitchFamily="18" charset="0"/>
+                <a:cs typeface="Times New Roman" panose="02020603050405020304" pitchFamily="18" charset="0"/>
+              </a:rPr>
+              <a:t>Statement of the Problem</a:t>
             </a:r>
           </a:p>
         </p:txBody>
@@ -8244,7 +8920,7 @@
           <p:cNvPr id="3" name="Content Placeholder 2">
             <a:extLst>
               <a:ext uri="{FF2B5EF4-FFF2-40B4-BE49-F238E27FC236}">
-                <a16:creationId xmlns:a16="http://schemas.microsoft.com/office/drawing/2014/main" id="{C02872D0-FD99-D384-A103-EE58781485DE}"/>
+                <a16:creationId xmlns:a16="http://schemas.microsoft.com/office/drawing/2014/main" id="{9DEE6128-B8C7-624F-A0FC-3B8A79709D43}"/>
               </a:ext>
             </a:extLst>
           </p:cNvPr>
@@ -8262,75 +8938,78 @@
           </a:bodyPr>
           <a:lstStyle/>
           <a:p>
-            <a:r>
-              <a:rPr lang="en-US" dirty="0">
-                <a:latin typeface="Times New Roman" panose="02020603050405020304" pitchFamily="18" charset="0"/>
-                <a:cs typeface="Times New Roman" panose="02020603050405020304" pitchFamily="18" charset="0"/>
-              </a:rPr>
-              <a:t>Develop an inventory database </a:t>
-            </a:r>
-          </a:p>
-          <a:p>
-            <a:r>
-              <a:rPr lang="en-US" dirty="0">
-                <a:latin typeface="Times New Roman" panose="02020603050405020304" pitchFamily="18" charset="0"/>
-                <a:cs typeface="Times New Roman" panose="02020603050405020304" pitchFamily="18" charset="0"/>
-              </a:rPr>
-              <a:t>Monitor stock availability </a:t>
-            </a:r>
-          </a:p>
-          <a:p>
-            <a:r>
-              <a:rPr lang="en-US" dirty="0">
-                <a:latin typeface="Times New Roman" panose="02020603050405020304" pitchFamily="18" charset="0"/>
-                <a:cs typeface="Times New Roman" panose="02020603050405020304" pitchFamily="18" charset="0"/>
-              </a:rPr>
-              <a:t>Record product sales </a:t>
-            </a:r>
-          </a:p>
-          <a:p>
-            <a:r>
-              <a:rPr lang="en-US" dirty="0">
-                <a:latin typeface="Times New Roman" panose="02020603050405020304" pitchFamily="18" charset="0"/>
-                <a:cs typeface="Times New Roman" panose="02020603050405020304" pitchFamily="18" charset="0"/>
-              </a:rPr>
-              <a:t>Calculate income automatically </a:t>
-            </a:r>
-          </a:p>
-          <a:p>
-            <a:r>
-              <a:rPr lang="en-US" dirty="0">
-                <a:latin typeface="Times New Roman" panose="02020603050405020304" pitchFamily="18" charset="0"/>
-                <a:cs typeface="Times New Roman" panose="02020603050405020304" pitchFamily="18" charset="0"/>
-              </a:rPr>
-              <a:t>Compute business profit </a:t>
-            </a:r>
-          </a:p>
-          <a:p>
-            <a:r>
-              <a:rPr lang="en-US" dirty="0">
-                <a:latin typeface="Times New Roman" panose="02020603050405020304" pitchFamily="18" charset="0"/>
-                <a:cs typeface="Times New Roman" panose="02020603050405020304" pitchFamily="18" charset="0"/>
-              </a:rPr>
-              <a:t>Detect low-stock items </a:t>
-            </a:r>
-          </a:p>
-          <a:p>
-            <a:r>
-              <a:rPr lang="en-US" dirty="0">
-                <a:latin typeface="Times New Roman" panose="02020603050405020304" pitchFamily="18" charset="0"/>
-                <a:cs typeface="Times New Roman" panose="02020603050405020304" pitchFamily="18" charset="0"/>
-              </a:rPr>
-              <a:t>Generate graphical reports </a:t>
-            </a:r>
-          </a:p>
-          <a:p>
-            <a:r>
-              <a:rPr lang="en-US" dirty="0">
-                <a:latin typeface="Times New Roman" panose="02020603050405020304" pitchFamily="18" charset="0"/>
-                <a:cs typeface="Times New Roman" panose="02020603050405020304" pitchFamily="18" charset="0"/>
-              </a:rPr>
-              <a:t>Support managerial decision-making</a:t>
+            <a:pPr marL="0" indent="0">
+              <a:buNone/>
+            </a:pPr>
+            <a:r>
+              <a:rPr lang="en-US" dirty="0">
+                <a:latin typeface="Times New Roman" panose="02020603050405020304" pitchFamily="18" charset="0"/>
+                <a:cs typeface="Times New Roman" panose="02020603050405020304" pitchFamily="18" charset="0"/>
+              </a:rPr>
+              <a:t>Existing inventory systems face several challenges:</a:t>
+            </a:r>
+          </a:p>
+          <a:p>
+            <a:r>
+              <a:rPr lang="en-US" dirty="0">
+                <a:latin typeface="Times New Roman" panose="02020603050405020304" pitchFamily="18" charset="0"/>
+                <a:cs typeface="Times New Roman" panose="02020603050405020304" pitchFamily="18" charset="0"/>
+              </a:rPr>
+              <a:t>Inaccurate stock records </a:t>
+            </a:r>
+          </a:p>
+          <a:p>
+            <a:r>
+              <a:rPr lang="en-US" dirty="0">
+                <a:latin typeface="Times New Roman" panose="02020603050405020304" pitchFamily="18" charset="0"/>
+                <a:cs typeface="Times New Roman" panose="02020603050405020304" pitchFamily="18" charset="0"/>
+              </a:rPr>
+              <a:t>Human errors during calculations </a:t>
+            </a:r>
+          </a:p>
+          <a:p>
+            <a:r>
+              <a:rPr lang="en-US" dirty="0">
+                <a:latin typeface="Times New Roman" panose="02020603050405020304" pitchFamily="18" charset="0"/>
+                <a:cs typeface="Times New Roman" panose="02020603050405020304" pitchFamily="18" charset="0"/>
+              </a:rPr>
+              <a:t>Difficulty monitoring sales performance </a:t>
+            </a:r>
+          </a:p>
+          <a:p>
+            <a:r>
+              <a:rPr lang="en-US" dirty="0">
+                <a:latin typeface="Times New Roman" panose="02020603050405020304" pitchFamily="18" charset="0"/>
+                <a:cs typeface="Times New Roman" panose="02020603050405020304" pitchFamily="18" charset="0"/>
+              </a:rPr>
+              <a:t>Delayed stock replenishment </a:t>
+            </a:r>
+          </a:p>
+          <a:p>
+            <a:r>
+              <a:rPr lang="en-US" dirty="0">
+                <a:latin typeface="Times New Roman" panose="02020603050405020304" pitchFamily="18" charset="0"/>
+                <a:cs typeface="Times New Roman" panose="02020603050405020304" pitchFamily="18" charset="0"/>
+              </a:rPr>
+              <a:t>Poor financial reporting </a:t>
+            </a:r>
+          </a:p>
+          <a:p>
+            <a:r>
+              <a:rPr lang="en-US" dirty="0">
+                <a:latin typeface="Times New Roman" panose="02020603050405020304" pitchFamily="18" charset="0"/>
+                <a:cs typeface="Times New Roman" panose="02020603050405020304" pitchFamily="18" charset="0"/>
+              </a:rPr>
+              <a:t>Lack of real-time business insights </a:t>
+            </a:r>
+          </a:p>
+          <a:p>
+            <a:r>
+              <a:rPr lang="en-US" dirty="0">
+                <a:latin typeface="Times New Roman" panose="02020603050405020304" pitchFamily="18" charset="0"/>
+                <a:cs typeface="Times New Roman" panose="02020603050405020304" pitchFamily="18" charset="0"/>
+              </a:rPr>
+              <a:t>Time-consuming manual inventory management</a:t>
             </a:r>
           </a:p>
           <a:p>
@@ -8344,7 +9023,7 @@
     </p:spTree>
     <p:extLst>
       <p:ext uri="{BB962C8B-B14F-4D97-AF65-F5344CB8AC3E}">
-        <p14:creationId xmlns:p14="http://schemas.microsoft.com/office/powerpoint/2010/main" val="3409848488"/>
+        <p14:creationId xmlns:p14="http://schemas.microsoft.com/office/powerpoint/2010/main" val="3379191828"/>
       </p:ext>
     </p:extLst>
   </p:cSld>
@@ -8376,7 +9055,7 @@
           <p:cNvPr id="2" name="Title 1">
             <a:extLst>
               <a:ext uri="{FF2B5EF4-FFF2-40B4-BE49-F238E27FC236}">
-                <a16:creationId xmlns:a16="http://schemas.microsoft.com/office/drawing/2014/main" id="{37B99ED4-F600-07CE-3628-D7C85E3F2135}"/>
+                <a16:creationId xmlns:a16="http://schemas.microsoft.com/office/drawing/2014/main" id="{B8153ED6-F1C4-4D29-2A58-6EBD5FBFC104}"/>
               </a:ext>
             </a:extLst>
           </p:cNvPr>
@@ -8389,6 +9068,37 @@
         </p:nvSpPr>
         <p:spPr/>
         <p:txBody>
+          <a:bodyPr/>
+          <a:lstStyle/>
+          <a:p>
+            <a:r>
+              <a:rPr lang="en-US" dirty="0">
+                <a:latin typeface="Times New Roman" panose="02020603050405020304" pitchFamily="18" charset="0"/>
+                <a:cs typeface="Times New Roman" panose="02020603050405020304" pitchFamily="18" charset="0"/>
+              </a:rPr>
+              <a:t>Aim</a:t>
+            </a:r>
+          </a:p>
+        </p:txBody>
+      </p:sp>
+      <p:sp>
+        <p:nvSpPr>
+          <p:cNvPr id="3" name="Content Placeholder 2">
+            <a:extLst>
+              <a:ext uri="{FF2B5EF4-FFF2-40B4-BE49-F238E27FC236}">
+                <a16:creationId xmlns:a16="http://schemas.microsoft.com/office/drawing/2014/main" id="{E3E611CC-6A22-026B-84AB-CF19B3944F97}"/>
+              </a:ext>
+            </a:extLst>
+          </p:cNvPr>
+          <p:cNvSpPr>
+            <a:spLocks noGrp="1"/>
+          </p:cNvSpPr>
+          <p:nvPr>
+            <p:ph idx="1"/>
+          </p:nvPr>
+        </p:nvSpPr>
+        <p:spPr/>
+        <p:txBody>
           <a:bodyPr>
             <a:normAutofit/>
           </a:bodyPr>
@@ -8399,88 +9109,7 @@
                 <a:latin typeface="Times New Roman" panose="02020603050405020304" pitchFamily="18" charset="0"/>
                 <a:cs typeface="Times New Roman" panose="02020603050405020304" pitchFamily="18" charset="0"/>
               </a:rPr>
-              <a:t>Significance of the Study</a:t>
-            </a:r>
-          </a:p>
-        </p:txBody>
-      </p:sp>
-      <p:sp>
-        <p:nvSpPr>
-          <p:cNvPr id="3" name="Content Placeholder 2">
-            <a:extLst>
-              <a:ext uri="{FF2B5EF4-FFF2-40B4-BE49-F238E27FC236}">
-                <a16:creationId xmlns:a16="http://schemas.microsoft.com/office/drawing/2014/main" id="{122E097B-239D-D755-5920-16CCEC23786A}"/>
-              </a:ext>
-            </a:extLst>
-          </p:cNvPr>
-          <p:cNvSpPr>
-            <a:spLocks noGrp="1"/>
-          </p:cNvSpPr>
-          <p:nvPr>
-            <p:ph idx="1"/>
-          </p:nvPr>
-        </p:nvSpPr>
-        <p:spPr/>
-        <p:txBody>
-          <a:bodyPr>
-            <a:normAutofit/>
-          </a:bodyPr>
-          <a:lstStyle/>
-          <a:p>
-            <a:pPr marL="0" indent="0">
-              <a:buNone/>
-            </a:pPr>
-            <a:r>
-              <a:rPr lang="en-US" dirty="0">
-                <a:latin typeface="Times New Roman" panose="02020603050405020304" pitchFamily="18" charset="0"/>
-                <a:cs typeface="Times New Roman" panose="02020603050405020304" pitchFamily="18" charset="0"/>
-              </a:rPr>
-              <a:t>The system benefits:</a:t>
-            </a:r>
-          </a:p>
-          <a:p>
-            <a:r>
-              <a:rPr lang="en-US" dirty="0">
-                <a:latin typeface="Times New Roman" panose="02020603050405020304" pitchFamily="18" charset="0"/>
-                <a:cs typeface="Times New Roman" panose="02020603050405020304" pitchFamily="18" charset="0"/>
-              </a:rPr>
-              <a:t>Small and Medium Enterprises (SMEs) </a:t>
-            </a:r>
-          </a:p>
-          <a:p>
-            <a:r>
-              <a:rPr lang="en-US" dirty="0">
-                <a:latin typeface="Times New Roman" panose="02020603050405020304" pitchFamily="18" charset="0"/>
-                <a:cs typeface="Times New Roman" panose="02020603050405020304" pitchFamily="18" charset="0"/>
-              </a:rPr>
-              <a:t>Retail stores </a:t>
-            </a:r>
-          </a:p>
-          <a:p>
-            <a:r>
-              <a:rPr lang="en-US" dirty="0">
-                <a:latin typeface="Times New Roman" panose="02020603050405020304" pitchFamily="18" charset="0"/>
-                <a:cs typeface="Times New Roman" panose="02020603050405020304" pitchFamily="18" charset="0"/>
-              </a:rPr>
-              <a:t>Warehouses </a:t>
-            </a:r>
-          </a:p>
-          <a:p>
-            <a:r>
-              <a:rPr lang="en-US" dirty="0">
-                <a:latin typeface="Times New Roman" panose="02020603050405020304" pitchFamily="18" charset="0"/>
-                <a:cs typeface="Times New Roman" panose="02020603050405020304" pitchFamily="18" charset="0"/>
-              </a:rPr>
-              <a:t>Pharmacies </a:t>
-            </a:r>
-          </a:p>
-          <a:p>
-            <a:r>
-              <a:rPr lang="en-US" dirty="0">
-                <a:latin typeface="Times New Roman" panose="02020603050405020304" pitchFamily="18" charset="0"/>
-                <a:cs typeface="Times New Roman" panose="02020603050405020304" pitchFamily="18" charset="0"/>
-              </a:rPr>
-              <a:t>Supermarkets</a:t>
+              <a:t>To develop a Smart Inventory Management System that automates inventory control, sales tracking, profit computation, and business visualization using Python.</a:t>
             </a:r>
           </a:p>
           <a:p>
@@ -8494,7 +9123,7 @@
     </p:spTree>
     <p:extLst>
       <p:ext uri="{BB962C8B-B14F-4D97-AF65-F5344CB8AC3E}">
-        <p14:creationId xmlns:p14="http://schemas.microsoft.com/office/powerpoint/2010/main" val="876499658"/>
+        <p14:creationId xmlns:p14="http://schemas.microsoft.com/office/powerpoint/2010/main" val="2735495295"/>
       </p:ext>
     </p:extLst>
   </p:cSld>
@@ -8526,7 +9155,7 @@
           <p:cNvPr id="2" name="Title 1">
             <a:extLst>
               <a:ext uri="{FF2B5EF4-FFF2-40B4-BE49-F238E27FC236}">
-                <a16:creationId xmlns:a16="http://schemas.microsoft.com/office/drawing/2014/main" id="{EB5152E1-145B-72A9-767B-677C7D419B36}"/>
+                <a16:creationId xmlns:a16="http://schemas.microsoft.com/office/drawing/2014/main" id="{BA0BA177-C910-540F-3F18-BCD8B747BF26}"/>
               </a:ext>
             </a:extLst>
           </p:cNvPr>
@@ -8547,7 +9176,7 @@
                 <a:latin typeface="Times New Roman" panose="02020603050405020304" pitchFamily="18" charset="0"/>
                 <a:cs typeface="Times New Roman" panose="02020603050405020304" pitchFamily="18" charset="0"/>
               </a:rPr>
-              <a:t>Advantages</a:t>
+              <a:t>Objectives</a:t>
             </a:r>
           </a:p>
         </p:txBody>
@@ -8557,7 +9186,7 @@
           <p:cNvPr id="3" name="Content Placeholder 2">
             <a:extLst>
               <a:ext uri="{FF2B5EF4-FFF2-40B4-BE49-F238E27FC236}">
-                <a16:creationId xmlns:a16="http://schemas.microsoft.com/office/drawing/2014/main" id="{1901124D-366F-F799-FEF5-36478DA067AF}"/>
+                <a16:creationId xmlns:a16="http://schemas.microsoft.com/office/drawing/2014/main" id="{C02872D0-FD99-D384-A103-EE58781485DE}"/>
               </a:ext>
             </a:extLst>
           </p:cNvPr>
@@ -8571,7 +9200,7 @@
         <p:spPr/>
         <p:txBody>
           <a:bodyPr>
-            <a:normAutofit lnSpcReduction="10000"/>
+            <a:normAutofit fontScale="85000" lnSpcReduction="20000"/>
           </a:bodyPr>
           <a:lstStyle/>
           <a:p>
@@ -8580,69 +9209,84 @@
                 <a:latin typeface="Times New Roman" panose="02020603050405020304" pitchFamily="18" charset="0"/>
                 <a:cs typeface="Times New Roman" panose="02020603050405020304" pitchFamily="18" charset="0"/>
               </a:rPr>
-              <a:t>Accurate inventory records </a:t>
-            </a:r>
-          </a:p>
-          <a:p>
-            <a:r>
-              <a:rPr lang="en-US" dirty="0">
-                <a:latin typeface="Times New Roman" panose="02020603050405020304" pitchFamily="18" charset="0"/>
-                <a:cs typeface="Times New Roman" panose="02020603050405020304" pitchFamily="18" charset="0"/>
-              </a:rPr>
-              <a:t>Faster stock monitoring </a:t>
-            </a:r>
-          </a:p>
-          <a:p>
-            <a:r>
-              <a:rPr lang="en-US" dirty="0">
-                <a:latin typeface="Times New Roman" panose="02020603050405020304" pitchFamily="18" charset="0"/>
-                <a:cs typeface="Times New Roman" panose="02020603050405020304" pitchFamily="18" charset="0"/>
-              </a:rPr>
-              <a:t>Reduced paperwork </a:t>
-            </a:r>
-          </a:p>
-          <a:p>
-            <a:r>
-              <a:rPr lang="en-US" dirty="0">
-                <a:latin typeface="Times New Roman" panose="02020603050405020304" pitchFamily="18" charset="0"/>
-                <a:cs typeface="Times New Roman" panose="02020603050405020304" pitchFamily="18" charset="0"/>
-              </a:rPr>
-              <a:t>Improved productivity </a:t>
-            </a:r>
-          </a:p>
-          <a:p>
-            <a:r>
-              <a:rPr lang="en-US" dirty="0">
-                <a:latin typeface="Times New Roman" panose="02020603050405020304" pitchFamily="18" charset="0"/>
-                <a:cs typeface="Times New Roman" panose="02020603050405020304" pitchFamily="18" charset="0"/>
-              </a:rPr>
-              <a:t>Better financial analysis </a:t>
-            </a:r>
-          </a:p>
-          <a:p>
-            <a:r>
-              <a:rPr lang="en-US" dirty="0">
-                <a:latin typeface="Times New Roman" panose="02020603050405020304" pitchFamily="18" charset="0"/>
-                <a:cs typeface="Times New Roman" panose="02020603050405020304" pitchFamily="18" charset="0"/>
-              </a:rPr>
-              <a:t>Easy business monitoring </a:t>
-            </a:r>
-          </a:p>
-          <a:p>
-            <a:r>
-              <a:rPr lang="en-US" dirty="0">
-                <a:latin typeface="Times New Roman" panose="02020603050405020304" pitchFamily="18" charset="0"/>
-                <a:cs typeface="Times New Roman" panose="02020603050405020304" pitchFamily="18" charset="0"/>
-              </a:rPr>
-              <a:t>Supports informed decision-making  </a:t>
-            </a:r>
+              <a:t>Develop an inventory database </a:t>
+            </a:r>
+          </a:p>
+          <a:p>
+            <a:r>
+              <a:rPr lang="en-US" dirty="0">
+                <a:latin typeface="Times New Roman" panose="02020603050405020304" pitchFamily="18" charset="0"/>
+                <a:cs typeface="Times New Roman" panose="02020603050405020304" pitchFamily="18" charset="0"/>
+              </a:rPr>
+              <a:t>Monitor stock availability </a:t>
+            </a:r>
+          </a:p>
+          <a:p>
+            <a:r>
+              <a:rPr lang="en-US" dirty="0">
+                <a:latin typeface="Times New Roman" panose="02020603050405020304" pitchFamily="18" charset="0"/>
+                <a:cs typeface="Times New Roman" panose="02020603050405020304" pitchFamily="18" charset="0"/>
+              </a:rPr>
+              <a:t>Record product sales </a:t>
+            </a:r>
+          </a:p>
+          <a:p>
+            <a:r>
+              <a:rPr lang="en-US" dirty="0">
+                <a:latin typeface="Times New Roman" panose="02020603050405020304" pitchFamily="18" charset="0"/>
+                <a:cs typeface="Times New Roman" panose="02020603050405020304" pitchFamily="18" charset="0"/>
+              </a:rPr>
+              <a:t>Calculate income automatically </a:t>
+            </a:r>
+          </a:p>
+          <a:p>
+            <a:r>
+              <a:rPr lang="en-US" dirty="0">
+                <a:latin typeface="Times New Roman" panose="02020603050405020304" pitchFamily="18" charset="0"/>
+                <a:cs typeface="Times New Roman" panose="02020603050405020304" pitchFamily="18" charset="0"/>
+              </a:rPr>
+              <a:t>Compute business profit </a:t>
+            </a:r>
+          </a:p>
+          <a:p>
+            <a:r>
+              <a:rPr lang="en-US" dirty="0">
+                <a:latin typeface="Times New Roman" panose="02020603050405020304" pitchFamily="18" charset="0"/>
+                <a:cs typeface="Times New Roman" panose="02020603050405020304" pitchFamily="18" charset="0"/>
+              </a:rPr>
+              <a:t>Detect low-stock items </a:t>
+            </a:r>
+          </a:p>
+          <a:p>
+            <a:r>
+              <a:rPr lang="en-US" dirty="0">
+                <a:latin typeface="Times New Roman" panose="02020603050405020304" pitchFamily="18" charset="0"/>
+                <a:cs typeface="Times New Roman" panose="02020603050405020304" pitchFamily="18" charset="0"/>
+              </a:rPr>
+              <a:t>Generate graphical reports </a:t>
+            </a:r>
+          </a:p>
+          <a:p>
+            <a:r>
+              <a:rPr lang="en-US" dirty="0">
+                <a:latin typeface="Times New Roman" panose="02020603050405020304" pitchFamily="18" charset="0"/>
+                <a:cs typeface="Times New Roman" panose="02020603050405020304" pitchFamily="18" charset="0"/>
+              </a:rPr>
+              <a:t>Support managerial decision-making</a:t>
+            </a:r>
+          </a:p>
+          <a:p>
+            <a:endParaRPr lang="en-US" dirty="0">
+              <a:latin typeface="Times New Roman" panose="02020603050405020304" pitchFamily="18" charset="0"/>
+              <a:cs typeface="Times New Roman" panose="02020603050405020304" pitchFamily="18" charset="0"/>
+            </a:endParaRPr>
           </a:p>
         </p:txBody>
       </p:sp>
     </p:spTree>
     <p:extLst>
       <p:ext uri="{BB962C8B-B14F-4D97-AF65-F5344CB8AC3E}">
-        <p14:creationId xmlns:p14="http://schemas.microsoft.com/office/powerpoint/2010/main" val="3793920599"/>
+        <p14:creationId xmlns:p14="http://schemas.microsoft.com/office/powerpoint/2010/main" val="3409848488"/>
       </p:ext>
     </p:extLst>
   </p:cSld>
@@ -8674,7 +9318,7 @@
           <p:cNvPr id="2" name="Title 1">
             <a:extLst>
               <a:ext uri="{FF2B5EF4-FFF2-40B4-BE49-F238E27FC236}">
-                <a16:creationId xmlns:a16="http://schemas.microsoft.com/office/drawing/2014/main" id="{187FD446-6B9A-CF56-5113-5BB60FA05A9B}"/>
+                <a16:creationId xmlns:a16="http://schemas.microsoft.com/office/drawing/2014/main" id="{37B99ED4-F600-07CE-3628-D7C85E3F2135}"/>
               </a:ext>
             </a:extLst>
           </p:cNvPr>
@@ -8687,15 +9331,17 @@
         </p:nvSpPr>
         <p:spPr/>
         <p:txBody>
-          <a:bodyPr/>
-          <a:lstStyle/>
-          <a:p>
-            <a:r>
-              <a:rPr lang="en-US" dirty="0">
-                <a:latin typeface="Times New Roman" panose="02020603050405020304" pitchFamily="18" charset="0"/>
-                <a:cs typeface="Times New Roman" panose="02020603050405020304" pitchFamily="18" charset="0"/>
-              </a:rPr>
-              <a:t>Scope of the Study</a:t>
+          <a:bodyPr>
+            <a:normAutofit/>
+          </a:bodyPr>
+          <a:lstStyle/>
+          <a:p>
+            <a:r>
+              <a:rPr lang="en-US" dirty="0">
+                <a:latin typeface="Times New Roman" panose="02020603050405020304" pitchFamily="18" charset="0"/>
+                <a:cs typeface="Times New Roman" panose="02020603050405020304" pitchFamily="18" charset="0"/>
+              </a:rPr>
+              <a:t>Significance of the Study</a:t>
             </a:r>
           </a:p>
         </p:txBody>
@@ -8705,7 +9351,7 @@
           <p:cNvPr id="3" name="Content Placeholder 2">
             <a:extLst>
               <a:ext uri="{FF2B5EF4-FFF2-40B4-BE49-F238E27FC236}">
-                <a16:creationId xmlns:a16="http://schemas.microsoft.com/office/drawing/2014/main" id="{20DF6BCA-CD4F-98E4-FDA7-1FADEB2A9FD8}"/>
+                <a16:creationId xmlns:a16="http://schemas.microsoft.com/office/drawing/2014/main" id="{122E097B-239D-D755-5920-16CCEC23786A}"/>
               </a:ext>
             </a:extLst>
           </p:cNvPr>
@@ -8716,15 +9362,10 @@
             <p:ph idx="1"/>
           </p:nvPr>
         </p:nvSpPr>
-        <p:spPr>
-          <a:xfrm>
-            <a:off x="1295401" y="2556931"/>
-            <a:ext cx="9601196" cy="3700649"/>
-          </a:xfrm>
-        </p:spPr>
+        <p:spPr/>
         <p:txBody>
           <a:bodyPr>
-            <a:normAutofit fontScale="85000" lnSpcReduction="20000"/>
+            <a:normAutofit/>
           </a:bodyPr>
           <a:lstStyle/>
           <a:p>
@@ -8736,79 +9377,52 @@
                 <a:latin typeface="Times New Roman" panose="02020603050405020304" pitchFamily="18" charset="0"/>
                 <a:cs typeface="Times New Roman" panose="02020603050405020304" pitchFamily="18" charset="0"/>
               </a:rPr>
-              <a:t>The system provides:</a:t>
-            </a:r>
-          </a:p>
-          <a:p>
-            <a:r>
-              <a:rPr lang="en-US" dirty="0">
-                <a:latin typeface="Times New Roman" panose="02020603050405020304" pitchFamily="18" charset="0"/>
-                <a:cs typeface="Times New Roman" panose="02020603050405020304" pitchFamily="18" charset="0"/>
-              </a:rPr>
-              <a:t>Product registration </a:t>
-            </a:r>
-          </a:p>
-          <a:p>
-            <a:r>
-              <a:rPr lang="en-US" dirty="0">
-                <a:latin typeface="Times New Roman" panose="02020603050405020304" pitchFamily="18" charset="0"/>
-                <a:cs typeface="Times New Roman" panose="02020603050405020304" pitchFamily="18" charset="0"/>
-              </a:rPr>
-              <a:t>Inventory monitoring </a:t>
-            </a:r>
-          </a:p>
-          <a:p>
-            <a:r>
-              <a:rPr lang="en-US" dirty="0">
-                <a:latin typeface="Times New Roman" panose="02020603050405020304" pitchFamily="18" charset="0"/>
-                <a:cs typeface="Times New Roman" panose="02020603050405020304" pitchFamily="18" charset="0"/>
-              </a:rPr>
-              <a:t>Sales recording </a:t>
-            </a:r>
-          </a:p>
-          <a:p>
-            <a:r>
-              <a:rPr lang="en-US" dirty="0">
-                <a:latin typeface="Times New Roman" panose="02020603050405020304" pitchFamily="18" charset="0"/>
-                <a:cs typeface="Times New Roman" panose="02020603050405020304" pitchFamily="18" charset="0"/>
-              </a:rPr>
-              <a:t>Income calculation </a:t>
-            </a:r>
-          </a:p>
-          <a:p>
-            <a:r>
-              <a:rPr lang="en-US" dirty="0">
-                <a:latin typeface="Times New Roman" panose="02020603050405020304" pitchFamily="18" charset="0"/>
-                <a:cs typeface="Times New Roman" panose="02020603050405020304" pitchFamily="18" charset="0"/>
-              </a:rPr>
-              <a:t>Profit computation </a:t>
-            </a:r>
-          </a:p>
-          <a:p>
-            <a:r>
-              <a:rPr lang="en-US" dirty="0">
-                <a:latin typeface="Times New Roman" panose="02020603050405020304" pitchFamily="18" charset="0"/>
-                <a:cs typeface="Times New Roman" panose="02020603050405020304" pitchFamily="18" charset="0"/>
-              </a:rPr>
-              <a:t>Low-stock alerts </a:t>
-            </a:r>
-          </a:p>
-          <a:p>
-            <a:r>
-              <a:rPr lang="en-US" dirty="0">
-                <a:latin typeface="Times New Roman" panose="02020603050405020304" pitchFamily="18" charset="0"/>
-                <a:cs typeface="Times New Roman" panose="02020603050405020304" pitchFamily="18" charset="0"/>
-              </a:rPr>
-              <a:t>Dashboard visualization </a:t>
-            </a:r>
-          </a:p>
-          <a:p>
-            <a:r>
-              <a:rPr lang="en-US" dirty="0">
-                <a:latin typeface="Times New Roman" panose="02020603050405020304" pitchFamily="18" charset="0"/>
-                <a:cs typeface="Times New Roman" panose="02020603050405020304" pitchFamily="18" charset="0"/>
-              </a:rPr>
-              <a:t>Business performance reporting</a:t>
+              <a:t>The system benefits:</a:t>
+            </a:r>
+          </a:p>
+          <a:p>
+            <a:r>
+              <a:rPr lang="en-US" dirty="0">
+                <a:latin typeface="Times New Roman" panose="02020603050405020304" pitchFamily="18" charset="0"/>
+                <a:cs typeface="Times New Roman" panose="02020603050405020304" pitchFamily="18" charset="0"/>
+              </a:rPr>
+              <a:t>Small and Medium Enterprises (SMEs) </a:t>
+            </a:r>
+          </a:p>
+          <a:p>
+            <a:r>
+              <a:rPr lang="en-US" dirty="0">
+                <a:latin typeface="Times New Roman" panose="02020603050405020304" pitchFamily="18" charset="0"/>
+                <a:cs typeface="Times New Roman" panose="02020603050405020304" pitchFamily="18" charset="0"/>
+              </a:rPr>
+              <a:t>Retail stores </a:t>
+            </a:r>
+          </a:p>
+          <a:p>
+            <a:r>
+              <a:rPr lang="en-US" dirty="0">
+                <a:latin typeface="Times New Roman" panose="02020603050405020304" pitchFamily="18" charset="0"/>
+                <a:cs typeface="Times New Roman" panose="02020603050405020304" pitchFamily="18" charset="0"/>
+              </a:rPr>
+              <a:t>Warehouses </a:t>
+            </a:r>
+          </a:p>
+          <a:p>
+            <a:r>
+              <a:rPr lang="en-US" dirty="0">
+                <a:latin typeface="Times New Roman" panose="02020603050405020304" pitchFamily="18" charset="0"/>
+                <a:cs typeface="Times New Roman" panose="02020603050405020304" pitchFamily="18" charset="0"/>
+              </a:rPr>
+              <a:t>Pharmacies </a:t>
+            </a:r>
+          </a:p>
+          <a:p>
+            <a:r>
+              <a:rPr lang="en-US" dirty="0">
+                <a:latin typeface="Times New Roman" panose="02020603050405020304" pitchFamily="18" charset="0"/>
+                <a:cs typeface="Times New Roman" panose="02020603050405020304" pitchFamily="18" charset="0"/>
+              </a:rPr>
+              <a:t>Supermarkets</a:t>
             </a:r>
           </a:p>
           <a:p>
@@ -8822,7 +9436,7 @@
     </p:spTree>
     <p:extLst>
       <p:ext uri="{BB962C8B-B14F-4D97-AF65-F5344CB8AC3E}">
-        <p14:creationId xmlns:p14="http://schemas.microsoft.com/office/powerpoint/2010/main" val="1624596919"/>
+        <p14:creationId xmlns:p14="http://schemas.microsoft.com/office/powerpoint/2010/main" val="876499658"/>
       </p:ext>
     </p:extLst>
   </p:cSld>
@@ -8854,7 +9468,7 @@
           <p:cNvPr id="2" name="Title 1">
             <a:extLst>
               <a:ext uri="{FF2B5EF4-FFF2-40B4-BE49-F238E27FC236}">
-                <a16:creationId xmlns:a16="http://schemas.microsoft.com/office/drawing/2014/main" id="{58347B78-592F-8C00-8F19-B9C664D0FD65}"/>
+                <a16:creationId xmlns:a16="http://schemas.microsoft.com/office/drawing/2014/main" id="{EB5152E1-145B-72A9-767B-677C7D419B36}"/>
               </a:ext>
             </a:extLst>
           </p:cNvPr>
@@ -8875,7 +9489,7 @@
                 <a:latin typeface="Times New Roman" panose="02020603050405020304" pitchFamily="18" charset="0"/>
                 <a:cs typeface="Times New Roman" panose="02020603050405020304" pitchFamily="18" charset="0"/>
               </a:rPr>
-              <a:t>Literature Review</a:t>
+              <a:t>Advantages</a:t>
             </a:r>
           </a:p>
         </p:txBody>
@@ -8885,7 +9499,7 @@
           <p:cNvPr id="3" name="Content Placeholder 2">
             <a:extLst>
               <a:ext uri="{FF2B5EF4-FFF2-40B4-BE49-F238E27FC236}">
-                <a16:creationId xmlns:a16="http://schemas.microsoft.com/office/drawing/2014/main" id="{8DFBDBE9-ED59-D858-8188-C2738396677D}"/>
+                <a16:creationId xmlns:a16="http://schemas.microsoft.com/office/drawing/2014/main" id="{1901124D-366F-F799-FEF5-36478DA067AF}"/>
               </a:ext>
             </a:extLst>
           </p:cNvPr>
@@ -8899,90 +9513,78 @@
         <p:spPr/>
         <p:txBody>
           <a:bodyPr>
-            <a:normAutofit fontScale="92500" lnSpcReduction="20000"/>
+            <a:normAutofit lnSpcReduction="10000"/>
           </a:bodyPr>
           <a:lstStyle/>
           <a:p>
-            <a:pPr marL="0" indent="0">
-              <a:buNone/>
-            </a:pPr>
-            <a:r>
-              <a:rPr lang="en-US" dirty="0">
-                <a:latin typeface="Times New Roman" panose="02020603050405020304" pitchFamily="18" charset="0"/>
-                <a:cs typeface="Times New Roman" panose="02020603050405020304" pitchFamily="18" charset="0"/>
-              </a:rPr>
-              <a:t>Previous inventory systems focused mainly on:</a:t>
-            </a:r>
-          </a:p>
-          <a:p>
-            <a:r>
-              <a:rPr lang="en-US" dirty="0">
-                <a:latin typeface="Times New Roman" panose="02020603050405020304" pitchFamily="18" charset="0"/>
-                <a:cs typeface="Times New Roman" panose="02020603050405020304" pitchFamily="18" charset="0"/>
-              </a:rPr>
-              <a:t>Manual record keeping </a:t>
-            </a:r>
-          </a:p>
-          <a:p>
-            <a:r>
-              <a:rPr lang="en-US" dirty="0">
-                <a:latin typeface="Times New Roman" panose="02020603050405020304" pitchFamily="18" charset="0"/>
-                <a:cs typeface="Times New Roman" panose="02020603050405020304" pitchFamily="18" charset="0"/>
-              </a:rPr>
-              <a:t>Spreadsheet management </a:t>
-            </a:r>
-          </a:p>
-          <a:p>
-            <a:r>
-              <a:rPr lang="en-US" dirty="0">
-                <a:latin typeface="Times New Roman" panose="02020603050405020304" pitchFamily="18" charset="0"/>
-                <a:cs typeface="Times New Roman" panose="02020603050405020304" pitchFamily="18" charset="0"/>
-              </a:rPr>
-              <a:t>Barcode systems </a:t>
-            </a:r>
-          </a:p>
-          <a:p>
-            <a:r>
-              <a:rPr lang="en-US" dirty="0">
-                <a:latin typeface="Times New Roman" panose="02020603050405020304" pitchFamily="18" charset="0"/>
-                <a:cs typeface="Times New Roman" panose="02020603050405020304" pitchFamily="18" charset="0"/>
-              </a:rPr>
-              <a:t>RFID technologies </a:t>
-            </a:r>
-          </a:p>
-          <a:p>
-            <a:r>
-              <a:rPr lang="en-US" dirty="0">
-                <a:latin typeface="Times New Roman" panose="02020603050405020304" pitchFamily="18" charset="0"/>
-                <a:cs typeface="Times New Roman" panose="02020603050405020304" pitchFamily="18" charset="0"/>
-              </a:rPr>
-              <a:t>Enterprise Resource Planning (ERP) </a:t>
-            </a:r>
-          </a:p>
-          <a:p>
-            <a:pPr marL="0" indent="0">
-              <a:buNone/>
-            </a:pPr>
-            <a:r>
-              <a:rPr lang="en-US" dirty="0">
-                <a:latin typeface="Times New Roman" panose="02020603050405020304" pitchFamily="18" charset="0"/>
-                <a:cs typeface="Times New Roman" panose="02020603050405020304" pitchFamily="18" charset="0"/>
-              </a:rPr>
-              <a:t>Research shows that integrating inventory management with data visualization improves business performance and decision-making.</a:t>
-            </a:r>
-          </a:p>
-          <a:p>
-            <a:endParaRPr lang="en-US" dirty="0">
-              <a:latin typeface="Times New Roman" panose="02020603050405020304" pitchFamily="18" charset="0"/>
-              <a:cs typeface="Times New Roman" panose="02020603050405020304" pitchFamily="18" charset="0"/>
-            </a:endParaRPr>
+            <a:r>
+              <a:rPr lang="en-US" dirty="0">
+                <a:latin typeface="Times New Roman" panose="02020603050405020304" pitchFamily="18" charset="0"/>
+                <a:cs typeface="Times New Roman" panose="02020603050405020304" pitchFamily="18" charset="0"/>
+              </a:rPr>
+              <a:t>Accurate inventory records </a:t>
+            </a:r>
+          </a:p>
+          <a:p>
+            <a:r>
+              <a:rPr lang="en-US" dirty="0">
+                <a:latin typeface="Times New Roman" panose="02020603050405020304" pitchFamily="18" charset="0"/>
+                <a:cs typeface="Times New Roman" panose="02020603050405020304" pitchFamily="18" charset="0"/>
+              </a:rPr>
+              <a:t>Faster stock monitoring </a:t>
+            </a:r>
+          </a:p>
+          <a:p>
+            <a:r>
+              <a:rPr lang="en-US" dirty="0">
+                <a:latin typeface="Times New Roman" panose="02020603050405020304" pitchFamily="18" charset="0"/>
+                <a:cs typeface="Times New Roman" panose="02020603050405020304" pitchFamily="18" charset="0"/>
+              </a:rPr>
+              <a:t>Reduced paperwork </a:t>
+            </a:r>
+          </a:p>
+          <a:p>
+            <a:r>
+              <a:rPr lang="en-US" dirty="0">
+                <a:latin typeface="Times New Roman" panose="02020603050405020304" pitchFamily="18" charset="0"/>
+                <a:cs typeface="Times New Roman" panose="02020603050405020304" pitchFamily="18" charset="0"/>
+              </a:rPr>
+              <a:t>Improved productivity </a:t>
+            </a:r>
+          </a:p>
+          <a:p>
+            <a:r>
+              <a:rPr lang="en-US" dirty="0">
+                <a:latin typeface="Times New Roman" panose="02020603050405020304" pitchFamily="18" charset="0"/>
+                <a:cs typeface="Times New Roman" panose="02020603050405020304" pitchFamily="18" charset="0"/>
+              </a:rPr>
+              <a:t>Better financial analysis </a:t>
+            </a:r>
+          </a:p>
+          <a:p>
+            <a:r>
+              <a:rPr lang="en-US" dirty="0">
+                <a:latin typeface="Times New Roman" panose="02020603050405020304" pitchFamily="18" charset="0"/>
+                <a:cs typeface="Times New Roman" panose="02020603050405020304" pitchFamily="18" charset="0"/>
+              </a:rPr>
+              <a:t>Easy business monitoring </a:t>
+            </a:r>
+          </a:p>
+          <a:p>
+            <a:r>
+              <a:rPr lang="en-US" dirty="0">
+                <a:latin typeface="Times New Roman" panose="02020603050405020304" pitchFamily="18" charset="0"/>
+                <a:cs typeface="Times New Roman" panose="02020603050405020304" pitchFamily="18" charset="0"/>
+              </a:rPr>
+              <a:t>Supports informed decision-making  </a:t>
+            </a:r>
           </a:p>
         </p:txBody>
       </p:sp>
     </p:spTree>
     <p:extLst>
       <p:ext uri="{BB962C8B-B14F-4D97-AF65-F5344CB8AC3E}">
-        <p14:creationId xmlns:p14="http://schemas.microsoft.com/office/powerpoint/2010/main" val="3825717509"/>
+        <p14:creationId xmlns:p14="http://schemas.microsoft.com/office/powerpoint/2010/main" val="3793920599"/>
       </p:ext>
     </p:extLst>
   </p:cSld>

--- a/AYOMIKUN PYTHON SYNTHAX.pptx
+++ b/AYOMIKUN PYTHON SYNTHAX.pptx
@@ -13,23 +13,25 @@
     <p:sldId id="258" r:id="rId7"/>
     <p:sldId id="259" r:id="rId8"/>
     <p:sldId id="260" r:id="rId9"/>
-    <p:sldId id="261" r:id="rId10"/>
-    <p:sldId id="262" r:id="rId11"/>
-    <p:sldId id="263" r:id="rId12"/>
-    <p:sldId id="264" r:id="rId13"/>
-    <p:sldId id="265" r:id="rId14"/>
-    <p:sldId id="266" r:id="rId15"/>
-    <p:sldId id="267" r:id="rId16"/>
-    <p:sldId id="277" r:id="rId17"/>
-    <p:sldId id="268" r:id="rId18"/>
-    <p:sldId id="270" r:id="rId19"/>
-    <p:sldId id="271" r:id="rId20"/>
-    <p:sldId id="272" r:id="rId21"/>
-    <p:sldId id="273" r:id="rId22"/>
-    <p:sldId id="274" r:id="rId23"/>
-    <p:sldId id="276" r:id="rId24"/>
-    <p:sldId id="280" r:id="rId25"/>
-    <p:sldId id="275" r:id="rId26"/>
+    <p:sldId id="262" r:id="rId10"/>
+    <p:sldId id="263" r:id="rId11"/>
+    <p:sldId id="264" r:id="rId12"/>
+    <p:sldId id="265" r:id="rId13"/>
+    <p:sldId id="266" r:id="rId14"/>
+    <p:sldId id="267" r:id="rId15"/>
+    <p:sldId id="281" r:id="rId16"/>
+    <p:sldId id="283" r:id="rId17"/>
+    <p:sldId id="282" r:id="rId18"/>
+    <p:sldId id="268" r:id="rId19"/>
+    <p:sldId id="270" r:id="rId20"/>
+    <p:sldId id="271" r:id="rId21"/>
+    <p:sldId id="272" r:id="rId22"/>
+    <p:sldId id="261" r:id="rId23"/>
+    <p:sldId id="273" r:id="rId24"/>
+    <p:sldId id="274" r:id="rId25"/>
+    <p:sldId id="276" r:id="rId26"/>
+    <p:sldId id="280" r:id="rId27"/>
+    <p:sldId id="275" r:id="rId28"/>
   </p:sldIdLst>
   <p:sldSz cx="12192000" cy="6858000"/>
   <p:notesSz cx="6858000" cy="9144000"/>
@@ -467,7 +469,7 @@
           <a:p>
             <a:fld id="{D6D111B7-D0BA-4F94-AA57-BC0CCBE54C47}" type="datetimeFigureOut">
               <a:rPr lang="en-US" smtClean="0"/>
-              <a:t>7/8/2026</a:t>
+              <a:t>7/11/2026</a:t>
             </a:fld>
             <a:endParaRPr lang="en-US"/>
           </a:p>
@@ -791,7 +793,7 @@
           <a:p>
             <a:fld id="{D6D111B7-D0BA-4F94-AA57-BC0CCBE54C47}" type="datetimeFigureOut">
               <a:rPr lang="en-US" smtClean="0"/>
-              <a:t>7/8/2026</a:t>
+              <a:t>7/11/2026</a:t>
             </a:fld>
             <a:endParaRPr lang="en-US"/>
           </a:p>
@@ -1039,7 +1041,7 @@
           <a:p>
             <a:fld id="{D6D111B7-D0BA-4F94-AA57-BC0CCBE54C47}" type="datetimeFigureOut">
               <a:rPr lang="en-US" smtClean="0"/>
-              <a:t>7/8/2026</a:t>
+              <a:t>7/11/2026</a:t>
             </a:fld>
             <a:endParaRPr lang="en-US"/>
           </a:p>
@@ -1378,7 +1380,7 @@
           <a:p>
             <a:fld id="{D6D111B7-D0BA-4F94-AA57-BC0CCBE54C47}" type="datetimeFigureOut">
               <a:rPr lang="en-US" smtClean="0"/>
-              <a:t>7/8/2026</a:t>
+              <a:t>7/11/2026</a:t>
             </a:fld>
             <a:endParaRPr lang="en-US"/>
           </a:p>
@@ -1725,7 +1727,7 @@
           <a:p>
             <a:fld id="{D6D111B7-D0BA-4F94-AA57-BC0CCBE54C47}" type="datetimeFigureOut">
               <a:rPr lang="en-US" smtClean="0"/>
-              <a:t>7/8/2026</a:t>
+              <a:t>7/11/2026</a:t>
             </a:fld>
             <a:endParaRPr lang="en-US"/>
           </a:p>
@@ -2099,7 +2101,7 @@
           <a:p>
             <a:fld id="{D6D111B7-D0BA-4F94-AA57-BC0CCBE54C47}" type="datetimeFigureOut">
               <a:rPr lang="en-US" smtClean="0"/>
-              <a:t>7/8/2026</a:t>
+              <a:t>7/11/2026</a:t>
             </a:fld>
             <a:endParaRPr lang="en-US"/>
           </a:p>
@@ -2569,7 +2571,7 @@
           <a:p>
             <a:fld id="{D6D111B7-D0BA-4F94-AA57-BC0CCBE54C47}" type="datetimeFigureOut">
               <a:rPr lang="en-US" smtClean="0"/>
-              <a:t>7/8/2026</a:t>
+              <a:t>7/11/2026</a:t>
             </a:fld>
             <a:endParaRPr lang="en-US"/>
           </a:p>
@@ -2774,7 +2776,7 @@
           <a:p>
             <a:fld id="{D6D111B7-D0BA-4F94-AA57-BC0CCBE54C47}" type="datetimeFigureOut">
               <a:rPr lang="en-US" smtClean="0"/>
-              <a:t>7/8/2026</a:t>
+              <a:t>7/11/2026</a:t>
             </a:fld>
             <a:endParaRPr lang="en-US"/>
           </a:p>
@@ -2985,7 +2987,7 @@
           <a:p>
             <a:fld id="{D6D111B7-D0BA-4F94-AA57-BC0CCBE54C47}" type="datetimeFigureOut">
               <a:rPr lang="en-US" smtClean="0"/>
-              <a:t>7/8/2026</a:t>
+              <a:t>7/11/2026</a:t>
             </a:fld>
             <a:endParaRPr lang="en-US"/>
           </a:p>
@@ -3217,7 +3219,7 @@
           <a:p>
             <a:fld id="{D6D111B7-D0BA-4F94-AA57-BC0CCBE54C47}" type="datetimeFigureOut">
               <a:rPr lang="en-US" smtClean="0"/>
-              <a:t>7/8/2026</a:t>
+              <a:t>7/11/2026</a:t>
             </a:fld>
             <a:endParaRPr lang="en-US"/>
           </a:p>
@@ -3465,7 +3467,7 @@
           <a:p>
             <a:fld id="{D6D111B7-D0BA-4F94-AA57-BC0CCBE54C47}" type="datetimeFigureOut">
               <a:rPr lang="en-US" smtClean="0"/>
-              <a:t>7/8/2026</a:t>
+              <a:t>7/11/2026</a:t>
             </a:fld>
             <a:endParaRPr lang="en-US"/>
           </a:p>
@@ -3763,7 +3765,7 @@
           <a:p>
             <a:fld id="{D6D111B7-D0BA-4F94-AA57-BC0CCBE54C47}" type="datetimeFigureOut">
               <a:rPr lang="en-US" smtClean="0"/>
-              <a:t>7/8/2026</a:t>
+              <a:t>7/11/2026</a:t>
             </a:fld>
             <a:endParaRPr lang="en-US"/>
           </a:p>
@@ -4157,7 +4159,7 @@
           <a:p>
             <a:fld id="{D6D111B7-D0BA-4F94-AA57-BC0CCBE54C47}" type="datetimeFigureOut">
               <a:rPr lang="en-US" smtClean="0"/>
-              <a:t>7/8/2026</a:t>
+              <a:t>7/11/2026</a:t>
             </a:fld>
             <a:endParaRPr lang="en-US"/>
           </a:p>
@@ -4306,7 +4308,7 @@
           <a:p>
             <a:fld id="{D6D111B7-D0BA-4F94-AA57-BC0CCBE54C47}" type="datetimeFigureOut">
               <a:rPr lang="en-US" smtClean="0"/>
-              <a:t>7/8/2026</a:t>
+              <a:t>7/11/2026</a:t>
             </a:fld>
             <a:endParaRPr lang="en-US"/>
           </a:p>
@@ -4432,7 +4434,7 @@
           <a:p>
             <a:fld id="{D6D111B7-D0BA-4F94-AA57-BC0CCBE54C47}" type="datetimeFigureOut">
               <a:rPr lang="en-US" smtClean="0"/>
-              <a:t>7/8/2026</a:t>
+              <a:t>7/11/2026</a:t>
             </a:fld>
             <a:endParaRPr lang="en-US"/>
           </a:p>
@@ -4687,7 +4689,7 @@
           <a:p>
             <a:fld id="{D6D111B7-D0BA-4F94-AA57-BC0CCBE54C47}" type="datetimeFigureOut">
               <a:rPr lang="en-US" smtClean="0"/>
-              <a:t>7/8/2026</a:t>
+              <a:t>7/11/2026</a:t>
             </a:fld>
             <a:endParaRPr lang="en-US"/>
           </a:p>
@@ -5002,7 +5004,7 @@
           <a:p>
             <a:fld id="{D6D111B7-D0BA-4F94-AA57-BC0CCBE54C47}" type="datetimeFigureOut">
               <a:rPr lang="en-US" smtClean="0"/>
-              <a:t>7/8/2026</a:t>
+              <a:t>7/11/2026</a:t>
             </a:fld>
             <a:endParaRPr lang="en-US"/>
           </a:p>
@@ -5359,7 +5361,7 @@
           <a:p>
             <a:fld id="{D6D111B7-D0BA-4F94-AA57-BC0CCBE54C47}" type="datetimeFigureOut">
               <a:rPr lang="en-US" smtClean="0"/>
-              <a:t>7/8/2026</a:t>
+              <a:t>7/11/2026</a:t>
             </a:fld>
             <a:endParaRPr lang="en-US"/>
           </a:p>
@@ -5986,7 +5988,7 @@
                 <a:latin typeface="Times New Roman" panose="02020603050405020304" pitchFamily="18" charset="0"/>
                 <a:cs typeface="Times New Roman" panose="02020603050405020304" pitchFamily="18" charset="0"/>
               </a:rPr>
-              <a:t>8</a:t>
+              <a:t>13</a:t>
             </a:r>
             <a:r>
               <a:rPr lang="en-US" baseline="30000" dirty="0">
@@ -6040,7 +6042,7 @@
           <p:cNvPr id="2" name="Title 1">
             <a:extLst>
               <a:ext uri="{FF2B5EF4-FFF2-40B4-BE49-F238E27FC236}">
-                <a16:creationId xmlns:a16="http://schemas.microsoft.com/office/drawing/2014/main" id="{187FD446-6B9A-CF56-5113-5BB60FA05A9B}"/>
+                <a16:creationId xmlns:a16="http://schemas.microsoft.com/office/drawing/2014/main" id="{58347B78-592F-8C00-8F19-B9C664D0FD65}"/>
               </a:ext>
             </a:extLst>
           </p:cNvPr>
@@ -6061,7 +6063,7 @@
                 <a:latin typeface="Times New Roman" panose="02020603050405020304" pitchFamily="18" charset="0"/>
                 <a:cs typeface="Times New Roman" panose="02020603050405020304" pitchFamily="18" charset="0"/>
               </a:rPr>
-              <a:t>Scope of the Study</a:t>
+              <a:t>Literature Review</a:t>
             </a:r>
           </a:p>
         </p:txBody>
@@ -6071,7 +6073,7 @@
           <p:cNvPr id="3" name="Content Placeholder 2">
             <a:extLst>
               <a:ext uri="{FF2B5EF4-FFF2-40B4-BE49-F238E27FC236}">
-                <a16:creationId xmlns:a16="http://schemas.microsoft.com/office/drawing/2014/main" id="{20DF6BCA-CD4F-98E4-FDA7-1FADEB2A9FD8}"/>
+                <a16:creationId xmlns:a16="http://schemas.microsoft.com/office/drawing/2014/main" id="{8DFBDBE9-ED59-D858-8188-C2738396677D}"/>
               </a:ext>
             </a:extLst>
           </p:cNvPr>
@@ -6082,15 +6084,10 @@
             <p:ph idx="1"/>
           </p:nvPr>
         </p:nvSpPr>
-        <p:spPr>
-          <a:xfrm>
-            <a:off x="1295401" y="2556931"/>
-            <a:ext cx="9601196" cy="3700649"/>
-          </a:xfrm>
-        </p:spPr>
+        <p:spPr/>
         <p:txBody>
           <a:bodyPr>
-            <a:normAutofit fontScale="85000" lnSpcReduction="20000"/>
+            <a:normAutofit fontScale="92500" lnSpcReduction="20000"/>
           </a:bodyPr>
           <a:lstStyle/>
           <a:p>
@@ -6102,79 +6099,64 @@
                 <a:latin typeface="Times New Roman" panose="02020603050405020304" pitchFamily="18" charset="0"/>
                 <a:cs typeface="Times New Roman" panose="02020603050405020304" pitchFamily="18" charset="0"/>
               </a:rPr>
-              <a:t>The system provides:</a:t>
-            </a:r>
-          </a:p>
-          <a:p>
-            <a:r>
-              <a:rPr lang="en-US" dirty="0">
-                <a:latin typeface="Times New Roman" panose="02020603050405020304" pitchFamily="18" charset="0"/>
-                <a:cs typeface="Times New Roman" panose="02020603050405020304" pitchFamily="18" charset="0"/>
-              </a:rPr>
-              <a:t>Product registration </a:t>
-            </a:r>
-          </a:p>
-          <a:p>
-            <a:r>
-              <a:rPr lang="en-US" dirty="0">
-                <a:latin typeface="Times New Roman" panose="02020603050405020304" pitchFamily="18" charset="0"/>
-                <a:cs typeface="Times New Roman" panose="02020603050405020304" pitchFamily="18" charset="0"/>
-              </a:rPr>
-              <a:t>Inventory monitoring </a:t>
-            </a:r>
-          </a:p>
-          <a:p>
-            <a:r>
-              <a:rPr lang="en-US" dirty="0">
-                <a:latin typeface="Times New Roman" panose="02020603050405020304" pitchFamily="18" charset="0"/>
-                <a:cs typeface="Times New Roman" panose="02020603050405020304" pitchFamily="18" charset="0"/>
-              </a:rPr>
-              <a:t>Sales recording </a:t>
-            </a:r>
-          </a:p>
-          <a:p>
-            <a:r>
-              <a:rPr lang="en-US" dirty="0">
-                <a:latin typeface="Times New Roman" panose="02020603050405020304" pitchFamily="18" charset="0"/>
-                <a:cs typeface="Times New Roman" panose="02020603050405020304" pitchFamily="18" charset="0"/>
-              </a:rPr>
-              <a:t>Income calculation </a:t>
-            </a:r>
-          </a:p>
-          <a:p>
-            <a:r>
-              <a:rPr lang="en-US" dirty="0">
-                <a:latin typeface="Times New Roman" panose="02020603050405020304" pitchFamily="18" charset="0"/>
-                <a:cs typeface="Times New Roman" panose="02020603050405020304" pitchFamily="18" charset="0"/>
-              </a:rPr>
-              <a:t>Profit computation </a:t>
-            </a:r>
-          </a:p>
-          <a:p>
-            <a:r>
-              <a:rPr lang="en-US" dirty="0">
-                <a:latin typeface="Times New Roman" panose="02020603050405020304" pitchFamily="18" charset="0"/>
-                <a:cs typeface="Times New Roman" panose="02020603050405020304" pitchFamily="18" charset="0"/>
-              </a:rPr>
-              <a:t>Low-stock alerts </a:t>
-            </a:r>
-          </a:p>
-          <a:p>
-            <a:r>
-              <a:rPr lang="en-US" dirty="0">
-                <a:latin typeface="Times New Roman" panose="02020603050405020304" pitchFamily="18" charset="0"/>
-                <a:cs typeface="Times New Roman" panose="02020603050405020304" pitchFamily="18" charset="0"/>
-              </a:rPr>
-              <a:t>Dashboard visualization </a:t>
-            </a:r>
-          </a:p>
-          <a:p>
-            <a:r>
-              <a:rPr lang="en-US" dirty="0">
-                <a:latin typeface="Times New Roman" panose="02020603050405020304" pitchFamily="18" charset="0"/>
-                <a:cs typeface="Times New Roman" panose="02020603050405020304" pitchFamily="18" charset="0"/>
-              </a:rPr>
-              <a:t>Business performance reporting</a:t>
+              <a:t>Previous inventory systems focused mainly on:</a:t>
+            </a:r>
+          </a:p>
+          <a:p>
+            <a:r>
+              <a:rPr lang="en-US" dirty="0">
+                <a:latin typeface="Times New Roman" panose="02020603050405020304" pitchFamily="18" charset="0"/>
+                <a:cs typeface="Times New Roman" panose="02020603050405020304" pitchFamily="18" charset="0"/>
+              </a:rPr>
+              <a:t>Manual record keeping </a:t>
+            </a:r>
+          </a:p>
+          <a:p>
+            <a:r>
+              <a:rPr lang="en-US" dirty="0">
+                <a:latin typeface="Times New Roman" panose="02020603050405020304" pitchFamily="18" charset="0"/>
+                <a:cs typeface="Times New Roman" panose="02020603050405020304" pitchFamily="18" charset="0"/>
+              </a:rPr>
+              <a:t>Spreadsheet management </a:t>
+            </a:r>
+          </a:p>
+          <a:p>
+            <a:r>
+              <a:rPr lang="en-US" dirty="0">
+                <a:latin typeface="Times New Roman" panose="02020603050405020304" pitchFamily="18" charset="0"/>
+                <a:cs typeface="Times New Roman" panose="02020603050405020304" pitchFamily="18" charset="0"/>
+              </a:rPr>
+              <a:t>Barcode systems </a:t>
+            </a:r>
+          </a:p>
+          <a:p>
+            <a:r>
+              <a:rPr lang="en-US" dirty="0">
+                <a:latin typeface="Times New Roman" panose="02020603050405020304" pitchFamily="18" charset="0"/>
+                <a:cs typeface="Times New Roman" panose="02020603050405020304" pitchFamily="18" charset="0"/>
+              </a:rPr>
+              <a:t>Radio Frequency Identification (RFID) technologies </a:t>
+            </a:r>
+          </a:p>
+          <a:p>
+            <a:r>
+              <a:rPr lang="en-US" dirty="0">
+                <a:latin typeface="Times New Roman" panose="02020603050405020304" pitchFamily="18" charset="0"/>
+                <a:cs typeface="Times New Roman" panose="02020603050405020304" pitchFamily="18" charset="0"/>
+              </a:rPr>
+              <a:t>Enterprise Resource Planning (ERP) </a:t>
+            </a:r>
+          </a:p>
+          <a:p>
+            <a:pPr marL="0" indent="0">
+              <a:buNone/>
+            </a:pPr>
+            <a:r>
+              <a:rPr lang="en-US" dirty="0">
+                <a:latin typeface="Times New Roman" panose="02020603050405020304" pitchFamily="18" charset="0"/>
+                <a:cs typeface="Times New Roman" panose="02020603050405020304" pitchFamily="18" charset="0"/>
+              </a:rPr>
+              <a:t>Research shows that integrating inventory management with data visualization improves business performance and decision-making.</a:t>
             </a:r>
           </a:p>
           <a:p>
@@ -6188,7 +6170,7 @@
     </p:spTree>
     <p:extLst>
       <p:ext uri="{BB962C8B-B14F-4D97-AF65-F5344CB8AC3E}">
-        <p14:creationId xmlns:p14="http://schemas.microsoft.com/office/powerpoint/2010/main" val="1624596919"/>
+        <p14:creationId xmlns:p14="http://schemas.microsoft.com/office/powerpoint/2010/main" val="3825717509"/>
       </p:ext>
     </p:extLst>
   </p:cSld>
@@ -6220,7 +6202,7 @@
           <p:cNvPr id="2" name="Title 1">
             <a:extLst>
               <a:ext uri="{FF2B5EF4-FFF2-40B4-BE49-F238E27FC236}">
-                <a16:creationId xmlns:a16="http://schemas.microsoft.com/office/drawing/2014/main" id="{58347B78-592F-8C00-8F19-B9C664D0FD65}"/>
+                <a16:creationId xmlns:a16="http://schemas.microsoft.com/office/drawing/2014/main" id="{F7CBB0CC-C1EC-AC85-896C-C412672C4CC2}"/>
               </a:ext>
             </a:extLst>
           </p:cNvPr>
@@ -6241,7 +6223,7 @@
                 <a:latin typeface="Times New Roman" panose="02020603050405020304" pitchFamily="18" charset="0"/>
                 <a:cs typeface="Times New Roman" panose="02020603050405020304" pitchFamily="18" charset="0"/>
               </a:rPr>
-              <a:t>Literature Review</a:t>
+              <a:t>Methodology</a:t>
             </a:r>
           </a:p>
         </p:txBody>
@@ -6251,7 +6233,7 @@
           <p:cNvPr id="3" name="Content Placeholder 2">
             <a:extLst>
               <a:ext uri="{FF2B5EF4-FFF2-40B4-BE49-F238E27FC236}">
-                <a16:creationId xmlns:a16="http://schemas.microsoft.com/office/drawing/2014/main" id="{8DFBDBE9-ED59-D858-8188-C2738396677D}"/>
+                <a16:creationId xmlns:a16="http://schemas.microsoft.com/office/drawing/2014/main" id="{47137AEE-3AA8-50E3-6098-37BEC5469B4D}"/>
               </a:ext>
             </a:extLst>
           </p:cNvPr>
@@ -6269,6 +6251,15 @@
           </a:bodyPr>
           <a:lstStyle/>
           <a:p>
+            <a:r>
+              <a:rPr lang="en-US" b="1" dirty="0">
+                <a:latin typeface="Times New Roman" panose="02020603050405020304" pitchFamily="18" charset="0"/>
+                <a:cs typeface="Times New Roman" panose="02020603050405020304" pitchFamily="18" charset="0"/>
+              </a:rPr>
+              <a:t>Development Methodology</a:t>
+            </a:r>
+          </a:p>
+          <a:p>
             <a:pPr marL="0" indent="0">
               <a:buNone/>
             </a:pPr>
@@ -6277,64 +6268,61 @@
                 <a:latin typeface="Times New Roman" panose="02020603050405020304" pitchFamily="18" charset="0"/>
                 <a:cs typeface="Times New Roman" panose="02020603050405020304" pitchFamily="18" charset="0"/>
               </a:rPr>
-              <a:t>Previous inventory systems focused mainly on:</a:t>
-            </a:r>
-          </a:p>
-          <a:p>
-            <a:r>
-              <a:rPr lang="en-US" dirty="0">
-                <a:latin typeface="Times New Roman" panose="02020603050405020304" pitchFamily="18" charset="0"/>
-                <a:cs typeface="Times New Roman" panose="02020603050405020304" pitchFamily="18" charset="0"/>
-              </a:rPr>
-              <a:t>Manual record keeping </a:t>
-            </a:r>
-          </a:p>
-          <a:p>
-            <a:r>
-              <a:rPr lang="en-US" dirty="0">
-                <a:latin typeface="Times New Roman" panose="02020603050405020304" pitchFamily="18" charset="0"/>
-                <a:cs typeface="Times New Roman" panose="02020603050405020304" pitchFamily="18" charset="0"/>
-              </a:rPr>
-              <a:t>Spreadsheet management </a:t>
-            </a:r>
-          </a:p>
-          <a:p>
-            <a:r>
-              <a:rPr lang="en-US" dirty="0">
-                <a:latin typeface="Times New Roman" panose="02020603050405020304" pitchFamily="18" charset="0"/>
-                <a:cs typeface="Times New Roman" panose="02020603050405020304" pitchFamily="18" charset="0"/>
-              </a:rPr>
-              <a:t>Barcode systems </a:t>
-            </a:r>
-          </a:p>
-          <a:p>
-            <a:r>
-              <a:rPr lang="en-US" dirty="0">
-                <a:latin typeface="Times New Roman" panose="02020603050405020304" pitchFamily="18" charset="0"/>
-                <a:cs typeface="Times New Roman" panose="02020603050405020304" pitchFamily="18" charset="0"/>
-              </a:rPr>
-              <a:t>RFID technologies </a:t>
-            </a:r>
-          </a:p>
-          <a:p>
-            <a:r>
-              <a:rPr lang="en-US" dirty="0">
-                <a:latin typeface="Times New Roman" panose="02020603050405020304" pitchFamily="18" charset="0"/>
-                <a:cs typeface="Times New Roman" panose="02020603050405020304" pitchFamily="18" charset="0"/>
-              </a:rPr>
-              <a:t>Enterprise Resource Planning (ERP) </a:t>
-            </a:r>
-          </a:p>
-          <a:p>
-            <a:pPr marL="0" indent="0">
-              <a:buNone/>
-            </a:pPr>
-            <a:r>
-              <a:rPr lang="en-US" dirty="0">
-                <a:latin typeface="Times New Roman" panose="02020603050405020304" pitchFamily="18" charset="0"/>
-                <a:cs typeface="Times New Roman" panose="02020603050405020304" pitchFamily="18" charset="0"/>
-              </a:rPr>
-              <a:t>Research shows that integrating inventory management with data visualization improves business performance and decision-making.</a:t>
+              <a:t>The project followed these stages:</a:t>
+            </a:r>
+          </a:p>
+          <a:p>
+            <a:r>
+              <a:rPr lang="en-US" dirty="0">
+                <a:latin typeface="Times New Roman" panose="02020603050405020304" pitchFamily="18" charset="0"/>
+                <a:cs typeface="Times New Roman" panose="02020603050405020304" pitchFamily="18" charset="0"/>
+              </a:rPr>
+              <a:t>Requirement Analysis </a:t>
+            </a:r>
+          </a:p>
+          <a:p>
+            <a:r>
+              <a:rPr lang="en-US" dirty="0">
+                <a:latin typeface="Times New Roman" panose="02020603050405020304" pitchFamily="18" charset="0"/>
+                <a:cs typeface="Times New Roman" panose="02020603050405020304" pitchFamily="18" charset="0"/>
+              </a:rPr>
+              <a:t>System Design </a:t>
+            </a:r>
+          </a:p>
+          <a:p>
+            <a:r>
+              <a:rPr lang="en-US" dirty="0">
+                <a:latin typeface="Times New Roman" panose="02020603050405020304" pitchFamily="18" charset="0"/>
+                <a:cs typeface="Times New Roman" panose="02020603050405020304" pitchFamily="18" charset="0"/>
+              </a:rPr>
+              <a:t>Database Development </a:t>
+            </a:r>
+          </a:p>
+          <a:p>
+            <a:r>
+              <a:rPr lang="en-US" dirty="0">
+                <a:latin typeface="Times New Roman" panose="02020603050405020304" pitchFamily="18" charset="0"/>
+                <a:cs typeface="Times New Roman" panose="02020603050405020304" pitchFamily="18" charset="0"/>
+              </a:rPr>
+              <a:t>Python Implementation </a:t>
+            </a:r>
+          </a:p>
+          <a:p>
+            <a:r>
+              <a:rPr lang="en-US" dirty="0">
+                <a:latin typeface="Times New Roman" panose="02020603050405020304" pitchFamily="18" charset="0"/>
+                <a:cs typeface="Times New Roman" panose="02020603050405020304" pitchFamily="18" charset="0"/>
+              </a:rPr>
+              <a:t>Testing </a:t>
+            </a:r>
+          </a:p>
+          <a:p>
+            <a:r>
+              <a:rPr lang="en-US" dirty="0">
+                <a:latin typeface="Times New Roman" panose="02020603050405020304" pitchFamily="18" charset="0"/>
+                <a:cs typeface="Times New Roman" panose="02020603050405020304" pitchFamily="18" charset="0"/>
+              </a:rPr>
+              <a:t>Evaluation</a:t>
             </a:r>
           </a:p>
           <a:p>
@@ -6348,7 +6336,7 @@
     </p:spTree>
     <p:extLst>
       <p:ext uri="{BB962C8B-B14F-4D97-AF65-F5344CB8AC3E}">
-        <p14:creationId xmlns:p14="http://schemas.microsoft.com/office/powerpoint/2010/main" val="3825717509"/>
+        <p14:creationId xmlns:p14="http://schemas.microsoft.com/office/powerpoint/2010/main" val="635706677"/>
       </p:ext>
     </p:extLst>
   </p:cSld>
@@ -6380,7 +6368,7 @@
           <p:cNvPr id="2" name="Title 1">
             <a:extLst>
               <a:ext uri="{FF2B5EF4-FFF2-40B4-BE49-F238E27FC236}">
-                <a16:creationId xmlns:a16="http://schemas.microsoft.com/office/drawing/2014/main" id="{F7CBB0CC-C1EC-AC85-896C-C412672C4CC2}"/>
+                <a16:creationId xmlns:a16="http://schemas.microsoft.com/office/drawing/2014/main" id="{3166D65F-BA08-B49D-83F5-33F4713FA23E}"/>
               </a:ext>
             </a:extLst>
           </p:cNvPr>
@@ -6403,6 +6391,7 @@
               </a:rPr>
               <a:t>Methodology</a:t>
             </a:r>
+            <a:endParaRPr lang="en-US" dirty="0"/>
           </a:p>
         </p:txBody>
       </p:sp>
@@ -6411,7 +6400,7 @@
           <p:cNvPr id="3" name="Content Placeholder 2">
             <a:extLst>
               <a:ext uri="{FF2B5EF4-FFF2-40B4-BE49-F238E27FC236}">
-                <a16:creationId xmlns:a16="http://schemas.microsoft.com/office/drawing/2014/main" id="{47137AEE-3AA8-50E3-6098-37BEC5469B4D}"/>
+                <a16:creationId xmlns:a16="http://schemas.microsoft.com/office/drawing/2014/main" id="{40B89845-9133-59CB-650F-DBF8FF271B0E}"/>
               </a:ext>
             </a:extLst>
           </p:cNvPr>
@@ -6429,15 +6418,6 @@
           </a:bodyPr>
           <a:lstStyle/>
           <a:p>
-            <a:r>
-              <a:rPr lang="en-US" b="1" dirty="0">
-                <a:latin typeface="Times New Roman" panose="02020603050405020304" pitchFamily="18" charset="0"/>
-                <a:cs typeface="Times New Roman" panose="02020603050405020304" pitchFamily="18" charset="0"/>
-              </a:rPr>
-              <a:t>Development Methodology</a:t>
-            </a:r>
-          </a:p>
-          <a:p>
             <a:pPr marL="0" indent="0">
               <a:buNone/>
             </a:pPr>
@@ -6446,75 +6426,87 @@
                 <a:latin typeface="Times New Roman" panose="02020603050405020304" pitchFamily="18" charset="0"/>
                 <a:cs typeface="Times New Roman" panose="02020603050405020304" pitchFamily="18" charset="0"/>
               </a:rPr>
-              <a:t>The project followed these stages:</a:t>
-            </a:r>
-          </a:p>
-          <a:p>
-            <a:r>
-              <a:rPr lang="en-US" dirty="0">
-                <a:latin typeface="Times New Roman" panose="02020603050405020304" pitchFamily="18" charset="0"/>
-                <a:cs typeface="Times New Roman" panose="02020603050405020304" pitchFamily="18" charset="0"/>
-              </a:rPr>
-              <a:t>Requirement Analysis </a:t>
-            </a:r>
-          </a:p>
-          <a:p>
-            <a:r>
-              <a:rPr lang="en-US" dirty="0">
-                <a:latin typeface="Times New Roman" panose="02020603050405020304" pitchFamily="18" charset="0"/>
-                <a:cs typeface="Times New Roman" panose="02020603050405020304" pitchFamily="18" charset="0"/>
-              </a:rPr>
-              <a:t>System Design </a:t>
-            </a:r>
-          </a:p>
-          <a:p>
-            <a:r>
-              <a:rPr lang="en-US" dirty="0">
-                <a:latin typeface="Times New Roman" panose="02020603050405020304" pitchFamily="18" charset="0"/>
-                <a:cs typeface="Times New Roman" panose="02020603050405020304" pitchFamily="18" charset="0"/>
-              </a:rPr>
-              <a:t>Database Development </a:t>
-            </a:r>
-          </a:p>
-          <a:p>
-            <a:r>
-              <a:rPr lang="en-US" dirty="0">
-                <a:latin typeface="Times New Roman" panose="02020603050405020304" pitchFamily="18" charset="0"/>
-                <a:cs typeface="Times New Roman" panose="02020603050405020304" pitchFamily="18" charset="0"/>
-              </a:rPr>
-              <a:t>Python Implementation </a:t>
-            </a:r>
-          </a:p>
-          <a:p>
-            <a:r>
-              <a:rPr lang="en-US" dirty="0">
-                <a:latin typeface="Times New Roman" panose="02020603050405020304" pitchFamily="18" charset="0"/>
-                <a:cs typeface="Times New Roman" panose="02020603050405020304" pitchFamily="18" charset="0"/>
-              </a:rPr>
-              <a:t>Testing </a:t>
-            </a:r>
-          </a:p>
-          <a:p>
-            <a:r>
-              <a:rPr lang="en-US" dirty="0">
-                <a:latin typeface="Times New Roman" panose="02020603050405020304" pitchFamily="18" charset="0"/>
-                <a:cs typeface="Times New Roman" panose="02020603050405020304" pitchFamily="18" charset="0"/>
-              </a:rPr>
-              <a:t>Evaluation</a:t>
-            </a:r>
-          </a:p>
-          <a:p>
-            <a:endParaRPr lang="en-US" dirty="0">
-              <a:latin typeface="Times New Roman" panose="02020603050405020304" pitchFamily="18" charset="0"/>
-              <a:cs typeface="Times New Roman" panose="02020603050405020304" pitchFamily="18" charset="0"/>
-            </a:endParaRPr>
+              <a:t>Programming Language:</a:t>
+            </a:r>
+          </a:p>
+          <a:p>
+            <a:r>
+              <a:rPr lang="en-US" dirty="0">
+                <a:latin typeface="Times New Roman" panose="02020603050405020304" pitchFamily="18" charset="0"/>
+                <a:cs typeface="Times New Roman" panose="02020603050405020304" pitchFamily="18" charset="0"/>
+              </a:rPr>
+              <a:t>Python </a:t>
+            </a:r>
+          </a:p>
+          <a:p>
+            <a:pPr marL="0" indent="0">
+              <a:buNone/>
+            </a:pPr>
+            <a:r>
+              <a:rPr lang="en-US" dirty="0">
+                <a:latin typeface="Times New Roman" panose="02020603050405020304" pitchFamily="18" charset="0"/>
+                <a:cs typeface="Times New Roman" panose="02020603050405020304" pitchFamily="18" charset="0"/>
+              </a:rPr>
+              <a:t>Libraries Used:</a:t>
+            </a:r>
+          </a:p>
+          <a:p>
+            <a:r>
+              <a:rPr lang="en-US" dirty="0">
+                <a:latin typeface="Times New Roman" panose="02020603050405020304" pitchFamily="18" charset="0"/>
+                <a:cs typeface="Times New Roman" panose="02020603050405020304" pitchFamily="18" charset="0"/>
+              </a:rPr>
+              <a:t>Pandas </a:t>
+            </a:r>
+          </a:p>
+          <a:p>
+            <a:r>
+              <a:rPr lang="en-US" dirty="0">
+                <a:latin typeface="Times New Roman" panose="02020603050405020304" pitchFamily="18" charset="0"/>
+                <a:cs typeface="Times New Roman" panose="02020603050405020304" pitchFamily="18" charset="0"/>
+              </a:rPr>
+              <a:t>Random</a:t>
+            </a:r>
+          </a:p>
+          <a:p>
+            <a:r>
+              <a:rPr lang="en-US" dirty="0">
+                <a:latin typeface="Times New Roman" panose="02020603050405020304" pitchFamily="18" charset="0"/>
+                <a:cs typeface="Times New Roman" panose="02020603050405020304" pitchFamily="18" charset="0"/>
+              </a:rPr>
+              <a:t>Matplotlib </a:t>
+            </a:r>
+          </a:p>
+          <a:p>
+            <a:pPr marL="0" indent="0">
+              <a:buNone/>
+            </a:pPr>
+            <a:r>
+              <a:rPr lang="en-US" dirty="0">
+                <a:latin typeface="Times New Roman" panose="02020603050405020304" pitchFamily="18" charset="0"/>
+                <a:cs typeface="Times New Roman" panose="02020603050405020304" pitchFamily="18" charset="0"/>
+              </a:rPr>
+              <a:t>Development Environment:</a:t>
+            </a:r>
+          </a:p>
+          <a:p>
+            <a:r>
+              <a:rPr lang="en-US" dirty="0">
+                <a:latin typeface="Times New Roman" panose="02020603050405020304" pitchFamily="18" charset="0"/>
+                <a:cs typeface="Times New Roman" panose="02020603050405020304" pitchFamily="18" charset="0"/>
+              </a:rPr>
+              <a:t>Jupyter Notebook </a:t>
+            </a:r>
+          </a:p>
+          <a:p>
+            <a:endParaRPr lang="en-US" dirty="0"/>
           </a:p>
         </p:txBody>
       </p:sp>
     </p:spTree>
     <p:extLst>
       <p:ext uri="{BB962C8B-B14F-4D97-AF65-F5344CB8AC3E}">
-        <p14:creationId xmlns:p14="http://schemas.microsoft.com/office/powerpoint/2010/main" val="635706677"/>
+        <p14:creationId xmlns:p14="http://schemas.microsoft.com/office/powerpoint/2010/main" val="1655476587"/>
       </p:ext>
     </p:extLst>
   </p:cSld>
@@ -6546,7 +6538,7 @@
           <p:cNvPr id="2" name="Title 1">
             <a:extLst>
               <a:ext uri="{FF2B5EF4-FFF2-40B4-BE49-F238E27FC236}">
-                <a16:creationId xmlns:a16="http://schemas.microsoft.com/office/drawing/2014/main" id="{3166D65F-BA08-B49D-83F5-33F4713FA23E}"/>
+                <a16:creationId xmlns:a16="http://schemas.microsoft.com/office/drawing/2014/main" id="{C47C7A32-2008-BB0B-618A-6B2CA2F68BD4}"/>
               </a:ext>
             </a:extLst>
           </p:cNvPr>
@@ -6567,9 +6559,8 @@
                 <a:latin typeface="Times New Roman" panose="02020603050405020304" pitchFamily="18" charset="0"/>
                 <a:cs typeface="Times New Roman" panose="02020603050405020304" pitchFamily="18" charset="0"/>
               </a:rPr>
-              <a:t>Methodology</a:t>
-            </a:r>
-            <a:endParaRPr lang="en-US" dirty="0"/>
+              <a:t>System Architecture</a:t>
+            </a:r>
           </a:p>
         </p:txBody>
       </p:sp>
@@ -6578,7 +6569,7 @@
           <p:cNvPr id="3" name="Content Placeholder 2">
             <a:extLst>
               <a:ext uri="{FF2B5EF4-FFF2-40B4-BE49-F238E27FC236}">
-                <a16:creationId xmlns:a16="http://schemas.microsoft.com/office/drawing/2014/main" id="{40B89845-9133-59CB-650F-DBF8FF271B0E}"/>
+                <a16:creationId xmlns:a16="http://schemas.microsoft.com/office/drawing/2014/main" id="{8D5A35EF-1A0B-F342-2019-8E04301F7DEC}"/>
               </a:ext>
             </a:extLst>
           </p:cNvPr>
@@ -6592,99 +6583,186 @@
         <p:spPr/>
         <p:txBody>
           <a:bodyPr>
-            <a:normAutofit fontScale="92500" lnSpcReduction="20000"/>
+            <a:normAutofit lnSpcReduction="10000"/>
           </a:bodyPr>
           <a:lstStyle/>
           <a:p>
-            <a:pPr marL="0" indent="0">
-              <a:buNone/>
-            </a:pPr>
-            <a:r>
-              <a:rPr lang="en-US" dirty="0">
-                <a:latin typeface="Times New Roman" panose="02020603050405020304" pitchFamily="18" charset="0"/>
-                <a:cs typeface="Times New Roman" panose="02020603050405020304" pitchFamily="18" charset="0"/>
-              </a:rPr>
-              <a:t>Programming Language:</a:t>
-            </a:r>
-          </a:p>
-          <a:p>
-            <a:r>
-              <a:rPr lang="en-US" dirty="0">
-                <a:latin typeface="Times New Roman" panose="02020603050405020304" pitchFamily="18" charset="0"/>
-                <a:cs typeface="Times New Roman" panose="02020603050405020304" pitchFamily="18" charset="0"/>
-              </a:rPr>
-              <a:t>Python </a:t>
-            </a:r>
-          </a:p>
-          <a:p>
-            <a:pPr marL="0" indent="0">
-              <a:buNone/>
-            </a:pPr>
-            <a:r>
-              <a:rPr lang="en-US" dirty="0">
-                <a:latin typeface="Times New Roman" panose="02020603050405020304" pitchFamily="18" charset="0"/>
-                <a:cs typeface="Times New Roman" panose="02020603050405020304" pitchFamily="18" charset="0"/>
-              </a:rPr>
-              <a:t>Libraries Used:</a:t>
-            </a:r>
-          </a:p>
-          <a:p>
-            <a:r>
-              <a:rPr lang="en-US" dirty="0">
-                <a:latin typeface="Times New Roman" panose="02020603050405020304" pitchFamily="18" charset="0"/>
-                <a:cs typeface="Times New Roman" panose="02020603050405020304" pitchFamily="18" charset="0"/>
-              </a:rPr>
-              <a:t>Pandas </a:t>
-            </a:r>
-          </a:p>
-          <a:p>
-            <a:r>
-              <a:rPr lang="en-US" dirty="0">
-                <a:latin typeface="Times New Roman" panose="02020603050405020304" pitchFamily="18" charset="0"/>
-                <a:cs typeface="Times New Roman" panose="02020603050405020304" pitchFamily="18" charset="0"/>
-              </a:rPr>
-              <a:t>NumPy </a:t>
-            </a:r>
-          </a:p>
-          <a:p>
-            <a:r>
-              <a:rPr lang="en-US" dirty="0">
-                <a:latin typeface="Times New Roman" panose="02020603050405020304" pitchFamily="18" charset="0"/>
-                <a:cs typeface="Times New Roman" panose="02020603050405020304" pitchFamily="18" charset="0"/>
-              </a:rPr>
-              <a:t>Matplotlib </a:t>
-            </a:r>
-          </a:p>
-          <a:p>
-            <a:pPr marL="0" indent="0">
-              <a:buNone/>
-            </a:pPr>
-            <a:r>
-              <a:rPr lang="en-US" dirty="0">
-                <a:latin typeface="Times New Roman" panose="02020603050405020304" pitchFamily="18" charset="0"/>
-                <a:cs typeface="Times New Roman" panose="02020603050405020304" pitchFamily="18" charset="0"/>
-              </a:rPr>
-              <a:t>Development Environment:</a:t>
-            </a:r>
-          </a:p>
-          <a:p>
-            <a:r>
-              <a:rPr lang="en-US" dirty="0">
-                <a:latin typeface="Times New Roman" panose="02020603050405020304" pitchFamily="18" charset="0"/>
-                <a:cs typeface="Times New Roman" panose="02020603050405020304" pitchFamily="18" charset="0"/>
-              </a:rPr>
-              <a:t>Jupyter Notebook </a:t>
-            </a:r>
-          </a:p>
-          <a:p>
-            <a:endParaRPr lang="en-US" dirty="0"/>
+            <a:r>
+              <a:rPr lang="en-US" dirty="0">
+                <a:latin typeface="Times New Roman" panose="02020603050405020304" pitchFamily="18" charset="0"/>
+                <a:cs typeface="Times New Roman" panose="02020603050405020304" pitchFamily="18" charset="0"/>
+              </a:rPr>
+              <a:t>User  </a:t>
+            </a:r>
+            <a:r>
+              <a:rPr lang="en-US" dirty="0">
+                <a:latin typeface="Times New Roman" panose="02020603050405020304" pitchFamily="18" charset="0"/>
+                <a:cs typeface="Times New Roman" panose="02020603050405020304" pitchFamily="18" charset="0"/>
+                <a:sym typeface="Wingdings" panose="05000000000000000000" pitchFamily="2" charset="2"/>
+              </a:rPr>
+              <a:t></a:t>
+            </a:r>
+            <a:r>
+              <a:rPr lang="en-US" dirty="0">
+                <a:latin typeface="Times New Roman" panose="02020603050405020304" pitchFamily="18" charset="0"/>
+                <a:cs typeface="Times New Roman" panose="02020603050405020304" pitchFamily="18" charset="0"/>
+              </a:rPr>
+              <a:t> Inventory Database </a:t>
+            </a:r>
+            <a:r>
+              <a:rPr lang="en-US" dirty="0">
+                <a:latin typeface="Times New Roman" panose="02020603050405020304" pitchFamily="18" charset="0"/>
+                <a:cs typeface="Times New Roman" panose="02020603050405020304" pitchFamily="18" charset="0"/>
+                <a:sym typeface="Wingdings" panose="05000000000000000000" pitchFamily="2" charset="2"/>
+              </a:rPr>
+              <a:t></a:t>
+            </a:r>
+            <a:r>
+              <a:rPr lang="en-US" dirty="0">
+                <a:latin typeface="Times New Roman" panose="02020603050405020304" pitchFamily="18" charset="0"/>
+                <a:cs typeface="Times New Roman" panose="02020603050405020304" pitchFamily="18" charset="0"/>
+              </a:rPr>
+              <a:t> Python Processing Engine </a:t>
+            </a:r>
+            <a:r>
+              <a:rPr lang="en-US" dirty="0">
+                <a:latin typeface="Times New Roman" panose="02020603050405020304" pitchFamily="18" charset="0"/>
+                <a:cs typeface="Times New Roman" panose="02020603050405020304" pitchFamily="18" charset="0"/>
+                <a:sym typeface="Wingdings" panose="05000000000000000000" pitchFamily="2" charset="2"/>
+              </a:rPr>
+              <a:t></a:t>
+            </a:r>
+            <a:r>
+              <a:rPr lang="en-US" dirty="0">
+                <a:latin typeface="Times New Roman" panose="02020603050405020304" pitchFamily="18" charset="0"/>
+                <a:cs typeface="Times New Roman" panose="02020603050405020304" pitchFamily="18" charset="0"/>
+              </a:rPr>
+              <a:t> Sales Module </a:t>
+            </a:r>
+            <a:r>
+              <a:rPr lang="en-US" dirty="0">
+                <a:latin typeface="Times New Roman" panose="02020603050405020304" pitchFamily="18" charset="0"/>
+                <a:cs typeface="Times New Roman" panose="02020603050405020304" pitchFamily="18" charset="0"/>
+                <a:sym typeface="Wingdings" panose="05000000000000000000" pitchFamily="2" charset="2"/>
+              </a:rPr>
+              <a:t></a:t>
+            </a:r>
+            <a:r>
+              <a:rPr lang="en-US" dirty="0">
+                <a:latin typeface="Times New Roman" panose="02020603050405020304" pitchFamily="18" charset="0"/>
+                <a:cs typeface="Times New Roman" panose="02020603050405020304" pitchFamily="18" charset="0"/>
+              </a:rPr>
+              <a:t> Profit Calculation </a:t>
+            </a:r>
+            <a:r>
+              <a:rPr lang="en-US" dirty="0">
+                <a:latin typeface="Times New Roman" panose="02020603050405020304" pitchFamily="18" charset="0"/>
+                <a:cs typeface="Times New Roman" panose="02020603050405020304" pitchFamily="18" charset="0"/>
+                <a:sym typeface="Wingdings" panose="05000000000000000000" pitchFamily="2" charset="2"/>
+              </a:rPr>
+              <a:t></a:t>
+            </a:r>
+            <a:r>
+              <a:rPr lang="en-US" dirty="0">
+                <a:latin typeface="Times New Roman" panose="02020603050405020304" pitchFamily="18" charset="0"/>
+                <a:cs typeface="Times New Roman" panose="02020603050405020304" pitchFamily="18" charset="0"/>
+              </a:rPr>
+              <a:t> Income Calculation </a:t>
+            </a:r>
+            <a:r>
+              <a:rPr lang="en-US" dirty="0">
+                <a:latin typeface="Times New Roman" panose="02020603050405020304" pitchFamily="18" charset="0"/>
+                <a:cs typeface="Times New Roman" panose="02020603050405020304" pitchFamily="18" charset="0"/>
+                <a:sym typeface="Wingdings" panose="05000000000000000000" pitchFamily="2" charset="2"/>
+              </a:rPr>
+              <a:t></a:t>
+            </a:r>
+            <a:r>
+              <a:rPr lang="en-US" dirty="0">
+                <a:latin typeface="Times New Roman" panose="02020603050405020304" pitchFamily="18" charset="0"/>
+                <a:cs typeface="Times New Roman" panose="02020603050405020304" pitchFamily="18" charset="0"/>
+              </a:rPr>
+              <a:t> Low Stock Detection </a:t>
+            </a:r>
+            <a:r>
+              <a:rPr lang="en-US" dirty="0">
+                <a:latin typeface="Times New Roman" panose="02020603050405020304" pitchFamily="18" charset="0"/>
+                <a:cs typeface="Times New Roman" panose="02020603050405020304" pitchFamily="18" charset="0"/>
+                <a:sym typeface="Wingdings" panose="05000000000000000000" pitchFamily="2" charset="2"/>
+              </a:rPr>
+              <a:t></a:t>
+            </a:r>
+            <a:r>
+              <a:rPr lang="en-US" dirty="0">
+                <a:latin typeface="Times New Roman" panose="02020603050405020304" pitchFamily="18" charset="0"/>
+                <a:cs typeface="Times New Roman" panose="02020603050405020304" pitchFamily="18" charset="0"/>
+              </a:rPr>
+              <a:t> Dashboard Visualization </a:t>
+            </a:r>
+            <a:r>
+              <a:rPr lang="en-US" dirty="0">
+                <a:latin typeface="Times New Roman" panose="02020603050405020304" pitchFamily="18" charset="0"/>
+                <a:cs typeface="Times New Roman" panose="02020603050405020304" pitchFamily="18" charset="0"/>
+                <a:sym typeface="Wingdings" panose="05000000000000000000" pitchFamily="2" charset="2"/>
+              </a:rPr>
+              <a:t></a:t>
+            </a:r>
+            <a:r>
+              <a:rPr lang="en-US" dirty="0">
+                <a:latin typeface="Times New Roman" panose="02020603050405020304" pitchFamily="18" charset="0"/>
+                <a:cs typeface="Times New Roman" panose="02020603050405020304" pitchFamily="18" charset="0"/>
+              </a:rPr>
+              <a:t> Reports</a:t>
+            </a:r>
+          </a:p>
+          <a:p>
+            <a:r>
+              <a:rPr lang="en-US" dirty="0">
+                <a:latin typeface="Times New Roman" panose="02020603050405020304" pitchFamily="18" charset="0"/>
+                <a:cs typeface="Times New Roman" panose="02020603050405020304" pitchFamily="18" charset="0"/>
+              </a:rPr>
+              <a:t>User inputs data.</a:t>
+            </a:r>
+          </a:p>
+          <a:p>
+            <a:r>
+              <a:rPr lang="en-US" dirty="0">
+                <a:latin typeface="Times New Roman" panose="02020603050405020304" pitchFamily="18" charset="0"/>
+                <a:cs typeface="Times New Roman" panose="02020603050405020304" pitchFamily="18" charset="0"/>
+              </a:rPr>
+              <a:t>Database stores information.</a:t>
+            </a:r>
+          </a:p>
+          <a:p>
+            <a:r>
+              <a:rPr lang="en-US" dirty="0">
+                <a:latin typeface="Times New Roman" panose="02020603050405020304" pitchFamily="18" charset="0"/>
+                <a:cs typeface="Times New Roman" panose="02020603050405020304" pitchFamily="18" charset="0"/>
+              </a:rPr>
+              <a:t>Python processes transactions.</a:t>
+            </a:r>
+          </a:p>
+          <a:p>
+            <a:r>
+              <a:rPr lang="en-US" dirty="0">
+                <a:latin typeface="Times New Roman" panose="02020603050405020304" pitchFamily="18" charset="0"/>
+                <a:cs typeface="Times New Roman" panose="02020603050405020304" pitchFamily="18" charset="0"/>
+              </a:rPr>
+              <a:t>Dashboard displays reports.</a:t>
+            </a:r>
+          </a:p>
+          <a:p>
+            <a:endParaRPr lang="en-US" dirty="0">
+              <a:latin typeface="Times New Roman" panose="02020603050405020304" pitchFamily="18" charset="0"/>
+              <a:cs typeface="Times New Roman" panose="02020603050405020304" pitchFamily="18" charset="0"/>
+            </a:endParaRPr>
           </a:p>
         </p:txBody>
       </p:sp>
     </p:spTree>
     <p:extLst>
       <p:ext uri="{BB962C8B-B14F-4D97-AF65-F5344CB8AC3E}">
-        <p14:creationId xmlns:p14="http://schemas.microsoft.com/office/powerpoint/2010/main" val="1655476587"/>
+        <p14:creationId xmlns:p14="http://schemas.microsoft.com/office/powerpoint/2010/main" val="2407849959"/>
       </p:ext>
     </p:extLst>
   </p:cSld>
@@ -6716,7 +6794,7 @@
           <p:cNvPr id="2" name="Title 1">
             <a:extLst>
               <a:ext uri="{FF2B5EF4-FFF2-40B4-BE49-F238E27FC236}">
-                <a16:creationId xmlns:a16="http://schemas.microsoft.com/office/drawing/2014/main" id="{C47C7A32-2008-BB0B-618A-6B2CA2F68BD4}"/>
+                <a16:creationId xmlns:a16="http://schemas.microsoft.com/office/drawing/2014/main" id="{4C5F24EC-F417-AA96-D17E-A6730128959E}"/>
               </a:ext>
             </a:extLst>
           </p:cNvPr>
@@ -6737,7 +6815,7 @@
                 <a:latin typeface="Times New Roman" panose="02020603050405020304" pitchFamily="18" charset="0"/>
                 <a:cs typeface="Times New Roman" panose="02020603050405020304" pitchFamily="18" charset="0"/>
               </a:rPr>
-              <a:t>System Architecture</a:t>
+              <a:t>System Modules</a:t>
             </a:r>
           </a:p>
         </p:txBody>
@@ -6747,7 +6825,7 @@
           <p:cNvPr id="3" name="Content Placeholder 2">
             <a:extLst>
               <a:ext uri="{FF2B5EF4-FFF2-40B4-BE49-F238E27FC236}">
-                <a16:creationId xmlns:a16="http://schemas.microsoft.com/office/drawing/2014/main" id="{8D5A35EF-1A0B-F342-2019-8E04301F7DEC}"/>
+                <a16:creationId xmlns:a16="http://schemas.microsoft.com/office/drawing/2014/main" id="{D2561A72-8922-EFA2-66DA-877C6A365110}"/>
               </a:ext>
             </a:extLst>
           </p:cNvPr>
@@ -6761,172 +6839,103 @@
         <p:spPr/>
         <p:txBody>
           <a:bodyPr>
-            <a:normAutofit lnSpcReduction="10000"/>
+            <a:normAutofit/>
           </a:bodyPr>
           <a:lstStyle/>
           <a:p>
             <a:r>
-              <a:rPr lang="en-US" dirty="0">
-                <a:latin typeface="Times New Roman" panose="02020603050405020304" pitchFamily="18" charset="0"/>
-                <a:cs typeface="Times New Roman" panose="02020603050405020304" pitchFamily="18" charset="0"/>
-              </a:rPr>
-              <a:t>User  </a:t>
-            </a:r>
-            <a:r>
-              <a:rPr lang="en-US" dirty="0">
-                <a:latin typeface="Times New Roman" panose="02020603050405020304" pitchFamily="18" charset="0"/>
-                <a:cs typeface="Times New Roman" panose="02020603050405020304" pitchFamily="18" charset="0"/>
-                <a:sym typeface="Wingdings" panose="05000000000000000000" pitchFamily="2" charset="2"/>
-              </a:rPr>
-              <a:t></a:t>
-            </a:r>
-            <a:r>
-              <a:rPr lang="en-US" dirty="0">
-                <a:latin typeface="Times New Roman" panose="02020603050405020304" pitchFamily="18" charset="0"/>
-                <a:cs typeface="Times New Roman" panose="02020603050405020304" pitchFamily="18" charset="0"/>
-              </a:rPr>
-              <a:t> Inventory Database </a:t>
-            </a:r>
-            <a:r>
-              <a:rPr lang="en-US" dirty="0">
-                <a:latin typeface="Times New Roman" panose="02020603050405020304" pitchFamily="18" charset="0"/>
-                <a:cs typeface="Times New Roman" panose="02020603050405020304" pitchFamily="18" charset="0"/>
-                <a:sym typeface="Wingdings" panose="05000000000000000000" pitchFamily="2" charset="2"/>
-              </a:rPr>
-              <a:t></a:t>
-            </a:r>
-            <a:r>
-              <a:rPr lang="en-US" dirty="0">
-                <a:latin typeface="Times New Roman" panose="02020603050405020304" pitchFamily="18" charset="0"/>
-                <a:cs typeface="Times New Roman" panose="02020603050405020304" pitchFamily="18" charset="0"/>
-              </a:rPr>
-              <a:t> Python Processing Engine </a:t>
-            </a:r>
-            <a:r>
-              <a:rPr lang="en-US" dirty="0">
-                <a:latin typeface="Times New Roman" panose="02020603050405020304" pitchFamily="18" charset="0"/>
-                <a:cs typeface="Times New Roman" panose="02020603050405020304" pitchFamily="18" charset="0"/>
-                <a:sym typeface="Wingdings" panose="05000000000000000000" pitchFamily="2" charset="2"/>
-              </a:rPr>
-              <a:t></a:t>
-            </a:r>
-            <a:r>
-              <a:rPr lang="en-US" dirty="0">
-                <a:latin typeface="Times New Roman" panose="02020603050405020304" pitchFamily="18" charset="0"/>
-                <a:cs typeface="Times New Roman" panose="02020603050405020304" pitchFamily="18" charset="0"/>
-              </a:rPr>
-              <a:t> Sales Module </a:t>
-            </a:r>
-            <a:r>
-              <a:rPr lang="en-US" dirty="0">
-                <a:latin typeface="Times New Roman" panose="02020603050405020304" pitchFamily="18" charset="0"/>
-                <a:cs typeface="Times New Roman" panose="02020603050405020304" pitchFamily="18" charset="0"/>
-                <a:sym typeface="Wingdings" panose="05000000000000000000" pitchFamily="2" charset="2"/>
-              </a:rPr>
-              <a:t></a:t>
-            </a:r>
-            <a:r>
-              <a:rPr lang="en-US" dirty="0">
-                <a:latin typeface="Times New Roman" panose="02020603050405020304" pitchFamily="18" charset="0"/>
-                <a:cs typeface="Times New Roman" panose="02020603050405020304" pitchFamily="18" charset="0"/>
-              </a:rPr>
-              <a:t> Profit Calculation </a:t>
-            </a:r>
-            <a:r>
-              <a:rPr lang="en-US" dirty="0">
-                <a:latin typeface="Times New Roman" panose="02020603050405020304" pitchFamily="18" charset="0"/>
-                <a:cs typeface="Times New Roman" panose="02020603050405020304" pitchFamily="18" charset="0"/>
-                <a:sym typeface="Wingdings" panose="05000000000000000000" pitchFamily="2" charset="2"/>
-              </a:rPr>
-              <a:t></a:t>
-            </a:r>
-            <a:r>
-              <a:rPr lang="en-US" dirty="0">
-                <a:latin typeface="Times New Roman" panose="02020603050405020304" pitchFamily="18" charset="0"/>
-                <a:cs typeface="Times New Roman" panose="02020603050405020304" pitchFamily="18" charset="0"/>
-              </a:rPr>
-              <a:t> Income Calculation </a:t>
-            </a:r>
-            <a:r>
-              <a:rPr lang="en-US" dirty="0">
-                <a:latin typeface="Times New Roman" panose="02020603050405020304" pitchFamily="18" charset="0"/>
-                <a:cs typeface="Times New Roman" panose="02020603050405020304" pitchFamily="18" charset="0"/>
-                <a:sym typeface="Wingdings" panose="05000000000000000000" pitchFamily="2" charset="2"/>
-              </a:rPr>
-              <a:t></a:t>
-            </a:r>
-            <a:r>
-              <a:rPr lang="en-US" dirty="0">
-                <a:latin typeface="Times New Roman" panose="02020603050405020304" pitchFamily="18" charset="0"/>
-                <a:cs typeface="Times New Roman" panose="02020603050405020304" pitchFamily="18" charset="0"/>
-              </a:rPr>
-              <a:t> Low Stock Detection </a:t>
-            </a:r>
-            <a:r>
-              <a:rPr lang="en-US" dirty="0">
-                <a:latin typeface="Times New Roman" panose="02020603050405020304" pitchFamily="18" charset="0"/>
-                <a:cs typeface="Times New Roman" panose="02020603050405020304" pitchFamily="18" charset="0"/>
-                <a:sym typeface="Wingdings" panose="05000000000000000000" pitchFamily="2" charset="2"/>
-              </a:rPr>
-              <a:t></a:t>
-            </a:r>
-            <a:r>
-              <a:rPr lang="en-US" dirty="0">
-                <a:latin typeface="Times New Roman" panose="02020603050405020304" pitchFamily="18" charset="0"/>
-                <a:cs typeface="Times New Roman" panose="02020603050405020304" pitchFamily="18" charset="0"/>
-              </a:rPr>
-              <a:t> Dashboard Visualization </a:t>
-            </a:r>
-            <a:r>
-              <a:rPr lang="en-US" dirty="0">
-                <a:latin typeface="Times New Roman" panose="02020603050405020304" pitchFamily="18" charset="0"/>
-                <a:cs typeface="Times New Roman" panose="02020603050405020304" pitchFamily="18" charset="0"/>
-                <a:sym typeface="Wingdings" panose="05000000000000000000" pitchFamily="2" charset="2"/>
-              </a:rPr>
-              <a:t></a:t>
-            </a:r>
-            <a:r>
-              <a:rPr lang="en-US" dirty="0">
-                <a:latin typeface="Times New Roman" panose="02020603050405020304" pitchFamily="18" charset="0"/>
-                <a:cs typeface="Times New Roman" panose="02020603050405020304" pitchFamily="18" charset="0"/>
-              </a:rPr>
-              <a:t> Reports</a:t>
-            </a:r>
-          </a:p>
-          <a:p>
-            <a:r>
-              <a:rPr lang="en-US" dirty="0">
-                <a:latin typeface="Times New Roman" panose="02020603050405020304" pitchFamily="18" charset="0"/>
-                <a:cs typeface="Times New Roman" panose="02020603050405020304" pitchFamily="18" charset="0"/>
-              </a:rPr>
-              <a:t>User inputs data </a:t>
-            </a:r>
-          </a:p>
-          <a:p>
-            <a:r>
-              <a:rPr lang="en-US" dirty="0">
-                <a:latin typeface="Times New Roman" panose="02020603050405020304" pitchFamily="18" charset="0"/>
-                <a:cs typeface="Times New Roman" panose="02020603050405020304" pitchFamily="18" charset="0"/>
-              </a:rPr>
-              <a:t>Database stores information </a:t>
-            </a:r>
-          </a:p>
-          <a:p>
-            <a:r>
-              <a:rPr lang="en-US" dirty="0">
-                <a:latin typeface="Times New Roman" panose="02020603050405020304" pitchFamily="18" charset="0"/>
-                <a:cs typeface="Times New Roman" panose="02020603050405020304" pitchFamily="18" charset="0"/>
-              </a:rPr>
-              <a:t>Python processes transactions </a:t>
-            </a:r>
-          </a:p>
-          <a:p>
-            <a:r>
-              <a:rPr lang="en-US" dirty="0">
-                <a:latin typeface="Times New Roman" panose="02020603050405020304" pitchFamily="18" charset="0"/>
-                <a:cs typeface="Times New Roman" panose="02020603050405020304" pitchFamily="18" charset="0"/>
-              </a:rPr>
-              <a:t>Dashboard displays reports</a:t>
+              <a:rPr lang="en-US" b="1" dirty="0">
+                <a:latin typeface="Times New Roman" panose="02020603050405020304" pitchFamily="18" charset="0"/>
+                <a:cs typeface="Times New Roman" panose="02020603050405020304" pitchFamily="18" charset="0"/>
+              </a:rPr>
+              <a:t>Inventory Module: </a:t>
+            </a:r>
+            <a:r>
+              <a:rPr lang="en-US" dirty="0">
+                <a:latin typeface="Times New Roman" panose="02020603050405020304" pitchFamily="18" charset="0"/>
+                <a:cs typeface="Times New Roman" panose="02020603050405020304" pitchFamily="18" charset="0"/>
+              </a:rPr>
+              <a:t>Add products, Update inventory </a:t>
+            </a:r>
+          </a:p>
+          <a:p>
+            <a:r>
+              <a:rPr lang="en-US" b="1" dirty="0">
+                <a:latin typeface="Times New Roman" panose="02020603050405020304" pitchFamily="18" charset="0"/>
+                <a:cs typeface="Times New Roman" panose="02020603050405020304" pitchFamily="18" charset="0"/>
+              </a:rPr>
+              <a:t>Sales Module: </a:t>
+            </a:r>
+            <a:r>
+              <a:rPr lang="en-US" dirty="0">
+                <a:latin typeface="Times New Roman" panose="02020603050405020304" pitchFamily="18" charset="0"/>
+                <a:cs typeface="Times New Roman" panose="02020603050405020304" pitchFamily="18" charset="0"/>
+              </a:rPr>
+              <a:t>Record sales, Update stock record, Generate receipts</a:t>
+            </a:r>
+          </a:p>
+          <a:p>
+            <a:r>
+              <a:rPr lang="en-US" b="1" dirty="0">
+                <a:latin typeface="Times New Roman" panose="02020603050405020304" pitchFamily="18" charset="0"/>
+                <a:cs typeface="Times New Roman" panose="02020603050405020304" pitchFamily="18" charset="0"/>
+              </a:rPr>
+              <a:t>Profit Module: </a:t>
+            </a:r>
+            <a:r>
+              <a:rPr lang="en-US" dirty="0">
+                <a:latin typeface="Times New Roman" panose="02020603050405020304" pitchFamily="18" charset="0"/>
+                <a:cs typeface="Times New Roman" panose="02020603050405020304" pitchFamily="18" charset="0"/>
+              </a:rPr>
+              <a:t>Calculates profit </a:t>
+            </a:r>
+          </a:p>
+          <a:p>
+            <a:r>
+              <a:rPr lang="en-US" b="1" dirty="0">
+                <a:latin typeface="Times New Roman" panose="02020603050405020304" pitchFamily="18" charset="0"/>
+                <a:cs typeface="Times New Roman" panose="02020603050405020304" pitchFamily="18" charset="0"/>
+              </a:rPr>
+              <a:t>Income Module: </a:t>
+            </a:r>
+            <a:r>
+              <a:rPr lang="en-US" dirty="0">
+                <a:latin typeface="Times New Roman" panose="02020603050405020304" pitchFamily="18" charset="0"/>
+                <a:cs typeface="Times New Roman" panose="02020603050405020304" pitchFamily="18" charset="0"/>
+              </a:rPr>
+              <a:t>Computes revenue </a:t>
+            </a:r>
+          </a:p>
+          <a:p>
+            <a:r>
+              <a:rPr lang="en-US" b="1" dirty="0">
+                <a:latin typeface="Times New Roman" panose="02020603050405020304" pitchFamily="18" charset="0"/>
+                <a:cs typeface="Times New Roman" panose="02020603050405020304" pitchFamily="18" charset="0"/>
+              </a:rPr>
+              <a:t>Alert Module: </a:t>
+            </a:r>
+            <a:r>
+              <a:rPr lang="en-US" dirty="0">
+                <a:latin typeface="Times New Roman" panose="02020603050405020304" pitchFamily="18" charset="0"/>
+                <a:cs typeface="Times New Roman" panose="02020603050405020304" pitchFamily="18" charset="0"/>
+              </a:rPr>
+              <a:t>Detects low stock </a:t>
+            </a:r>
+          </a:p>
+          <a:p>
+            <a:r>
+              <a:rPr lang="en-US" b="1" dirty="0">
+                <a:latin typeface="Times New Roman" panose="02020603050405020304" pitchFamily="18" charset="0"/>
+                <a:cs typeface="Times New Roman" panose="02020603050405020304" pitchFamily="18" charset="0"/>
+              </a:rPr>
+              <a:t>Visualization Module: </a:t>
+            </a:r>
+            <a:r>
+              <a:rPr lang="en-US" dirty="0">
+                <a:latin typeface="Times New Roman" panose="02020603050405020304" pitchFamily="18" charset="0"/>
+                <a:cs typeface="Times New Roman" panose="02020603050405020304" pitchFamily="18" charset="0"/>
+              </a:rPr>
+              <a:t>Displays business reports</a:t>
             </a:r>
           </a:p>
           <a:p>
@@ -6940,7 +6949,7 @@
     </p:spTree>
     <p:extLst>
       <p:ext uri="{BB962C8B-B14F-4D97-AF65-F5344CB8AC3E}">
-        <p14:creationId xmlns:p14="http://schemas.microsoft.com/office/powerpoint/2010/main" val="2407849959"/>
+        <p14:creationId xmlns:p14="http://schemas.microsoft.com/office/powerpoint/2010/main" val="3164107084"/>
       </p:ext>
     </p:extLst>
   </p:cSld>
@@ -6972,7 +6981,7 @@
           <p:cNvPr id="2" name="Title 1">
             <a:extLst>
               <a:ext uri="{FF2B5EF4-FFF2-40B4-BE49-F238E27FC236}">
-                <a16:creationId xmlns:a16="http://schemas.microsoft.com/office/drawing/2014/main" id="{4C5F24EC-F417-AA96-D17E-A6730128959E}"/>
+                <a16:creationId xmlns:a16="http://schemas.microsoft.com/office/drawing/2014/main" id="{BA804AC6-A4F9-6B7D-B99F-3716156B5B0F}"/>
               </a:ext>
             </a:extLst>
           </p:cNvPr>
@@ -6993,141 +7002,47 @@
                 <a:latin typeface="Times New Roman" panose="02020603050405020304" pitchFamily="18" charset="0"/>
                 <a:cs typeface="Times New Roman" panose="02020603050405020304" pitchFamily="18" charset="0"/>
               </a:rPr>
-              <a:t>System Modules</a:t>
-            </a:r>
-          </a:p>
-        </p:txBody>
-      </p:sp>
-      <p:sp>
-        <p:nvSpPr>
-          <p:cNvPr id="3" name="Content Placeholder 2">
+              <a:t>Inventory Module Result</a:t>
+            </a:r>
+          </a:p>
+        </p:txBody>
+      </p:sp>
+      <p:pic>
+        <p:nvPicPr>
+          <p:cNvPr id="4" name="Content Placeholder 3">
             <a:extLst>
               <a:ext uri="{FF2B5EF4-FFF2-40B4-BE49-F238E27FC236}">
-                <a16:creationId xmlns:a16="http://schemas.microsoft.com/office/drawing/2014/main" id="{D2561A72-8922-EFA2-66DA-877C6A365110}"/>
+                <a16:creationId xmlns:a16="http://schemas.microsoft.com/office/drawing/2014/main" id="{08FFA6D3-0911-6BF4-3FBE-7A3782F4A54C}"/>
               </a:ext>
             </a:extLst>
           </p:cNvPr>
-          <p:cNvSpPr>
-            <a:spLocks noGrp="1"/>
-          </p:cNvSpPr>
+          <p:cNvPicPr>
+            <a:picLocks noGrp="1" noChangeAspect="1"/>
+          </p:cNvPicPr>
           <p:nvPr>
             <p:ph idx="1"/>
           </p:nvPr>
-        </p:nvSpPr>
-        <p:spPr/>
-        <p:txBody>
-          <a:bodyPr>
-            <a:normAutofit/>
-          </a:bodyPr>
-          <a:lstStyle/>
-          <a:p>
-            <a:r>
-              <a:rPr lang="en-US" b="1" dirty="0">
-                <a:latin typeface="Times New Roman" panose="02020603050405020304" pitchFamily="18" charset="0"/>
-                <a:cs typeface="Times New Roman" panose="02020603050405020304" pitchFamily="18" charset="0"/>
-              </a:rPr>
-              <a:t>Inventory Module: </a:t>
-            </a:r>
-            <a:r>
-              <a:rPr lang="en-US" dirty="0">
-                <a:latin typeface="Times New Roman" panose="02020603050405020304" pitchFamily="18" charset="0"/>
-                <a:cs typeface="Times New Roman" panose="02020603050405020304" pitchFamily="18" charset="0"/>
-              </a:rPr>
-              <a:t>Add products, Update inventory, Delete records </a:t>
-            </a:r>
-          </a:p>
-          <a:p>
-            <a:r>
-              <a:rPr lang="en-US" b="1" dirty="0">
-                <a:latin typeface="Times New Roman" panose="02020603050405020304" pitchFamily="18" charset="0"/>
-                <a:cs typeface="Times New Roman" panose="02020603050405020304" pitchFamily="18" charset="0"/>
-              </a:rPr>
-              <a:t>Sales Module: </a:t>
-            </a:r>
-            <a:r>
-              <a:rPr lang="en-US" dirty="0">
-                <a:latin typeface="Times New Roman" panose="02020603050405020304" pitchFamily="18" charset="0"/>
-                <a:cs typeface="Times New Roman" panose="02020603050405020304" pitchFamily="18" charset="0"/>
-              </a:rPr>
-              <a:t>Record sales, Reduce stock </a:t>
-            </a:r>
-          </a:p>
-          <a:p>
-            <a:r>
-              <a:rPr lang="en-US" b="1" dirty="0">
-                <a:latin typeface="Times New Roman" panose="02020603050405020304" pitchFamily="18" charset="0"/>
-                <a:cs typeface="Times New Roman" panose="02020603050405020304" pitchFamily="18" charset="0"/>
-              </a:rPr>
-              <a:t>Profit Module: </a:t>
-            </a:r>
-            <a:r>
-              <a:rPr lang="en-US" dirty="0">
-                <a:latin typeface="Times New Roman" panose="02020603050405020304" pitchFamily="18" charset="0"/>
-                <a:cs typeface="Times New Roman" panose="02020603050405020304" pitchFamily="18" charset="0"/>
-              </a:rPr>
-              <a:t>Calculates profit </a:t>
-            </a:r>
-          </a:p>
-          <a:p>
-            <a:r>
-              <a:rPr lang="en-US" b="1" dirty="0">
-                <a:latin typeface="Times New Roman" panose="02020603050405020304" pitchFamily="18" charset="0"/>
-                <a:cs typeface="Times New Roman" panose="02020603050405020304" pitchFamily="18" charset="0"/>
-              </a:rPr>
-              <a:t>Income Module: </a:t>
-            </a:r>
-            <a:r>
-              <a:rPr lang="en-US" dirty="0">
-                <a:latin typeface="Times New Roman" panose="02020603050405020304" pitchFamily="18" charset="0"/>
-                <a:cs typeface="Times New Roman" panose="02020603050405020304" pitchFamily="18" charset="0"/>
-              </a:rPr>
-              <a:t>Computes revenue </a:t>
-            </a:r>
-          </a:p>
-          <a:p>
-            <a:r>
-              <a:rPr lang="en-US" b="1" dirty="0">
-                <a:latin typeface="Times New Roman" panose="02020603050405020304" pitchFamily="18" charset="0"/>
-                <a:cs typeface="Times New Roman" panose="02020603050405020304" pitchFamily="18" charset="0"/>
-              </a:rPr>
-              <a:t>Alert Module: </a:t>
-            </a:r>
-            <a:r>
-              <a:rPr lang="en-US" dirty="0">
-                <a:latin typeface="Times New Roman" panose="02020603050405020304" pitchFamily="18" charset="0"/>
-                <a:cs typeface="Times New Roman" panose="02020603050405020304" pitchFamily="18" charset="0"/>
-              </a:rPr>
-              <a:t>Detects low stock </a:t>
-            </a:r>
-          </a:p>
-          <a:p>
-            <a:r>
-              <a:rPr lang="en-US" b="1" dirty="0">
-                <a:latin typeface="Times New Roman" panose="02020603050405020304" pitchFamily="18" charset="0"/>
-                <a:cs typeface="Times New Roman" panose="02020603050405020304" pitchFamily="18" charset="0"/>
-              </a:rPr>
-              <a:t>Visualization Module: </a:t>
-            </a:r>
-            <a:r>
-              <a:rPr lang="en-US" dirty="0">
-                <a:latin typeface="Times New Roman" panose="02020603050405020304" pitchFamily="18" charset="0"/>
-                <a:cs typeface="Times New Roman" panose="02020603050405020304" pitchFamily="18" charset="0"/>
-              </a:rPr>
-              <a:t>Displays business reports</a:t>
-            </a:r>
-          </a:p>
-          <a:p>
-            <a:endParaRPr lang="en-US" dirty="0">
-              <a:latin typeface="Times New Roman" panose="02020603050405020304" pitchFamily="18" charset="0"/>
-              <a:cs typeface="Times New Roman" panose="02020603050405020304" pitchFamily="18" charset="0"/>
-            </a:endParaRPr>
-          </a:p>
-        </p:txBody>
-      </p:sp>
+        </p:nvPicPr>
+        <p:blipFill>
+          <a:blip r:embed="rId2"/>
+          <a:stretch>
+            <a:fillRect/>
+          </a:stretch>
+        </p:blipFill>
+        <p:spPr>
+          <a:xfrm>
+            <a:off x="1493458" y="2993570"/>
+            <a:ext cx="9382630" cy="2492829"/>
+          </a:xfrm>
+          <a:prstGeom prst="rect">
+            <a:avLst/>
+          </a:prstGeom>
+        </p:spPr>
+      </p:pic>
     </p:spTree>
     <p:extLst>
       <p:ext uri="{BB962C8B-B14F-4D97-AF65-F5344CB8AC3E}">
-        <p14:creationId xmlns:p14="http://schemas.microsoft.com/office/powerpoint/2010/main" val="3164107084"/>
+        <p14:creationId xmlns:p14="http://schemas.microsoft.com/office/powerpoint/2010/main" val="2757011713"/>
       </p:ext>
     </p:extLst>
   </p:cSld>
@@ -7154,12 +7069,44 @@
           <a:chExt cx="0" cy="0"/>
         </a:xfrm>
       </p:grpSpPr>
+      <p:sp>
+        <p:nvSpPr>
+          <p:cNvPr id="2" name="Title 1">
+            <a:extLst>
+              <a:ext uri="{FF2B5EF4-FFF2-40B4-BE49-F238E27FC236}">
+                <a16:creationId xmlns:a16="http://schemas.microsoft.com/office/drawing/2014/main" id="{0A0215C4-8C6B-30E6-3D8E-6D427F36FCD2}"/>
+              </a:ext>
+            </a:extLst>
+          </p:cNvPr>
+          <p:cNvSpPr>
+            <a:spLocks noGrp="1"/>
+          </p:cNvSpPr>
+          <p:nvPr>
+            <p:ph type="title"/>
+          </p:nvPr>
+        </p:nvSpPr>
+        <p:spPr/>
+        <p:txBody>
+          <a:bodyPr/>
+          <a:lstStyle/>
+          <a:p>
+            <a:r>
+              <a:rPr lang="en-US" dirty="0">
+                <a:latin typeface="Times New Roman" panose="02020603050405020304" pitchFamily="18" charset="0"/>
+                <a:cs typeface="Times New Roman" panose="02020603050405020304" pitchFamily="18" charset="0"/>
+              </a:rPr>
+              <a:t>Sales Module Result</a:t>
+            </a:r>
+            <a:endParaRPr lang="en-US" dirty="0"/>
+          </a:p>
+        </p:txBody>
+      </p:sp>
       <p:pic>
         <p:nvPicPr>
-          <p:cNvPr id="5" name="Content Placeholder 4">
+          <p:cNvPr id="4" name="Content Placeholder 3">
             <a:extLst>
               <a:ext uri="{FF2B5EF4-FFF2-40B4-BE49-F238E27FC236}">
-                <a16:creationId xmlns:a16="http://schemas.microsoft.com/office/drawing/2014/main" id="{87D03434-4547-BF5B-F4B6-EF4A4E352F10}"/>
+                <a16:creationId xmlns:a16="http://schemas.microsoft.com/office/drawing/2014/main" id="{7830B37A-8673-36A6-734F-2424A7FD52B4}"/>
               </a:ext>
             </a:extLst>
           </p:cNvPr>
@@ -7178,8 +7125,8 @@
         </p:blipFill>
         <p:spPr>
           <a:xfrm>
-            <a:off x="917497" y="1297235"/>
-            <a:ext cx="10540703" cy="4263529"/>
+            <a:off x="1399523" y="2459570"/>
+            <a:ext cx="9257591" cy="3744533"/>
           </a:xfrm>
           <a:prstGeom prst="rect">
             <a:avLst/>
@@ -7189,7 +7136,7 @@
     </p:spTree>
     <p:extLst>
       <p:ext uri="{BB962C8B-B14F-4D97-AF65-F5344CB8AC3E}">
-        <p14:creationId xmlns:p14="http://schemas.microsoft.com/office/powerpoint/2010/main" val="1203252619"/>
+        <p14:creationId xmlns:p14="http://schemas.microsoft.com/office/powerpoint/2010/main" val="1970858701"/>
       </p:ext>
     </p:extLst>
   </p:cSld>
@@ -7200,6 +7147,100 @@
 </file>
 
 <file path=ppt/slides/slide17.xml><?xml version="1.0" encoding="utf-8"?>
+<p:sld xmlns:a="http://schemas.openxmlformats.org/drawingml/2006/main" xmlns:r="http://schemas.openxmlformats.org/officeDocument/2006/relationships" xmlns:p="http://schemas.openxmlformats.org/presentationml/2006/main">
+  <p:cSld>
+    <p:spTree>
+      <p:nvGrpSpPr>
+        <p:cNvPr id="1" name=""/>
+        <p:cNvGrpSpPr/>
+        <p:nvPr/>
+      </p:nvGrpSpPr>
+      <p:grpSpPr>
+        <a:xfrm>
+          <a:off x="0" y="0"/>
+          <a:ext cx="0" cy="0"/>
+          <a:chOff x="0" y="0"/>
+          <a:chExt cx="0" cy="0"/>
+        </a:xfrm>
+      </p:grpSpPr>
+      <p:sp>
+        <p:nvSpPr>
+          <p:cNvPr id="2" name="Title 1">
+            <a:extLst>
+              <a:ext uri="{FF2B5EF4-FFF2-40B4-BE49-F238E27FC236}">
+                <a16:creationId xmlns:a16="http://schemas.microsoft.com/office/drawing/2014/main" id="{26736A9E-4ECE-86DD-41F7-A7E58A8E16FB}"/>
+              </a:ext>
+            </a:extLst>
+          </p:cNvPr>
+          <p:cNvSpPr>
+            <a:spLocks noGrp="1"/>
+          </p:cNvSpPr>
+          <p:nvPr>
+            <p:ph type="title"/>
+          </p:nvPr>
+        </p:nvSpPr>
+        <p:spPr/>
+        <p:txBody>
+          <a:bodyPr/>
+          <a:lstStyle/>
+          <a:p>
+            <a:r>
+              <a:rPr lang="en-US" dirty="0">
+                <a:latin typeface="Times New Roman" panose="02020603050405020304" pitchFamily="18" charset="0"/>
+                <a:cs typeface="Times New Roman" panose="02020603050405020304" pitchFamily="18" charset="0"/>
+              </a:rPr>
+              <a:t>Sales Module Result</a:t>
+            </a:r>
+            <a:endParaRPr lang="en-US" dirty="0"/>
+          </a:p>
+        </p:txBody>
+      </p:sp>
+      <p:pic>
+        <p:nvPicPr>
+          <p:cNvPr id="4" name="Content Placeholder 3">
+            <a:extLst>
+              <a:ext uri="{FF2B5EF4-FFF2-40B4-BE49-F238E27FC236}">
+                <a16:creationId xmlns:a16="http://schemas.microsoft.com/office/drawing/2014/main" id="{0D9D36D1-3C31-C0AF-E88E-06A5E99E35A6}"/>
+              </a:ext>
+            </a:extLst>
+          </p:cNvPr>
+          <p:cNvPicPr>
+            <a:picLocks noGrp="1" noChangeAspect="1"/>
+          </p:cNvPicPr>
+          <p:nvPr>
+            <p:ph idx="1"/>
+          </p:nvPr>
+        </p:nvPicPr>
+        <p:blipFill>
+          <a:blip r:embed="rId2"/>
+          <a:stretch>
+            <a:fillRect/>
+          </a:stretch>
+        </p:blipFill>
+        <p:spPr>
+          <a:xfrm>
+            <a:off x="1861457" y="2503714"/>
+            <a:ext cx="8215252" cy="3534581"/>
+          </a:xfrm>
+          <a:prstGeom prst="rect">
+            <a:avLst/>
+          </a:prstGeom>
+        </p:spPr>
+      </p:pic>
+    </p:spTree>
+    <p:extLst>
+      <p:ext uri="{BB962C8B-B14F-4D97-AF65-F5344CB8AC3E}">
+        <p14:creationId xmlns:p14="http://schemas.microsoft.com/office/powerpoint/2010/main" val="3739390126"/>
+      </p:ext>
+    </p:extLst>
+  </p:cSld>
+  <p:clrMapOvr>
+    <a:masterClrMapping/>
+  </p:clrMapOvr>
+</p:sld>
+</file>
+
+<file path=ppt/slides/slide18.xml><?xml version="1.0" encoding="utf-8"?>
 <p:sld xmlns:a="http://schemas.openxmlformats.org/drawingml/2006/main" xmlns:r="http://schemas.openxmlformats.org/officeDocument/2006/relationships" xmlns:p="http://schemas.openxmlformats.org/presentationml/2006/main">
   <p:cSld>
     <p:spTree>
@@ -7298,7 +7339,7 @@
 </p:sld>
 </file>
 
-<file path=ppt/slides/slide18.xml><?xml version="1.0" encoding="utf-8"?>
+<file path=ppt/slides/slide19.xml><?xml version="1.0" encoding="utf-8"?>
 <p:sld xmlns:a="http://schemas.openxmlformats.org/drawingml/2006/main" xmlns:r="http://schemas.openxmlformats.org/officeDocument/2006/relationships" xmlns:p="http://schemas.openxmlformats.org/presentationml/2006/main">
   <p:cSld>
     <p:spTree>
@@ -7371,7 +7412,7 @@
         <p:spPr>
           <a:xfrm>
             <a:off x="1295400" y="2514601"/>
-            <a:ext cx="9601200" cy="3624942"/>
+            <a:ext cx="9601200" cy="3361267"/>
           </a:xfrm>
           <a:prstGeom prst="rect">
             <a:avLst/>
@@ -7391,7 +7432,164 @@
 </p:sld>
 </file>
 
-<file path=ppt/slides/slide19.xml><?xml version="1.0" encoding="utf-8"?>
+<file path=ppt/slides/slide2.xml><?xml version="1.0" encoding="utf-8"?>
+<p:sld xmlns:a="http://schemas.openxmlformats.org/drawingml/2006/main" xmlns:r="http://schemas.openxmlformats.org/officeDocument/2006/relationships" xmlns:p="http://schemas.openxmlformats.org/presentationml/2006/main">
+  <p:cSld>
+    <p:spTree>
+      <p:nvGrpSpPr>
+        <p:cNvPr id="1" name=""/>
+        <p:cNvGrpSpPr/>
+        <p:nvPr/>
+      </p:nvGrpSpPr>
+      <p:grpSpPr>
+        <a:xfrm>
+          <a:off x="0" y="0"/>
+          <a:ext cx="0" cy="0"/>
+          <a:chOff x="0" y="0"/>
+          <a:chExt cx="0" cy="0"/>
+        </a:xfrm>
+      </p:grpSpPr>
+      <p:sp>
+        <p:nvSpPr>
+          <p:cNvPr id="2" name="Title 1">
+            <a:extLst>
+              <a:ext uri="{FF2B5EF4-FFF2-40B4-BE49-F238E27FC236}">
+                <a16:creationId xmlns:a16="http://schemas.microsoft.com/office/drawing/2014/main" id="{FAEF834B-146C-2728-A7D1-5153329C6125}"/>
+              </a:ext>
+            </a:extLst>
+          </p:cNvPr>
+          <p:cNvSpPr>
+            <a:spLocks noGrp="1"/>
+          </p:cNvSpPr>
+          <p:nvPr>
+            <p:ph type="title"/>
+          </p:nvPr>
+        </p:nvSpPr>
+        <p:spPr/>
+        <p:txBody>
+          <a:bodyPr/>
+          <a:lstStyle/>
+          <a:p>
+            <a:r>
+              <a:rPr lang="en-US" dirty="0">
+                <a:latin typeface="Times New Roman" panose="02020603050405020304" pitchFamily="18" charset="0"/>
+                <a:cs typeface="Times New Roman" panose="02020603050405020304" pitchFamily="18" charset="0"/>
+              </a:rPr>
+              <a:t>Table of Contents		</a:t>
+            </a:r>
+          </a:p>
+        </p:txBody>
+      </p:sp>
+      <p:sp>
+        <p:nvSpPr>
+          <p:cNvPr id="3" name="Content Placeholder 2">
+            <a:extLst>
+              <a:ext uri="{FF2B5EF4-FFF2-40B4-BE49-F238E27FC236}">
+                <a16:creationId xmlns:a16="http://schemas.microsoft.com/office/drawing/2014/main" id="{007868B3-D138-5BF8-E514-8B63CAB4FF11}"/>
+              </a:ext>
+            </a:extLst>
+          </p:cNvPr>
+          <p:cNvSpPr>
+            <a:spLocks noGrp="1"/>
+          </p:cNvSpPr>
+          <p:nvPr>
+            <p:ph idx="1"/>
+          </p:nvPr>
+        </p:nvSpPr>
+        <p:spPr/>
+        <p:txBody>
+          <a:bodyPr>
+            <a:normAutofit fontScale="92500" lnSpcReduction="20000"/>
+          </a:bodyPr>
+          <a:lstStyle/>
+          <a:p>
+            <a:r>
+              <a:rPr lang="en-US" dirty="0">
+                <a:latin typeface="Times New Roman" panose="02020603050405020304" pitchFamily="18" charset="0"/>
+                <a:cs typeface="Times New Roman" panose="02020603050405020304" pitchFamily="18" charset="0"/>
+              </a:rPr>
+              <a:t>Background of the Study</a:t>
+            </a:r>
+          </a:p>
+          <a:p>
+            <a:r>
+              <a:rPr lang="en-US" dirty="0">
+                <a:latin typeface="Times New Roman" panose="02020603050405020304" pitchFamily="18" charset="0"/>
+                <a:cs typeface="Times New Roman" panose="02020603050405020304" pitchFamily="18" charset="0"/>
+              </a:rPr>
+              <a:t>Statement of the Problem	</a:t>
+            </a:r>
+          </a:p>
+          <a:p>
+            <a:r>
+              <a:rPr lang="en-US" dirty="0">
+                <a:latin typeface="Times New Roman" panose="02020603050405020304" pitchFamily="18" charset="0"/>
+                <a:cs typeface="Times New Roman" panose="02020603050405020304" pitchFamily="18" charset="0"/>
+              </a:rPr>
+              <a:t>Aim of the Study</a:t>
+            </a:r>
+          </a:p>
+          <a:p>
+            <a:r>
+              <a:rPr lang="en-US" dirty="0">
+                <a:latin typeface="Times New Roman" panose="02020603050405020304" pitchFamily="18" charset="0"/>
+                <a:cs typeface="Times New Roman" panose="02020603050405020304" pitchFamily="18" charset="0"/>
+              </a:rPr>
+              <a:t>Objectives</a:t>
+            </a:r>
+          </a:p>
+          <a:p>
+            <a:r>
+              <a:rPr lang="en-US" dirty="0">
+                <a:latin typeface="Times New Roman" panose="02020603050405020304" pitchFamily="18" charset="0"/>
+                <a:cs typeface="Times New Roman" panose="02020603050405020304" pitchFamily="18" charset="0"/>
+              </a:rPr>
+              <a:t>Significance of the study	</a:t>
+            </a:r>
+          </a:p>
+          <a:p>
+            <a:r>
+              <a:rPr lang="en-US" dirty="0">
+                <a:latin typeface="Times New Roman" panose="02020603050405020304" pitchFamily="18" charset="0"/>
+                <a:cs typeface="Times New Roman" panose="02020603050405020304" pitchFamily="18" charset="0"/>
+              </a:rPr>
+              <a:t>Advantages</a:t>
+            </a:r>
+          </a:p>
+          <a:p>
+            <a:r>
+              <a:rPr lang="en-US" dirty="0">
+                <a:latin typeface="Times New Roman" panose="02020603050405020304" pitchFamily="18" charset="0"/>
+                <a:cs typeface="Times New Roman" panose="02020603050405020304" pitchFamily="18" charset="0"/>
+              </a:rPr>
+              <a:t>Scope of the study</a:t>
+            </a:r>
+          </a:p>
+          <a:p>
+            <a:r>
+              <a:rPr lang="en-US" dirty="0">
+                <a:latin typeface="Times New Roman" panose="02020603050405020304" pitchFamily="18" charset="0"/>
+                <a:cs typeface="Times New Roman" panose="02020603050405020304" pitchFamily="18" charset="0"/>
+              </a:rPr>
+              <a:t>Literature Review		</a:t>
+            </a:r>
+          </a:p>
+        </p:txBody>
+      </p:sp>
+    </p:spTree>
+    <p:extLst>
+      <p:ext uri="{BB962C8B-B14F-4D97-AF65-F5344CB8AC3E}">
+        <p14:creationId xmlns:p14="http://schemas.microsoft.com/office/powerpoint/2010/main" val="2921905385"/>
+      </p:ext>
+    </p:extLst>
+  </p:cSld>
+  <p:clrMapOvr>
+    <a:masterClrMapping/>
+  </p:clrMapOvr>
+</p:sld>
+</file>
+
+<file path=ppt/slides/slide20.xml><?xml version="1.0" encoding="utf-8"?>
 <p:sld xmlns:a="http://schemas.openxmlformats.org/drawingml/2006/main" xmlns:r="http://schemas.openxmlformats.org/officeDocument/2006/relationships" xmlns:p="http://schemas.openxmlformats.org/presentationml/2006/main">
   <p:cSld>
     <p:spTree>
@@ -7484,329 +7682,6 @@
 </p:sld>
 </file>
 
-<file path=ppt/slides/slide2.xml><?xml version="1.0" encoding="utf-8"?>
-<p:sld xmlns:a="http://schemas.openxmlformats.org/drawingml/2006/main" xmlns:r="http://schemas.openxmlformats.org/officeDocument/2006/relationships" xmlns:p="http://schemas.openxmlformats.org/presentationml/2006/main">
-  <p:cSld>
-    <p:spTree>
-      <p:nvGrpSpPr>
-        <p:cNvPr id="1" name=""/>
-        <p:cNvGrpSpPr/>
-        <p:nvPr/>
-      </p:nvGrpSpPr>
-      <p:grpSpPr>
-        <a:xfrm>
-          <a:off x="0" y="0"/>
-          <a:ext cx="0" cy="0"/>
-          <a:chOff x="0" y="0"/>
-          <a:chExt cx="0" cy="0"/>
-        </a:xfrm>
-      </p:grpSpPr>
-      <p:sp>
-        <p:nvSpPr>
-          <p:cNvPr id="2" name="Title 1">
-            <a:extLst>
-              <a:ext uri="{FF2B5EF4-FFF2-40B4-BE49-F238E27FC236}">
-                <a16:creationId xmlns:a16="http://schemas.microsoft.com/office/drawing/2014/main" id="{FAEF834B-146C-2728-A7D1-5153329C6125}"/>
-              </a:ext>
-            </a:extLst>
-          </p:cNvPr>
-          <p:cNvSpPr>
-            <a:spLocks noGrp="1"/>
-          </p:cNvSpPr>
-          <p:nvPr>
-            <p:ph type="title"/>
-          </p:nvPr>
-        </p:nvSpPr>
-        <p:spPr/>
-        <p:txBody>
-          <a:bodyPr/>
-          <a:lstStyle/>
-          <a:p>
-            <a:r>
-              <a:rPr lang="en-US" dirty="0">
-                <a:latin typeface="Times New Roman" panose="02020603050405020304" pitchFamily="18" charset="0"/>
-                <a:cs typeface="Times New Roman" panose="02020603050405020304" pitchFamily="18" charset="0"/>
-              </a:rPr>
-              <a:t>Table of Contents		</a:t>
-            </a:r>
-          </a:p>
-        </p:txBody>
-      </p:sp>
-      <p:sp>
-        <p:nvSpPr>
-          <p:cNvPr id="3" name="Content Placeholder 2">
-            <a:extLst>
-              <a:ext uri="{FF2B5EF4-FFF2-40B4-BE49-F238E27FC236}">
-                <a16:creationId xmlns:a16="http://schemas.microsoft.com/office/drawing/2014/main" id="{007868B3-D138-5BF8-E514-8B63CAB4FF11}"/>
-              </a:ext>
-            </a:extLst>
-          </p:cNvPr>
-          <p:cNvSpPr>
-            <a:spLocks noGrp="1"/>
-          </p:cNvSpPr>
-          <p:nvPr>
-            <p:ph idx="1"/>
-          </p:nvPr>
-        </p:nvSpPr>
-        <p:spPr/>
-        <p:txBody>
-          <a:bodyPr>
-            <a:normAutofit lnSpcReduction="10000"/>
-          </a:bodyPr>
-          <a:lstStyle/>
-          <a:p>
-            <a:r>
-              <a:rPr lang="en-US" dirty="0">
-                <a:latin typeface="Times New Roman" panose="02020603050405020304" pitchFamily="18" charset="0"/>
-                <a:cs typeface="Times New Roman" panose="02020603050405020304" pitchFamily="18" charset="0"/>
-              </a:rPr>
-              <a:t>Background of the Study</a:t>
-            </a:r>
-          </a:p>
-          <a:p>
-            <a:r>
-              <a:rPr lang="en-US" dirty="0">
-                <a:latin typeface="Times New Roman" panose="02020603050405020304" pitchFamily="18" charset="0"/>
-                <a:cs typeface="Times New Roman" panose="02020603050405020304" pitchFamily="18" charset="0"/>
-              </a:rPr>
-              <a:t>Statement of the Problem	</a:t>
-            </a:r>
-          </a:p>
-          <a:p>
-            <a:r>
-              <a:rPr lang="en-US" dirty="0">
-                <a:latin typeface="Times New Roman" panose="02020603050405020304" pitchFamily="18" charset="0"/>
-                <a:cs typeface="Times New Roman" panose="02020603050405020304" pitchFamily="18" charset="0"/>
-              </a:rPr>
-              <a:t>Aim and Objectives</a:t>
-            </a:r>
-          </a:p>
-          <a:p>
-            <a:r>
-              <a:rPr lang="en-US" dirty="0">
-                <a:latin typeface="Times New Roman" panose="02020603050405020304" pitchFamily="18" charset="0"/>
-                <a:cs typeface="Times New Roman" panose="02020603050405020304" pitchFamily="18" charset="0"/>
-              </a:rPr>
-              <a:t>Significance of the study	</a:t>
-            </a:r>
-          </a:p>
-          <a:p>
-            <a:r>
-              <a:rPr lang="en-US" dirty="0">
-                <a:latin typeface="Times New Roman" panose="02020603050405020304" pitchFamily="18" charset="0"/>
-                <a:cs typeface="Times New Roman" panose="02020603050405020304" pitchFamily="18" charset="0"/>
-              </a:rPr>
-              <a:t>Advantages</a:t>
-            </a:r>
-          </a:p>
-          <a:p>
-            <a:r>
-              <a:rPr lang="en-US" dirty="0">
-                <a:latin typeface="Times New Roman" panose="02020603050405020304" pitchFamily="18" charset="0"/>
-                <a:cs typeface="Times New Roman" panose="02020603050405020304" pitchFamily="18" charset="0"/>
-              </a:rPr>
-              <a:t>Scope of the study</a:t>
-            </a:r>
-          </a:p>
-          <a:p>
-            <a:r>
-              <a:rPr lang="en-US" dirty="0">
-                <a:latin typeface="Times New Roman" panose="02020603050405020304" pitchFamily="18" charset="0"/>
-                <a:cs typeface="Times New Roman" panose="02020603050405020304" pitchFamily="18" charset="0"/>
-              </a:rPr>
-              <a:t>Literature Review				</a:t>
-            </a:r>
-          </a:p>
-        </p:txBody>
-      </p:sp>
-    </p:spTree>
-    <p:extLst>
-      <p:ext uri="{BB962C8B-B14F-4D97-AF65-F5344CB8AC3E}">
-        <p14:creationId xmlns:p14="http://schemas.microsoft.com/office/powerpoint/2010/main" val="2921905385"/>
-      </p:ext>
-    </p:extLst>
-  </p:cSld>
-  <p:clrMapOvr>
-    <a:masterClrMapping/>
-  </p:clrMapOvr>
-</p:sld>
-</file>
-
-<file path=ppt/slides/slide20.xml><?xml version="1.0" encoding="utf-8"?>
-<p:sld xmlns:a="http://schemas.openxmlformats.org/drawingml/2006/main" xmlns:r="http://schemas.openxmlformats.org/officeDocument/2006/relationships" xmlns:p="http://schemas.openxmlformats.org/presentationml/2006/main">
-  <p:cSld>
-    <p:spTree>
-      <p:nvGrpSpPr>
-        <p:cNvPr id="1" name=""/>
-        <p:cNvGrpSpPr/>
-        <p:nvPr/>
-      </p:nvGrpSpPr>
-      <p:grpSpPr>
-        <a:xfrm>
-          <a:off x="0" y="0"/>
-          <a:ext cx="0" cy="0"/>
-          <a:chOff x="0" y="0"/>
-          <a:chExt cx="0" cy="0"/>
-        </a:xfrm>
-      </p:grpSpPr>
-      <p:sp>
-        <p:nvSpPr>
-          <p:cNvPr id="2" name="Title 1">
-            <a:extLst>
-              <a:ext uri="{FF2B5EF4-FFF2-40B4-BE49-F238E27FC236}">
-                <a16:creationId xmlns:a16="http://schemas.microsoft.com/office/drawing/2014/main" id="{0F30EB64-06AA-2A35-A137-AC24B492890C}"/>
-              </a:ext>
-            </a:extLst>
-          </p:cNvPr>
-          <p:cNvSpPr>
-            <a:spLocks noGrp="1"/>
-          </p:cNvSpPr>
-          <p:nvPr>
-            <p:ph type="title"/>
-          </p:nvPr>
-        </p:nvSpPr>
-        <p:spPr/>
-        <p:txBody>
-          <a:bodyPr/>
-          <a:lstStyle/>
-          <a:p>
-            <a:r>
-              <a:rPr lang="en-US" dirty="0">
-                <a:latin typeface="Times New Roman" panose="02020603050405020304" pitchFamily="18" charset="0"/>
-                <a:cs typeface="Times New Roman" panose="02020603050405020304" pitchFamily="18" charset="0"/>
-              </a:rPr>
-              <a:t>Summary</a:t>
-            </a:r>
-          </a:p>
-        </p:txBody>
-      </p:sp>
-      <p:sp>
-        <p:nvSpPr>
-          <p:cNvPr id="3" name="Content Placeholder 2">
-            <a:extLst>
-              <a:ext uri="{FF2B5EF4-FFF2-40B4-BE49-F238E27FC236}">
-                <a16:creationId xmlns:a16="http://schemas.microsoft.com/office/drawing/2014/main" id="{BA62B9DE-891C-6A9B-F1B7-A0426B574468}"/>
-              </a:ext>
-            </a:extLst>
-          </p:cNvPr>
-          <p:cNvSpPr>
-            <a:spLocks noGrp="1"/>
-          </p:cNvSpPr>
-          <p:nvPr>
-            <p:ph idx="1"/>
-          </p:nvPr>
-        </p:nvSpPr>
-        <p:spPr/>
-        <p:txBody>
-          <a:bodyPr>
-            <a:noAutofit/>
-          </a:bodyPr>
-          <a:lstStyle/>
-          <a:p>
-            <a:pPr marL="0" indent="0">
-              <a:buNone/>
-            </a:pPr>
-            <a:r>
-              <a:rPr lang="en-US" sz="1750" b="1" dirty="0">
-                <a:latin typeface="Times New Roman" panose="02020603050405020304" pitchFamily="18" charset="0"/>
-                <a:cs typeface="Times New Roman" panose="02020603050405020304" pitchFamily="18" charset="0"/>
-              </a:rPr>
-              <a:t>Key Features</a:t>
-            </a:r>
-          </a:p>
-          <a:p>
-            <a:r>
-              <a:rPr lang="en-US" sz="1750" dirty="0">
-                <a:latin typeface="Times New Roman" panose="02020603050405020304" pitchFamily="18" charset="0"/>
-                <a:cs typeface="Times New Roman" panose="02020603050405020304" pitchFamily="18" charset="0"/>
-              </a:rPr>
-              <a:t>Automated inventory management </a:t>
-            </a:r>
-          </a:p>
-          <a:p>
-            <a:r>
-              <a:rPr lang="en-US" sz="1750" dirty="0">
-                <a:latin typeface="Times New Roman" panose="02020603050405020304" pitchFamily="18" charset="0"/>
-                <a:cs typeface="Times New Roman" panose="02020603050405020304" pitchFamily="18" charset="0"/>
-              </a:rPr>
-              <a:t>Sales tracking </a:t>
-            </a:r>
-          </a:p>
-          <a:p>
-            <a:r>
-              <a:rPr lang="en-US" sz="1750" dirty="0">
-                <a:latin typeface="Times New Roman" panose="02020603050405020304" pitchFamily="18" charset="0"/>
-                <a:cs typeface="Times New Roman" panose="02020603050405020304" pitchFamily="18" charset="0"/>
-              </a:rPr>
-              <a:t>Profit computation </a:t>
-            </a:r>
-          </a:p>
-          <a:p>
-            <a:r>
-              <a:rPr lang="en-US" sz="1750" dirty="0">
-                <a:latin typeface="Times New Roman" panose="02020603050405020304" pitchFamily="18" charset="0"/>
-                <a:cs typeface="Times New Roman" panose="02020603050405020304" pitchFamily="18" charset="0"/>
-              </a:rPr>
-              <a:t>Income analysis </a:t>
-            </a:r>
-          </a:p>
-          <a:p>
-            <a:r>
-              <a:rPr lang="en-US" sz="1750" dirty="0">
-                <a:latin typeface="Times New Roman" panose="02020603050405020304" pitchFamily="18" charset="0"/>
-                <a:cs typeface="Times New Roman" panose="02020603050405020304" pitchFamily="18" charset="0"/>
-              </a:rPr>
-              <a:t>Low-stock alerts </a:t>
-            </a:r>
-          </a:p>
-          <a:p>
-            <a:r>
-              <a:rPr lang="en-US" sz="1750" dirty="0">
-                <a:latin typeface="Times New Roman" panose="02020603050405020304" pitchFamily="18" charset="0"/>
-                <a:cs typeface="Times New Roman" panose="02020603050405020304" pitchFamily="18" charset="0"/>
-              </a:rPr>
-              <a:t>Business dashboard </a:t>
-            </a:r>
-          </a:p>
-          <a:p>
-            <a:r>
-              <a:rPr lang="en-US" sz="1750" dirty="0">
-                <a:latin typeface="Times New Roman" panose="02020603050405020304" pitchFamily="18" charset="0"/>
-                <a:cs typeface="Times New Roman" panose="02020603050405020304" pitchFamily="18" charset="0"/>
-              </a:rPr>
-              <a:t>Data visualization </a:t>
-            </a:r>
-          </a:p>
-          <a:p>
-            <a:r>
-              <a:rPr lang="en-US" sz="1750" dirty="0">
-                <a:latin typeface="Times New Roman" panose="02020603050405020304" pitchFamily="18" charset="0"/>
-                <a:cs typeface="Times New Roman" panose="02020603050405020304" pitchFamily="18" charset="0"/>
-              </a:rPr>
-              <a:t>Real-time reporting</a:t>
-            </a:r>
-          </a:p>
-          <a:p>
-            <a:endParaRPr lang="en-US" sz="1750" dirty="0">
-              <a:latin typeface="Times New Roman" panose="02020603050405020304" pitchFamily="18" charset="0"/>
-              <a:cs typeface="Times New Roman" panose="02020603050405020304" pitchFamily="18" charset="0"/>
-            </a:endParaRPr>
-          </a:p>
-        </p:txBody>
-      </p:sp>
-    </p:spTree>
-    <p:extLst>
-      <p:ext uri="{BB962C8B-B14F-4D97-AF65-F5344CB8AC3E}">
-        <p14:creationId xmlns:p14="http://schemas.microsoft.com/office/powerpoint/2010/main" val="1510451051"/>
-      </p:ext>
-    </p:extLst>
-  </p:cSld>
-  <p:clrMapOvr>
-    <a:masterClrMapping/>
-  </p:clrMapOvr>
-</p:sld>
-</file>
-
 <file path=ppt/slides/slide21.xml><?xml version="1.0" encoding="utf-8"?>
 <p:sld xmlns:a="http://schemas.openxmlformats.org/drawingml/2006/main" xmlns:r="http://schemas.openxmlformats.org/officeDocument/2006/relationships" xmlns:p="http://schemas.openxmlformats.org/presentationml/2006/main">
   <p:cSld>
@@ -7829,7 +7704,7 @@
           <p:cNvPr id="2" name="Title 1">
             <a:extLst>
               <a:ext uri="{FF2B5EF4-FFF2-40B4-BE49-F238E27FC236}">
-                <a16:creationId xmlns:a16="http://schemas.microsoft.com/office/drawing/2014/main" id="{4F91714A-6597-8482-D38E-A1C2037A20A4}"/>
+                <a16:creationId xmlns:a16="http://schemas.microsoft.com/office/drawing/2014/main" id="{0F30EB64-06AA-2A35-A137-AC24B492890C}"/>
               </a:ext>
             </a:extLst>
           </p:cNvPr>
@@ -7842,17 +7717,15 @@
         </p:nvSpPr>
         <p:spPr/>
         <p:txBody>
-          <a:bodyPr>
-            <a:normAutofit/>
-          </a:bodyPr>
-          <a:lstStyle/>
-          <a:p>
-            <a:r>
-              <a:rPr lang="en-US" dirty="0">
-                <a:latin typeface="Times New Roman" panose="02020603050405020304" pitchFamily="18" charset="0"/>
-                <a:cs typeface="Times New Roman" panose="02020603050405020304" pitchFamily="18" charset="0"/>
-              </a:rPr>
-              <a:t>Conclusion</a:t>
+          <a:bodyPr/>
+          <a:lstStyle/>
+          <a:p>
+            <a:r>
+              <a:rPr lang="en-US" dirty="0">
+                <a:latin typeface="Times New Roman" panose="02020603050405020304" pitchFamily="18" charset="0"/>
+                <a:cs typeface="Times New Roman" panose="02020603050405020304" pitchFamily="18" charset="0"/>
+              </a:rPr>
+              <a:t>Summary</a:t>
             </a:r>
           </a:p>
         </p:txBody>
@@ -7862,7 +7735,7 @@
           <p:cNvPr id="3" name="Content Placeholder 2">
             <a:extLst>
               <a:ext uri="{FF2B5EF4-FFF2-40B4-BE49-F238E27FC236}">
-                <a16:creationId xmlns:a16="http://schemas.microsoft.com/office/drawing/2014/main" id="{055F38D2-926A-8E51-B450-BDBB8F72C531}"/>
+                <a16:creationId xmlns:a16="http://schemas.microsoft.com/office/drawing/2014/main" id="{BA62B9DE-891C-6A9B-F1B7-A0426B574468}"/>
               </a:ext>
             </a:extLst>
           </p:cNvPr>
@@ -7875,28 +7748,96 @@
         </p:nvSpPr>
         <p:spPr/>
         <p:txBody>
-          <a:bodyPr/>
-          <a:lstStyle/>
-          <a:p>
-            <a:r>
-              <a:rPr lang="en-US" dirty="0">
-                <a:latin typeface="Times New Roman" panose="02020603050405020304" pitchFamily="18" charset="0"/>
-                <a:cs typeface="Times New Roman" panose="02020603050405020304" pitchFamily="18" charset="0"/>
-              </a:rPr>
-              <a:t>The system successfully automates inventory operations by integrating stock management, sales analysis, financial computation, and visualization into a single platform.</a:t>
-            </a:r>
-          </a:p>
-          <a:p>
-            <a:r>
-              <a:rPr lang="en-US" dirty="0">
-                <a:latin typeface="Times New Roman" panose="02020603050405020304" pitchFamily="18" charset="0"/>
-                <a:cs typeface="Times New Roman" panose="02020603050405020304" pitchFamily="18" charset="0"/>
-              </a:rPr>
-              <a:t>The system enhances efficiency, minimizes human errors, supports timely inventory replenishment, and provides real-time insights for better business decisions.</a:t>
-            </a:r>
-          </a:p>
-          <a:p>
-            <a:endParaRPr lang="en-US" dirty="0">
+          <a:bodyPr>
+            <a:noAutofit/>
+          </a:bodyPr>
+          <a:lstStyle/>
+          <a:p>
+            <a:pPr marL="0" indent="0">
+              <a:buNone/>
+            </a:pPr>
+            <a:r>
+              <a:rPr lang="en-US" sz="1750" b="1" dirty="0">
+                <a:latin typeface="Times New Roman" panose="02020603050405020304" pitchFamily="18" charset="0"/>
+                <a:cs typeface="Times New Roman" panose="02020603050405020304" pitchFamily="18" charset="0"/>
+              </a:rPr>
+              <a:t>Key Features</a:t>
+            </a:r>
+          </a:p>
+          <a:p>
+            <a:r>
+              <a:rPr lang="en-US" sz="1750" dirty="0">
+                <a:latin typeface="Times New Roman" panose="02020603050405020304" pitchFamily="18" charset="0"/>
+                <a:cs typeface="Times New Roman" panose="02020603050405020304" pitchFamily="18" charset="0"/>
+              </a:rPr>
+              <a:t>Automated inventory management </a:t>
+            </a:r>
+          </a:p>
+          <a:p>
+            <a:r>
+              <a:rPr lang="en-US" sz="1750" dirty="0">
+                <a:latin typeface="Times New Roman" panose="02020603050405020304" pitchFamily="18" charset="0"/>
+                <a:cs typeface="Times New Roman" panose="02020603050405020304" pitchFamily="18" charset="0"/>
+              </a:rPr>
+              <a:t>Sales tracking </a:t>
+            </a:r>
+          </a:p>
+          <a:p>
+            <a:r>
+              <a:rPr lang="en-US" sz="1750" dirty="0">
+                <a:latin typeface="Times New Roman" panose="02020603050405020304" pitchFamily="18" charset="0"/>
+                <a:cs typeface="Times New Roman" panose="02020603050405020304" pitchFamily="18" charset="0"/>
+              </a:rPr>
+              <a:t>Profit computation </a:t>
+            </a:r>
+          </a:p>
+          <a:p>
+            <a:r>
+              <a:rPr lang="en-US" sz="1750" dirty="0">
+                <a:latin typeface="Times New Roman" panose="02020603050405020304" pitchFamily="18" charset="0"/>
+                <a:cs typeface="Times New Roman" panose="02020603050405020304" pitchFamily="18" charset="0"/>
+              </a:rPr>
+              <a:t>Income analysis </a:t>
+            </a:r>
+          </a:p>
+          <a:p>
+            <a:r>
+              <a:rPr lang="en-US" sz="1750" dirty="0">
+                <a:latin typeface="Times New Roman" panose="02020603050405020304" pitchFamily="18" charset="0"/>
+                <a:cs typeface="Times New Roman" panose="02020603050405020304" pitchFamily="18" charset="0"/>
+              </a:rPr>
+              <a:t>Low-stock alerts </a:t>
+            </a:r>
+          </a:p>
+          <a:p>
+            <a:r>
+              <a:rPr lang="en-US" sz="1750" dirty="0">
+                <a:latin typeface="Times New Roman" panose="02020603050405020304" pitchFamily="18" charset="0"/>
+                <a:cs typeface="Times New Roman" panose="02020603050405020304" pitchFamily="18" charset="0"/>
+              </a:rPr>
+              <a:t>Business dashboard </a:t>
+            </a:r>
+          </a:p>
+          <a:p>
+            <a:r>
+              <a:rPr lang="en-US" sz="1750" dirty="0">
+                <a:latin typeface="Times New Roman" panose="02020603050405020304" pitchFamily="18" charset="0"/>
+                <a:cs typeface="Times New Roman" panose="02020603050405020304" pitchFamily="18" charset="0"/>
+              </a:rPr>
+              <a:t>Data visualization </a:t>
+            </a:r>
+          </a:p>
+          <a:p>
+            <a:r>
+              <a:rPr lang="en-US" sz="1750" dirty="0">
+                <a:latin typeface="Times New Roman" panose="02020603050405020304" pitchFamily="18" charset="0"/>
+                <a:cs typeface="Times New Roman" panose="02020603050405020304" pitchFamily="18" charset="0"/>
+              </a:rPr>
+              <a:t>Real-time reporting</a:t>
+            </a:r>
+          </a:p>
+          <a:p>
+            <a:endParaRPr lang="en-US" sz="1750" dirty="0">
               <a:latin typeface="Times New Roman" panose="02020603050405020304" pitchFamily="18" charset="0"/>
               <a:cs typeface="Times New Roman" panose="02020603050405020304" pitchFamily="18" charset="0"/>
             </a:endParaRPr>
@@ -7906,7 +7847,7 @@
     </p:spTree>
     <p:extLst>
       <p:ext uri="{BB962C8B-B14F-4D97-AF65-F5344CB8AC3E}">
-        <p14:creationId xmlns:p14="http://schemas.microsoft.com/office/powerpoint/2010/main" val="520599717"/>
+        <p14:creationId xmlns:p14="http://schemas.microsoft.com/office/powerpoint/2010/main" val="1510451051"/>
       </p:ext>
     </p:extLst>
   </p:cSld>
@@ -7938,7 +7879,7 @@
           <p:cNvPr id="2" name="Title 1">
             <a:extLst>
               <a:ext uri="{FF2B5EF4-FFF2-40B4-BE49-F238E27FC236}">
-                <a16:creationId xmlns:a16="http://schemas.microsoft.com/office/drawing/2014/main" id="{66EA689D-10D7-AA02-3F16-1689E3F35EFF}"/>
+                <a16:creationId xmlns:a16="http://schemas.microsoft.com/office/drawing/2014/main" id="{EB5152E1-145B-72A9-767B-677C7D419B36}"/>
               </a:ext>
             </a:extLst>
           </p:cNvPr>
@@ -7959,7 +7900,7 @@
                 <a:latin typeface="Times New Roman" panose="02020603050405020304" pitchFamily="18" charset="0"/>
                 <a:cs typeface="Times New Roman" panose="02020603050405020304" pitchFamily="18" charset="0"/>
               </a:rPr>
-              <a:t>Recommendations</a:t>
+              <a:t>Advantages</a:t>
             </a:r>
           </a:p>
         </p:txBody>
@@ -7969,7 +7910,7 @@
           <p:cNvPr id="3" name="Content Placeholder 2">
             <a:extLst>
               <a:ext uri="{FF2B5EF4-FFF2-40B4-BE49-F238E27FC236}">
-                <a16:creationId xmlns:a16="http://schemas.microsoft.com/office/drawing/2014/main" id="{788E01B0-9F77-C630-FBE7-A936675D3735}"/>
+                <a16:creationId xmlns:a16="http://schemas.microsoft.com/office/drawing/2014/main" id="{1901124D-366F-F799-FEF5-36478DA067AF}"/>
               </a:ext>
             </a:extLst>
           </p:cNvPr>
@@ -7983,7 +7924,7 @@
         <p:spPr/>
         <p:txBody>
           <a:bodyPr>
-            <a:normAutofit fontScale="92500" lnSpcReduction="20000"/>
+            <a:normAutofit lnSpcReduction="10000"/>
           </a:bodyPr>
           <a:lstStyle/>
           <a:p>
@@ -7992,84 +7933,61 @@
                 <a:latin typeface="Times New Roman" panose="02020603050405020304" pitchFamily="18" charset="0"/>
                 <a:cs typeface="Times New Roman" panose="02020603050405020304" pitchFamily="18" charset="0"/>
               </a:rPr>
-              <a:t>Cloud database integration </a:t>
-            </a:r>
-          </a:p>
-          <a:p>
-            <a:r>
-              <a:rPr lang="en-US" dirty="0">
-                <a:latin typeface="Times New Roman" panose="02020603050405020304" pitchFamily="18" charset="0"/>
-                <a:cs typeface="Times New Roman" panose="02020603050405020304" pitchFamily="18" charset="0"/>
-              </a:rPr>
-              <a:t>Barcode scanning QR Code support </a:t>
-            </a:r>
-          </a:p>
-          <a:p>
-            <a:r>
-              <a:rPr lang="en-US" dirty="0">
-                <a:latin typeface="Times New Roman" panose="02020603050405020304" pitchFamily="18" charset="0"/>
-                <a:cs typeface="Times New Roman" panose="02020603050405020304" pitchFamily="18" charset="0"/>
-              </a:rPr>
-              <a:t>Web-based deployment </a:t>
-            </a:r>
-          </a:p>
-          <a:p>
-            <a:r>
-              <a:rPr lang="en-US" dirty="0">
-                <a:latin typeface="Times New Roman" panose="02020603050405020304" pitchFamily="18" charset="0"/>
-                <a:cs typeface="Times New Roman" panose="02020603050405020304" pitchFamily="18" charset="0"/>
-              </a:rPr>
-              <a:t>Mobile application </a:t>
-            </a:r>
-          </a:p>
-          <a:p>
-            <a:r>
-              <a:rPr lang="en-US" dirty="0">
-                <a:latin typeface="Times New Roman" panose="02020603050405020304" pitchFamily="18" charset="0"/>
-                <a:cs typeface="Times New Roman" panose="02020603050405020304" pitchFamily="18" charset="0"/>
-              </a:rPr>
-              <a:t>Multi-user authentication </a:t>
-            </a:r>
-          </a:p>
-          <a:p>
-            <a:r>
-              <a:rPr lang="en-US" dirty="0">
-                <a:latin typeface="Times New Roman" panose="02020603050405020304" pitchFamily="18" charset="0"/>
-                <a:cs typeface="Times New Roman" panose="02020603050405020304" pitchFamily="18" charset="0"/>
-              </a:rPr>
-              <a:t>AI demand forecasting </a:t>
-            </a:r>
-          </a:p>
-          <a:p>
-            <a:r>
-              <a:rPr lang="en-US" dirty="0">
-                <a:latin typeface="Times New Roman" panose="02020603050405020304" pitchFamily="18" charset="0"/>
-                <a:cs typeface="Times New Roman" panose="02020603050405020304" pitchFamily="18" charset="0"/>
-              </a:rPr>
-              <a:t>Email/SMS inventory alerts </a:t>
-            </a:r>
-          </a:p>
-          <a:p>
-            <a:r>
-              <a:rPr lang="en-US" dirty="0">
-                <a:latin typeface="Times New Roman" panose="02020603050405020304" pitchFamily="18" charset="0"/>
-                <a:cs typeface="Times New Roman" panose="02020603050405020304" pitchFamily="18" charset="0"/>
-              </a:rPr>
-              <a:t>Interactive dashboards (Power BI or </a:t>
-            </a:r>
-            <a:r>
-              <a:rPr lang="en-US" dirty="0" err="1">
-                <a:latin typeface="Times New Roman" panose="02020603050405020304" pitchFamily="18" charset="0"/>
-                <a:cs typeface="Times New Roman" panose="02020603050405020304" pitchFamily="18" charset="0"/>
-              </a:rPr>
-              <a:t>Plotly</a:t>
-            </a:r>
-            <a:r>
-              <a:rPr lang="en-US" dirty="0">
-                <a:latin typeface="Times New Roman" panose="02020603050405020304" pitchFamily="18" charset="0"/>
-                <a:cs typeface="Times New Roman" panose="02020603050405020304" pitchFamily="18" charset="0"/>
-              </a:rPr>
-              <a:t>)</a:t>
+              <a:t>Accurate inventory records </a:t>
+            </a:r>
+          </a:p>
+          <a:p>
+            <a:r>
+              <a:rPr lang="en-US" dirty="0">
+                <a:latin typeface="Times New Roman" panose="02020603050405020304" pitchFamily="18" charset="0"/>
+                <a:cs typeface="Times New Roman" panose="02020603050405020304" pitchFamily="18" charset="0"/>
+              </a:rPr>
+              <a:t>Faster stock monitoring </a:t>
+            </a:r>
+          </a:p>
+          <a:p>
+            <a:r>
+              <a:rPr lang="en-US" dirty="0">
+                <a:latin typeface="Times New Roman" panose="02020603050405020304" pitchFamily="18" charset="0"/>
+                <a:cs typeface="Times New Roman" panose="02020603050405020304" pitchFamily="18" charset="0"/>
+              </a:rPr>
+              <a:t>Reduced paperwork </a:t>
+            </a:r>
+          </a:p>
+          <a:p>
+            <a:r>
+              <a:rPr lang="en-US" dirty="0">
+                <a:latin typeface="Times New Roman" panose="02020603050405020304" pitchFamily="18" charset="0"/>
+                <a:cs typeface="Times New Roman" panose="02020603050405020304" pitchFamily="18" charset="0"/>
+              </a:rPr>
+              <a:t>Improved productivity </a:t>
+            </a:r>
+          </a:p>
+          <a:p>
+            <a:r>
+              <a:rPr lang="en-US" dirty="0">
+                <a:latin typeface="Times New Roman" panose="02020603050405020304" pitchFamily="18" charset="0"/>
+                <a:cs typeface="Times New Roman" panose="02020603050405020304" pitchFamily="18" charset="0"/>
+              </a:rPr>
+              <a:t>Better financial analysis </a:t>
+            </a:r>
+          </a:p>
+          <a:p>
+            <a:r>
+              <a:rPr lang="en-US" dirty="0">
+                <a:latin typeface="Times New Roman" panose="02020603050405020304" pitchFamily="18" charset="0"/>
+                <a:cs typeface="Times New Roman" panose="02020603050405020304" pitchFamily="18" charset="0"/>
+              </a:rPr>
+              <a:t>Easy business monitoring </a:t>
+            </a:r>
+          </a:p>
+          <a:p>
+            <a:r>
+              <a:rPr lang="en-US" dirty="0">
+                <a:latin typeface="Times New Roman" panose="02020603050405020304" pitchFamily="18" charset="0"/>
+                <a:cs typeface="Times New Roman" panose="02020603050405020304" pitchFamily="18" charset="0"/>
+              </a:rPr>
+              <a:t>Informed decision-making  </a:t>
             </a:r>
           </a:p>
         </p:txBody>
@@ -8077,7 +7995,7 @@
     </p:spTree>
     <p:extLst>
       <p:ext uri="{BB962C8B-B14F-4D97-AF65-F5344CB8AC3E}">
-        <p14:creationId xmlns:p14="http://schemas.microsoft.com/office/powerpoint/2010/main" val="1772330607"/>
+        <p14:creationId xmlns:p14="http://schemas.microsoft.com/office/powerpoint/2010/main" val="3793920599"/>
       </p:ext>
     </p:extLst>
   </p:cSld>
@@ -8109,7 +8027,7 @@
           <p:cNvPr id="2" name="Title 1">
             <a:extLst>
               <a:ext uri="{FF2B5EF4-FFF2-40B4-BE49-F238E27FC236}">
-                <a16:creationId xmlns:a16="http://schemas.microsoft.com/office/drawing/2014/main" id="{E0162037-895C-B6D2-5E0E-5C6AF4791A3A}"/>
+                <a16:creationId xmlns:a16="http://schemas.microsoft.com/office/drawing/2014/main" id="{4F91714A-6597-8482-D38E-A1C2037A20A4}"/>
               </a:ext>
             </a:extLst>
           </p:cNvPr>
@@ -8132,7 +8050,7 @@
                 <a:latin typeface="Times New Roman" panose="02020603050405020304" pitchFamily="18" charset="0"/>
                 <a:cs typeface="Times New Roman" panose="02020603050405020304" pitchFamily="18" charset="0"/>
               </a:rPr>
-              <a:t>Contributions to Knowledge</a:t>
+              <a:t>Conclusion</a:t>
             </a:r>
           </a:p>
         </p:txBody>
@@ -8142,7 +8060,7 @@
           <p:cNvPr id="3" name="Content Placeholder 2">
             <a:extLst>
               <a:ext uri="{FF2B5EF4-FFF2-40B4-BE49-F238E27FC236}">
-                <a16:creationId xmlns:a16="http://schemas.microsoft.com/office/drawing/2014/main" id="{9F6C5643-1EC5-0666-170F-BED04968F5EC}"/>
+                <a16:creationId xmlns:a16="http://schemas.microsoft.com/office/drawing/2014/main" id="{055F38D2-926A-8E51-B450-BDBB8F72C531}"/>
               </a:ext>
             </a:extLst>
           </p:cNvPr>
@@ -8163,51 +8081,30 @@
                 <a:latin typeface="Times New Roman" panose="02020603050405020304" pitchFamily="18" charset="0"/>
                 <a:cs typeface="Times New Roman" panose="02020603050405020304" pitchFamily="18" charset="0"/>
               </a:rPr>
-              <a:t>Developing an affordable Python-based inventory solution </a:t>
-            </a:r>
-          </a:p>
-          <a:p>
-            <a:r>
-              <a:rPr lang="en-US" dirty="0">
-                <a:latin typeface="Times New Roman" panose="02020603050405020304" pitchFamily="18" charset="0"/>
-                <a:cs typeface="Times New Roman" panose="02020603050405020304" pitchFamily="18" charset="0"/>
-              </a:rPr>
-              <a:t>Integrating inventory management with business analytics </a:t>
-            </a:r>
-          </a:p>
-          <a:p>
-            <a:r>
-              <a:rPr lang="en-US" dirty="0">
-                <a:latin typeface="Times New Roman" panose="02020603050405020304" pitchFamily="18" charset="0"/>
-                <a:cs typeface="Times New Roman" panose="02020603050405020304" pitchFamily="18" charset="0"/>
-              </a:rPr>
-              <a:t>Providing automated stock alert mechanisms </a:t>
-            </a:r>
-          </a:p>
-          <a:p>
-            <a:r>
-              <a:rPr lang="en-US" dirty="0">
-                <a:latin typeface="Times New Roman" panose="02020603050405020304" pitchFamily="18" charset="0"/>
-                <a:cs typeface="Times New Roman" panose="02020603050405020304" pitchFamily="18" charset="0"/>
-              </a:rPr>
-              <a:t>Combining inventory, sales, income, and profit analysis in one system </a:t>
-            </a:r>
-          </a:p>
-          <a:p>
-            <a:r>
-              <a:rPr lang="en-US" dirty="0">
-                <a:latin typeface="Times New Roman" panose="02020603050405020304" pitchFamily="18" charset="0"/>
-                <a:cs typeface="Times New Roman" panose="02020603050405020304" pitchFamily="18" charset="0"/>
-              </a:rPr>
-              <a:t>Supporting data-driven managerial decision-making</a:t>
-            </a:r>
+              <a:t>The system successfully automates inventory operations by integrating stock management, sales analysis, financial computation, and visualization into a single platform.</a:t>
+            </a:r>
+          </a:p>
+          <a:p>
+            <a:r>
+              <a:rPr lang="en-US" dirty="0">
+                <a:latin typeface="Times New Roman" panose="02020603050405020304" pitchFamily="18" charset="0"/>
+                <a:cs typeface="Times New Roman" panose="02020603050405020304" pitchFamily="18" charset="0"/>
+              </a:rPr>
+              <a:t>The system enhances efficiency, minimizes human errors, supports timely inventory replenishment, and provides real-time insights for better business decisions.</a:t>
+            </a:r>
+          </a:p>
+          <a:p>
+            <a:endParaRPr lang="en-US" dirty="0">
+              <a:latin typeface="Times New Roman" panose="02020603050405020304" pitchFamily="18" charset="0"/>
+              <a:cs typeface="Times New Roman" panose="02020603050405020304" pitchFamily="18" charset="0"/>
+            </a:endParaRPr>
           </a:p>
         </p:txBody>
       </p:sp>
     </p:spTree>
     <p:extLst>
       <p:ext uri="{BB962C8B-B14F-4D97-AF65-F5344CB8AC3E}">
-        <p14:creationId xmlns:p14="http://schemas.microsoft.com/office/powerpoint/2010/main" val="2273587016"/>
+        <p14:creationId xmlns:p14="http://schemas.microsoft.com/office/powerpoint/2010/main" val="520599717"/>
       </p:ext>
     </p:extLst>
   </p:cSld>
@@ -8239,7 +8136,7 @@
           <p:cNvPr id="2" name="Title 1">
             <a:extLst>
               <a:ext uri="{FF2B5EF4-FFF2-40B4-BE49-F238E27FC236}">
-                <a16:creationId xmlns:a16="http://schemas.microsoft.com/office/drawing/2014/main" id="{0D0E80DB-A7B6-7D03-F76A-EA85EE1DF459}"/>
+                <a16:creationId xmlns:a16="http://schemas.microsoft.com/office/drawing/2014/main" id="{66EA689D-10D7-AA02-3F16-1689E3F35EFF}"/>
               </a:ext>
             </a:extLst>
           </p:cNvPr>
@@ -8260,7 +8157,7 @@
                 <a:latin typeface="Times New Roman" panose="02020603050405020304" pitchFamily="18" charset="0"/>
                 <a:cs typeface="Times New Roman" panose="02020603050405020304" pitchFamily="18" charset="0"/>
               </a:rPr>
-              <a:t>References</a:t>
+              <a:t>Recommendations</a:t>
             </a:r>
           </a:p>
         </p:txBody>
@@ -8270,7 +8167,7 @@
           <p:cNvPr id="3" name="Content Placeholder 2">
             <a:extLst>
               <a:ext uri="{FF2B5EF4-FFF2-40B4-BE49-F238E27FC236}">
-                <a16:creationId xmlns:a16="http://schemas.microsoft.com/office/drawing/2014/main" id="{857A4CA8-8258-5F28-0E9C-ADD0F6D499C1}"/>
+                <a16:creationId xmlns:a16="http://schemas.microsoft.com/office/drawing/2014/main" id="{788E01B0-9F77-C630-FBE7-A936675D3735}"/>
               </a:ext>
             </a:extLst>
           </p:cNvPr>
@@ -8284,7 +8181,7 @@
         <p:spPr/>
         <p:txBody>
           <a:bodyPr>
-            <a:normAutofit fontScale="85000" lnSpcReduction="20000"/>
+            <a:normAutofit fontScale="77500" lnSpcReduction="20000"/>
           </a:bodyPr>
           <a:lstStyle/>
           <a:p>
@@ -8293,150 +8190,101 @@
                 <a:latin typeface="Times New Roman" panose="02020603050405020304" pitchFamily="18" charset="0"/>
                 <a:cs typeface="Times New Roman" panose="02020603050405020304" pitchFamily="18" charset="0"/>
               </a:rPr>
-              <a:t>Chopra, S., &amp; Meindl, P. (2019). </a:t>
-            </a:r>
-            <a:r>
-              <a:rPr lang="en-US" i="1" dirty="0">
-                <a:latin typeface="Times New Roman" panose="02020603050405020304" pitchFamily="18" charset="0"/>
-                <a:cs typeface="Times New Roman" panose="02020603050405020304" pitchFamily="18" charset="0"/>
-              </a:rPr>
-              <a:t>Supply Chain Management: Strategy, Planning, and Operation</a:t>
-            </a:r>
-            <a:r>
-              <a:rPr lang="en-US" dirty="0">
-                <a:latin typeface="Times New Roman" panose="02020603050405020304" pitchFamily="18" charset="0"/>
-                <a:cs typeface="Times New Roman" panose="02020603050405020304" pitchFamily="18" charset="0"/>
-              </a:rPr>
-              <a:t> (7th ed.). Pearson.</a:t>
-            </a:r>
-          </a:p>
-          <a:p>
-            <a:r>
-              <a:rPr lang="en-US" dirty="0">
-                <a:latin typeface="Times New Roman" panose="02020603050405020304" pitchFamily="18" charset="0"/>
-                <a:cs typeface="Times New Roman" panose="02020603050405020304" pitchFamily="18" charset="0"/>
-              </a:rPr>
-              <a:t>Heizer, J., Render, B., &amp; Munson, C. (2020). </a:t>
-            </a:r>
-            <a:r>
-              <a:rPr lang="en-US" i="1" dirty="0">
-                <a:latin typeface="Times New Roman" panose="02020603050405020304" pitchFamily="18" charset="0"/>
-                <a:cs typeface="Times New Roman" panose="02020603050405020304" pitchFamily="18" charset="0"/>
-              </a:rPr>
-              <a:t>Operations Management</a:t>
-            </a:r>
-            <a:r>
-              <a:rPr lang="en-US" dirty="0">
-                <a:latin typeface="Times New Roman" panose="02020603050405020304" pitchFamily="18" charset="0"/>
-                <a:cs typeface="Times New Roman" panose="02020603050405020304" pitchFamily="18" charset="0"/>
-              </a:rPr>
-              <a:t> (13th ed.). Pearson.</a:t>
-            </a:r>
-          </a:p>
-          <a:p>
-            <a:r>
-              <a:rPr lang="en-US" dirty="0">
-                <a:latin typeface="Times New Roman" panose="02020603050405020304" pitchFamily="18" charset="0"/>
-                <a:cs typeface="Times New Roman" panose="02020603050405020304" pitchFamily="18" charset="0"/>
-              </a:rPr>
-              <a:t>McKinney, W. (2022). </a:t>
-            </a:r>
-            <a:r>
-              <a:rPr lang="en-US" i="1" dirty="0">
-                <a:latin typeface="Times New Roman" panose="02020603050405020304" pitchFamily="18" charset="0"/>
-                <a:cs typeface="Times New Roman" panose="02020603050405020304" pitchFamily="18" charset="0"/>
-              </a:rPr>
-              <a:t>Python for Data Analysis</a:t>
-            </a:r>
-            <a:r>
-              <a:rPr lang="en-US" dirty="0">
-                <a:latin typeface="Times New Roman" panose="02020603050405020304" pitchFamily="18" charset="0"/>
-                <a:cs typeface="Times New Roman" panose="02020603050405020304" pitchFamily="18" charset="0"/>
-              </a:rPr>
-              <a:t> (3rd ed.). O'Reilly Media.</a:t>
-            </a:r>
-          </a:p>
-          <a:p>
-            <a:r>
-              <a:rPr lang="en-US" dirty="0">
-                <a:latin typeface="Times New Roman" panose="02020603050405020304" pitchFamily="18" charset="0"/>
-                <a:cs typeface="Times New Roman" panose="02020603050405020304" pitchFamily="18" charset="0"/>
-              </a:rPr>
-              <a:t>Wes McKinney. (2022). </a:t>
-            </a:r>
-            <a:r>
-              <a:rPr lang="en-US" i="1" dirty="0">
-                <a:latin typeface="Times New Roman" panose="02020603050405020304" pitchFamily="18" charset="0"/>
-                <a:cs typeface="Times New Roman" panose="02020603050405020304" pitchFamily="18" charset="0"/>
-              </a:rPr>
-              <a:t>Python for Data Analysis</a:t>
-            </a:r>
-            <a:r>
-              <a:rPr lang="en-US" dirty="0">
-                <a:latin typeface="Times New Roman" panose="02020603050405020304" pitchFamily="18" charset="0"/>
-                <a:cs typeface="Times New Roman" panose="02020603050405020304" pitchFamily="18" charset="0"/>
-              </a:rPr>
-              <a:t>. O'Reilly.</a:t>
-            </a:r>
-          </a:p>
-          <a:p>
-            <a:r>
-              <a:rPr lang="en-US" dirty="0">
-                <a:latin typeface="Times New Roman" panose="02020603050405020304" pitchFamily="18" charset="0"/>
-                <a:cs typeface="Times New Roman" panose="02020603050405020304" pitchFamily="18" charset="0"/>
-              </a:rPr>
-              <a:t>Van Rossum, G., &amp; Drake, F. L. (2009). </a:t>
-            </a:r>
-            <a:r>
-              <a:rPr lang="en-US" i="1" dirty="0">
-                <a:latin typeface="Times New Roman" panose="02020603050405020304" pitchFamily="18" charset="0"/>
-                <a:cs typeface="Times New Roman" panose="02020603050405020304" pitchFamily="18" charset="0"/>
-              </a:rPr>
-              <a:t>Python 3 Reference Manual</a:t>
-            </a:r>
-            <a:r>
-              <a:rPr lang="en-US" dirty="0">
-                <a:latin typeface="Times New Roman" panose="02020603050405020304" pitchFamily="18" charset="0"/>
-                <a:cs typeface="Times New Roman" panose="02020603050405020304" pitchFamily="18" charset="0"/>
-              </a:rPr>
-              <a:t>. CreateSpace.</a:t>
-            </a:r>
-          </a:p>
-          <a:p>
-            <a:r>
-              <a:rPr lang="en-US" dirty="0">
-                <a:latin typeface="Times New Roman" panose="02020603050405020304" pitchFamily="18" charset="0"/>
-                <a:cs typeface="Times New Roman" panose="02020603050405020304" pitchFamily="18" charset="0"/>
-              </a:rPr>
-              <a:t>Hunter, J. D. (2007). Matplotlib: A 2D Graphics Environment. </a:t>
-            </a:r>
-            <a:r>
-              <a:rPr lang="en-US" i="1" dirty="0">
-                <a:latin typeface="Times New Roman" panose="02020603050405020304" pitchFamily="18" charset="0"/>
-                <a:cs typeface="Times New Roman" panose="02020603050405020304" pitchFamily="18" charset="0"/>
-              </a:rPr>
-              <a:t>Computing in Science &amp; Engineering, 9</a:t>
-            </a:r>
-            <a:r>
-              <a:rPr lang="en-US" dirty="0">
-                <a:latin typeface="Times New Roman" panose="02020603050405020304" pitchFamily="18" charset="0"/>
-                <a:cs typeface="Times New Roman" panose="02020603050405020304" pitchFamily="18" charset="0"/>
-              </a:rPr>
-              <a:t>(3), 90–95.</a:t>
-            </a:r>
-          </a:p>
-          <a:p>
-            <a:endParaRPr lang="en-US" dirty="0">
-              <a:latin typeface="Times New Roman" panose="02020603050405020304" pitchFamily="18" charset="0"/>
-              <a:cs typeface="Times New Roman" panose="02020603050405020304" pitchFamily="18" charset="0"/>
-            </a:endParaRPr>
+              <a:t>Cloud database integration </a:t>
+            </a:r>
+          </a:p>
+          <a:p>
+            <a:r>
+              <a:rPr lang="en-US" dirty="0">
+                <a:latin typeface="Times New Roman" panose="02020603050405020304" pitchFamily="18" charset="0"/>
+                <a:cs typeface="Times New Roman" panose="02020603050405020304" pitchFamily="18" charset="0"/>
+              </a:rPr>
+              <a:t>Barcode scanning </a:t>
+            </a:r>
+          </a:p>
+          <a:p>
+            <a:r>
+              <a:rPr lang="en-US" dirty="0">
+                <a:latin typeface="Times New Roman" panose="02020603050405020304" pitchFamily="18" charset="0"/>
+                <a:cs typeface="Times New Roman" panose="02020603050405020304" pitchFamily="18" charset="0"/>
+              </a:rPr>
+              <a:t>QR Code support </a:t>
+            </a:r>
+          </a:p>
+          <a:p>
+            <a:r>
+              <a:rPr lang="en-US" dirty="0">
+                <a:latin typeface="Times New Roman" panose="02020603050405020304" pitchFamily="18" charset="0"/>
+                <a:cs typeface="Times New Roman" panose="02020603050405020304" pitchFamily="18" charset="0"/>
+              </a:rPr>
+              <a:t>Web-based deployment </a:t>
+            </a:r>
+          </a:p>
+          <a:p>
+            <a:r>
+              <a:rPr lang="en-US" dirty="0">
+                <a:latin typeface="Times New Roman" panose="02020603050405020304" pitchFamily="18" charset="0"/>
+                <a:cs typeface="Times New Roman" panose="02020603050405020304" pitchFamily="18" charset="0"/>
+              </a:rPr>
+              <a:t>Mobile application </a:t>
+            </a:r>
+          </a:p>
+          <a:p>
+            <a:r>
+              <a:rPr lang="en-US" dirty="0">
+                <a:latin typeface="Times New Roman" panose="02020603050405020304" pitchFamily="18" charset="0"/>
+                <a:cs typeface="Times New Roman" panose="02020603050405020304" pitchFamily="18" charset="0"/>
+              </a:rPr>
+              <a:t>Multi-user authentication </a:t>
+            </a:r>
+          </a:p>
+          <a:p>
+            <a:r>
+              <a:rPr lang="en-US" dirty="0">
+                <a:latin typeface="Times New Roman" panose="02020603050405020304" pitchFamily="18" charset="0"/>
+                <a:cs typeface="Times New Roman" panose="02020603050405020304" pitchFamily="18" charset="0"/>
+              </a:rPr>
+              <a:t>AI demand forecasting </a:t>
+            </a:r>
+          </a:p>
+          <a:p>
+            <a:r>
+              <a:rPr lang="en-US" dirty="0">
+                <a:latin typeface="Times New Roman" panose="02020603050405020304" pitchFamily="18" charset="0"/>
+                <a:cs typeface="Times New Roman" panose="02020603050405020304" pitchFamily="18" charset="0"/>
+              </a:rPr>
+              <a:t>Email/SMS inventory alerts </a:t>
+            </a:r>
+          </a:p>
+          <a:p>
+            <a:r>
+              <a:rPr lang="en-US" dirty="0">
+                <a:latin typeface="Times New Roman" panose="02020603050405020304" pitchFamily="18" charset="0"/>
+                <a:cs typeface="Times New Roman" panose="02020603050405020304" pitchFamily="18" charset="0"/>
+              </a:rPr>
+              <a:t>Interactive dashboards (Power BI or </a:t>
+            </a:r>
+            <a:r>
+              <a:rPr lang="en-US" dirty="0" err="1">
+                <a:latin typeface="Times New Roman" panose="02020603050405020304" pitchFamily="18" charset="0"/>
+                <a:cs typeface="Times New Roman" panose="02020603050405020304" pitchFamily="18" charset="0"/>
+              </a:rPr>
+              <a:t>Plotly</a:t>
+            </a:r>
+            <a:r>
+              <a:rPr lang="en-US" dirty="0">
+                <a:latin typeface="Times New Roman" panose="02020603050405020304" pitchFamily="18" charset="0"/>
+                <a:cs typeface="Times New Roman" panose="02020603050405020304" pitchFamily="18" charset="0"/>
+              </a:rPr>
+              <a:t>)</a:t>
+            </a:r>
           </a:p>
         </p:txBody>
       </p:sp>
     </p:spTree>
     <p:extLst>
       <p:ext uri="{BB962C8B-B14F-4D97-AF65-F5344CB8AC3E}">
-        <p14:creationId xmlns:p14="http://schemas.microsoft.com/office/powerpoint/2010/main" val="4078051552"/>
+        <p14:creationId xmlns:p14="http://schemas.microsoft.com/office/powerpoint/2010/main" val="1772330607"/>
       </p:ext>
     </p:extLst>
   </p:cSld>
@@ -8468,6 +8316,336 @@
           <p:cNvPr id="2" name="Title 1">
             <a:extLst>
               <a:ext uri="{FF2B5EF4-FFF2-40B4-BE49-F238E27FC236}">
+                <a16:creationId xmlns:a16="http://schemas.microsoft.com/office/drawing/2014/main" id="{E0162037-895C-B6D2-5E0E-5C6AF4791A3A}"/>
+              </a:ext>
+            </a:extLst>
+          </p:cNvPr>
+          <p:cNvSpPr>
+            <a:spLocks noGrp="1"/>
+          </p:cNvSpPr>
+          <p:nvPr>
+            <p:ph type="title"/>
+          </p:nvPr>
+        </p:nvSpPr>
+        <p:spPr/>
+        <p:txBody>
+          <a:bodyPr>
+            <a:normAutofit/>
+          </a:bodyPr>
+          <a:lstStyle/>
+          <a:p>
+            <a:r>
+              <a:rPr lang="en-US" dirty="0">
+                <a:latin typeface="Times New Roman" panose="02020603050405020304" pitchFamily="18" charset="0"/>
+                <a:cs typeface="Times New Roman" panose="02020603050405020304" pitchFamily="18" charset="0"/>
+              </a:rPr>
+              <a:t>Contributions to Knowledge</a:t>
+            </a:r>
+          </a:p>
+        </p:txBody>
+      </p:sp>
+      <p:sp>
+        <p:nvSpPr>
+          <p:cNvPr id="3" name="Content Placeholder 2">
+            <a:extLst>
+              <a:ext uri="{FF2B5EF4-FFF2-40B4-BE49-F238E27FC236}">
+                <a16:creationId xmlns:a16="http://schemas.microsoft.com/office/drawing/2014/main" id="{9F6C5643-1EC5-0666-170F-BED04968F5EC}"/>
+              </a:ext>
+            </a:extLst>
+          </p:cNvPr>
+          <p:cNvSpPr>
+            <a:spLocks noGrp="1"/>
+          </p:cNvSpPr>
+          <p:nvPr>
+            <p:ph idx="1"/>
+          </p:nvPr>
+        </p:nvSpPr>
+        <p:spPr/>
+        <p:txBody>
+          <a:bodyPr/>
+          <a:lstStyle/>
+          <a:p>
+            <a:r>
+              <a:rPr lang="en-US" dirty="0">
+                <a:latin typeface="Times New Roman" panose="02020603050405020304" pitchFamily="18" charset="0"/>
+                <a:cs typeface="Times New Roman" panose="02020603050405020304" pitchFamily="18" charset="0"/>
+              </a:rPr>
+              <a:t>Developing an affordable Python-based inventory solution </a:t>
+            </a:r>
+          </a:p>
+          <a:p>
+            <a:r>
+              <a:rPr lang="en-US" dirty="0">
+                <a:latin typeface="Times New Roman" panose="02020603050405020304" pitchFamily="18" charset="0"/>
+                <a:cs typeface="Times New Roman" panose="02020603050405020304" pitchFamily="18" charset="0"/>
+              </a:rPr>
+              <a:t>Integrating inventory management with business analytics </a:t>
+            </a:r>
+          </a:p>
+          <a:p>
+            <a:r>
+              <a:rPr lang="en-US" dirty="0">
+                <a:latin typeface="Times New Roman" panose="02020603050405020304" pitchFamily="18" charset="0"/>
+                <a:cs typeface="Times New Roman" panose="02020603050405020304" pitchFamily="18" charset="0"/>
+              </a:rPr>
+              <a:t>Providing automated stock alert mechanisms </a:t>
+            </a:r>
+          </a:p>
+          <a:p>
+            <a:r>
+              <a:rPr lang="en-US" dirty="0">
+                <a:latin typeface="Times New Roman" panose="02020603050405020304" pitchFamily="18" charset="0"/>
+                <a:cs typeface="Times New Roman" panose="02020603050405020304" pitchFamily="18" charset="0"/>
+              </a:rPr>
+              <a:t>Combining inventory, sales, income, and profit analysis in one system </a:t>
+            </a:r>
+          </a:p>
+          <a:p>
+            <a:r>
+              <a:rPr lang="en-US" dirty="0">
+                <a:latin typeface="Times New Roman" panose="02020603050405020304" pitchFamily="18" charset="0"/>
+                <a:cs typeface="Times New Roman" panose="02020603050405020304" pitchFamily="18" charset="0"/>
+              </a:rPr>
+              <a:t>Supporting data-driven managerial decision-making</a:t>
+            </a:r>
+          </a:p>
+        </p:txBody>
+      </p:sp>
+    </p:spTree>
+    <p:extLst>
+      <p:ext uri="{BB962C8B-B14F-4D97-AF65-F5344CB8AC3E}">
+        <p14:creationId xmlns:p14="http://schemas.microsoft.com/office/powerpoint/2010/main" val="2273587016"/>
+      </p:ext>
+    </p:extLst>
+  </p:cSld>
+  <p:clrMapOvr>
+    <a:masterClrMapping/>
+  </p:clrMapOvr>
+</p:sld>
+</file>
+
+<file path=ppt/slides/slide26.xml><?xml version="1.0" encoding="utf-8"?>
+<p:sld xmlns:a="http://schemas.openxmlformats.org/drawingml/2006/main" xmlns:r="http://schemas.openxmlformats.org/officeDocument/2006/relationships" xmlns:p="http://schemas.openxmlformats.org/presentationml/2006/main">
+  <p:cSld>
+    <p:spTree>
+      <p:nvGrpSpPr>
+        <p:cNvPr id="1" name=""/>
+        <p:cNvGrpSpPr/>
+        <p:nvPr/>
+      </p:nvGrpSpPr>
+      <p:grpSpPr>
+        <a:xfrm>
+          <a:off x="0" y="0"/>
+          <a:ext cx="0" cy="0"/>
+          <a:chOff x="0" y="0"/>
+          <a:chExt cx="0" cy="0"/>
+        </a:xfrm>
+      </p:grpSpPr>
+      <p:sp>
+        <p:nvSpPr>
+          <p:cNvPr id="2" name="Title 1">
+            <a:extLst>
+              <a:ext uri="{FF2B5EF4-FFF2-40B4-BE49-F238E27FC236}">
+                <a16:creationId xmlns:a16="http://schemas.microsoft.com/office/drawing/2014/main" id="{0D0E80DB-A7B6-7D03-F76A-EA85EE1DF459}"/>
+              </a:ext>
+            </a:extLst>
+          </p:cNvPr>
+          <p:cNvSpPr>
+            <a:spLocks noGrp="1"/>
+          </p:cNvSpPr>
+          <p:nvPr>
+            <p:ph type="title"/>
+          </p:nvPr>
+        </p:nvSpPr>
+        <p:spPr/>
+        <p:txBody>
+          <a:bodyPr/>
+          <a:lstStyle/>
+          <a:p>
+            <a:r>
+              <a:rPr lang="en-US" dirty="0">
+                <a:latin typeface="Times New Roman" panose="02020603050405020304" pitchFamily="18" charset="0"/>
+                <a:cs typeface="Times New Roman" panose="02020603050405020304" pitchFamily="18" charset="0"/>
+              </a:rPr>
+              <a:t>References</a:t>
+            </a:r>
+          </a:p>
+        </p:txBody>
+      </p:sp>
+      <p:sp>
+        <p:nvSpPr>
+          <p:cNvPr id="3" name="Content Placeholder 2">
+            <a:extLst>
+              <a:ext uri="{FF2B5EF4-FFF2-40B4-BE49-F238E27FC236}">
+                <a16:creationId xmlns:a16="http://schemas.microsoft.com/office/drawing/2014/main" id="{857A4CA8-8258-5F28-0E9C-ADD0F6D499C1}"/>
+              </a:ext>
+            </a:extLst>
+          </p:cNvPr>
+          <p:cNvSpPr>
+            <a:spLocks noGrp="1"/>
+          </p:cNvSpPr>
+          <p:nvPr>
+            <p:ph idx="1"/>
+          </p:nvPr>
+        </p:nvSpPr>
+        <p:spPr/>
+        <p:txBody>
+          <a:bodyPr>
+            <a:normAutofit fontScale="92500" lnSpcReduction="20000"/>
+          </a:bodyPr>
+          <a:lstStyle/>
+          <a:p>
+            <a:r>
+              <a:rPr lang="en-US" dirty="0">
+                <a:latin typeface="Times New Roman" panose="02020603050405020304" pitchFamily="18" charset="0"/>
+                <a:cs typeface="Times New Roman" panose="02020603050405020304" pitchFamily="18" charset="0"/>
+              </a:rPr>
+              <a:t>Chopra, S., &amp; Meindl, P. (2019). </a:t>
+            </a:r>
+            <a:r>
+              <a:rPr lang="en-US" i="1" dirty="0">
+                <a:latin typeface="Times New Roman" panose="02020603050405020304" pitchFamily="18" charset="0"/>
+                <a:cs typeface="Times New Roman" panose="02020603050405020304" pitchFamily="18" charset="0"/>
+              </a:rPr>
+              <a:t>Supply Chain Management: Strategy, Planning, and Operation</a:t>
+            </a:r>
+            <a:r>
+              <a:rPr lang="en-US" dirty="0">
+                <a:latin typeface="Times New Roman" panose="02020603050405020304" pitchFamily="18" charset="0"/>
+                <a:cs typeface="Times New Roman" panose="02020603050405020304" pitchFamily="18" charset="0"/>
+              </a:rPr>
+              <a:t> (7th ed.). Pearson.</a:t>
+            </a:r>
+          </a:p>
+          <a:p>
+            <a:r>
+              <a:rPr lang="en-US" dirty="0">
+                <a:latin typeface="Times New Roman" panose="02020603050405020304" pitchFamily="18" charset="0"/>
+                <a:cs typeface="Times New Roman" panose="02020603050405020304" pitchFamily="18" charset="0"/>
+              </a:rPr>
+              <a:t>Heizer, J., Render, B., &amp; Munson, C. (2020). </a:t>
+            </a:r>
+            <a:r>
+              <a:rPr lang="en-US" i="1" dirty="0">
+                <a:latin typeface="Times New Roman" panose="02020603050405020304" pitchFamily="18" charset="0"/>
+                <a:cs typeface="Times New Roman" panose="02020603050405020304" pitchFamily="18" charset="0"/>
+              </a:rPr>
+              <a:t>Operations Management</a:t>
+            </a:r>
+            <a:r>
+              <a:rPr lang="en-US" dirty="0">
+                <a:latin typeface="Times New Roman" panose="02020603050405020304" pitchFamily="18" charset="0"/>
+                <a:cs typeface="Times New Roman" panose="02020603050405020304" pitchFamily="18" charset="0"/>
+              </a:rPr>
+              <a:t> (13th ed.). Pearson.</a:t>
+            </a:r>
+          </a:p>
+          <a:p>
+            <a:r>
+              <a:rPr lang="en-US" dirty="0">
+                <a:latin typeface="Times New Roman" panose="02020603050405020304" pitchFamily="18" charset="0"/>
+                <a:cs typeface="Times New Roman" panose="02020603050405020304" pitchFamily="18" charset="0"/>
+              </a:rPr>
+              <a:t>Hunter, J. D. (2007). Matplotlib: A 2D Graphics Environment. </a:t>
+            </a:r>
+            <a:r>
+              <a:rPr lang="en-US" i="1" dirty="0">
+                <a:latin typeface="Times New Roman" panose="02020603050405020304" pitchFamily="18" charset="0"/>
+                <a:cs typeface="Times New Roman" panose="02020603050405020304" pitchFamily="18" charset="0"/>
+              </a:rPr>
+              <a:t>Computing in Science &amp; Engineering, 9</a:t>
+            </a:r>
+            <a:r>
+              <a:rPr lang="en-US" dirty="0">
+                <a:latin typeface="Times New Roman" panose="02020603050405020304" pitchFamily="18" charset="0"/>
+                <a:cs typeface="Times New Roman" panose="02020603050405020304" pitchFamily="18" charset="0"/>
+              </a:rPr>
+              <a:t>(3), 90–95.</a:t>
+            </a:r>
+          </a:p>
+          <a:p>
+            <a:r>
+              <a:rPr lang="en-US" dirty="0">
+                <a:latin typeface="Times New Roman" panose="02020603050405020304" pitchFamily="18" charset="0"/>
+                <a:cs typeface="Times New Roman" panose="02020603050405020304" pitchFamily="18" charset="0"/>
+              </a:rPr>
+              <a:t>McKinney, W. (2022). </a:t>
+            </a:r>
+            <a:r>
+              <a:rPr lang="en-US" i="1" dirty="0">
+                <a:latin typeface="Times New Roman" panose="02020603050405020304" pitchFamily="18" charset="0"/>
+                <a:cs typeface="Times New Roman" panose="02020603050405020304" pitchFamily="18" charset="0"/>
+              </a:rPr>
+              <a:t>Python for Data Analysis</a:t>
+            </a:r>
+            <a:r>
+              <a:rPr lang="en-US" dirty="0">
+                <a:latin typeface="Times New Roman" panose="02020603050405020304" pitchFamily="18" charset="0"/>
+                <a:cs typeface="Times New Roman" panose="02020603050405020304" pitchFamily="18" charset="0"/>
+              </a:rPr>
+              <a:t> (3rd ed.). O'Reilly Media.</a:t>
+            </a:r>
+          </a:p>
+          <a:p>
+            <a:r>
+              <a:rPr lang="en-US" dirty="0">
+                <a:latin typeface="Times New Roman" panose="02020603050405020304" pitchFamily="18" charset="0"/>
+                <a:cs typeface="Times New Roman" panose="02020603050405020304" pitchFamily="18" charset="0"/>
+              </a:rPr>
+              <a:t>Van Rossum, G., &amp; Drake, F. L. (2009). </a:t>
+            </a:r>
+            <a:r>
+              <a:rPr lang="en-US" i="1" dirty="0">
+                <a:latin typeface="Times New Roman" panose="02020603050405020304" pitchFamily="18" charset="0"/>
+                <a:cs typeface="Times New Roman" panose="02020603050405020304" pitchFamily="18" charset="0"/>
+              </a:rPr>
+              <a:t>Python 3 Reference Manual</a:t>
+            </a:r>
+            <a:r>
+              <a:rPr lang="en-US" dirty="0">
+                <a:latin typeface="Times New Roman" panose="02020603050405020304" pitchFamily="18" charset="0"/>
+                <a:cs typeface="Times New Roman" panose="02020603050405020304" pitchFamily="18" charset="0"/>
+              </a:rPr>
+              <a:t>. CreateSpace.</a:t>
+            </a:r>
+          </a:p>
+        </p:txBody>
+      </p:sp>
+    </p:spTree>
+    <p:extLst>
+      <p:ext uri="{BB962C8B-B14F-4D97-AF65-F5344CB8AC3E}">
+        <p14:creationId xmlns:p14="http://schemas.microsoft.com/office/powerpoint/2010/main" val="4078051552"/>
+      </p:ext>
+    </p:extLst>
+  </p:cSld>
+  <p:clrMapOvr>
+    <a:masterClrMapping/>
+  </p:clrMapOvr>
+</p:sld>
+</file>
+
+<file path=ppt/slides/slide27.xml><?xml version="1.0" encoding="utf-8"?>
+<p:sld xmlns:a="http://schemas.openxmlformats.org/drawingml/2006/main" xmlns:r="http://schemas.openxmlformats.org/officeDocument/2006/relationships" xmlns:p="http://schemas.openxmlformats.org/presentationml/2006/main">
+  <p:cSld>
+    <p:spTree>
+      <p:nvGrpSpPr>
+        <p:cNvPr id="1" name=""/>
+        <p:cNvGrpSpPr/>
+        <p:nvPr/>
+      </p:nvGrpSpPr>
+      <p:grpSpPr>
+        <a:xfrm>
+          <a:off x="0" y="0"/>
+          <a:ext cx="0" cy="0"/>
+          <a:chOff x="0" y="0"/>
+          <a:chExt cx="0" cy="0"/>
+        </a:xfrm>
+      </p:grpSpPr>
+      <p:sp>
+        <p:nvSpPr>
+          <p:cNvPr id="2" name="Title 1">
+            <a:extLst>
+              <a:ext uri="{FF2B5EF4-FFF2-40B4-BE49-F238E27FC236}">
                 <a16:creationId xmlns:a16="http://schemas.microsoft.com/office/drawing/2014/main" id="{13584C17-C6EC-6844-44C8-EEE707F1D6E5}"/>
               </a:ext>
             </a:extLst>
@@ -8547,18 +8725,6 @@
                 <a:cs typeface="Times New Roman" panose="02020603050405020304" pitchFamily="18" charset="0"/>
               </a:rPr>
               <a:t>Thank you for your attention. </a:t>
-            </a:r>
-          </a:p>
-          <a:p>
-            <a:pPr marL="0" indent="0" algn="ctr">
-              <a:buNone/>
-            </a:pPr>
-            <a:r>
-              <a:rPr lang="en-US" dirty="0">
-                <a:latin typeface="Times New Roman" panose="02020603050405020304" pitchFamily="18" charset="0"/>
-                <a:cs typeface="Times New Roman" panose="02020603050405020304" pitchFamily="18" charset="0"/>
-              </a:rPr>
-              <a:t>I welcome your questions and observations.</a:t>
             </a:r>
           </a:p>
         </p:txBody>
@@ -8934,7 +9100,7 @@
         <p:spPr/>
         <p:txBody>
           <a:bodyPr>
-            <a:normAutofit fontScale="85000" lnSpcReduction="20000"/>
+            <a:normAutofit fontScale="92500" lnSpcReduction="20000"/>
           </a:bodyPr>
           <a:lstStyle/>
           <a:p>
@@ -9011,12 +9177,6 @@
               </a:rPr>
               <a:t>Time-consuming manual inventory management</a:t>
             </a:r>
-          </a:p>
-          <a:p>
-            <a:endParaRPr lang="en-US" dirty="0">
-              <a:latin typeface="Times New Roman" panose="02020603050405020304" pitchFamily="18" charset="0"/>
-              <a:cs typeface="Times New Roman" panose="02020603050405020304" pitchFamily="18" charset="0"/>
-            </a:endParaRPr>
           </a:p>
         </p:txBody>
       </p:sp>
@@ -9076,7 +9236,7 @@
                 <a:latin typeface="Times New Roman" panose="02020603050405020304" pitchFamily="18" charset="0"/>
                 <a:cs typeface="Times New Roman" panose="02020603050405020304" pitchFamily="18" charset="0"/>
               </a:rPr>
-              <a:t>Aim</a:t>
+              <a:t>Aim of the Study</a:t>
             </a:r>
           </a:p>
         </p:txBody>
@@ -9109,14 +9269,8 @@
                 <a:latin typeface="Times New Roman" panose="02020603050405020304" pitchFamily="18" charset="0"/>
                 <a:cs typeface="Times New Roman" panose="02020603050405020304" pitchFamily="18" charset="0"/>
               </a:rPr>
-              <a:t>To develop a Smart Inventory Management System that automates inventory control, sales tracking, profit computation, and business visualization using Python.</a:t>
-            </a:r>
-          </a:p>
-          <a:p>
-            <a:endParaRPr lang="en-US" dirty="0">
-              <a:latin typeface="Times New Roman" panose="02020603050405020304" pitchFamily="18" charset="0"/>
-              <a:cs typeface="Times New Roman" panose="02020603050405020304" pitchFamily="18" charset="0"/>
-            </a:endParaRPr>
+              <a:t>The aim of this study is to develop a smart inventory management system that automates inventory control, sales analysis, financial reporting, and visualization using Python.</a:t>
+            </a:r>
           </a:p>
         </p:txBody>
       </p:sp>
@@ -9197,89 +9351,116 @@
             <p:ph idx="1"/>
           </p:nvPr>
         </p:nvSpPr>
-        <p:spPr/>
+        <p:spPr>
+          <a:xfrm>
+            <a:off x="1295401" y="2556931"/>
+            <a:ext cx="9601196" cy="3593497"/>
+          </a:xfrm>
+        </p:spPr>
         <p:txBody>
           <a:bodyPr>
-            <a:normAutofit fontScale="85000" lnSpcReduction="20000"/>
+            <a:normAutofit fontScale="70000" lnSpcReduction="20000"/>
           </a:bodyPr>
           <a:lstStyle/>
           <a:p>
-            <a:r>
-              <a:rPr lang="en-US" dirty="0">
-                <a:latin typeface="Times New Roman" panose="02020603050405020304" pitchFamily="18" charset="0"/>
-                <a:cs typeface="Times New Roman" panose="02020603050405020304" pitchFamily="18" charset="0"/>
-              </a:rPr>
-              <a:t>Develop an inventory database </a:t>
-            </a:r>
-          </a:p>
-          <a:p>
-            <a:r>
-              <a:rPr lang="en-US" dirty="0">
-                <a:latin typeface="Times New Roman" panose="02020603050405020304" pitchFamily="18" charset="0"/>
-                <a:cs typeface="Times New Roman" panose="02020603050405020304" pitchFamily="18" charset="0"/>
-              </a:rPr>
-              <a:t>Monitor stock availability </a:t>
-            </a:r>
-          </a:p>
-          <a:p>
-            <a:r>
-              <a:rPr lang="en-US" dirty="0">
-                <a:latin typeface="Times New Roman" panose="02020603050405020304" pitchFamily="18" charset="0"/>
-                <a:cs typeface="Times New Roman" panose="02020603050405020304" pitchFamily="18" charset="0"/>
-              </a:rPr>
-              <a:t>Record product sales </a:t>
-            </a:r>
-          </a:p>
-          <a:p>
-            <a:r>
-              <a:rPr lang="en-US" dirty="0">
-                <a:latin typeface="Times New Roman" panose="02020603050405020304" pitchFamily="18" charset="0"/>
-                <a:cs typeface="Times New Roman" panose="02020603050405020304" pitchFamily="18" charset="0"/>
-              </a:rPr>
-              <a:t>Calculate income automatically </a:t>
-            </a:r>
-          </a:p>
-          <a:p>
-            <a:r>
-              <a:rPr lang="en-US" dirty="0">
-                <a:latin typeface="Times New Roman" panose="02020603050405020304" pitchFamily="18" charset="0"/>
-                <a:cs typeface="Times New Roman" panose="02020603050405020304" pitchFamily="18" charset="0"/>
-              </a:rPr>
-              <a:t>Compute business profit </a:t>
-            </a:r>
-          </a:p>
-          <a:p>
-            <a:r>
-              <a:rPr lang="en-US" dirty="0">
-                <a:latin typeface="Times New Roman" panose="02020603050405020304" pitchFamily="18" charset="0"/>
-                <a:cs typeface="Times New Roman" panose="02020603050405020304" pitchFamily="18" charset="0"/>
-              </a:rPr>
-              <a:t>Detect low-stock items </a:t>
-            </a:r>
-          </a:p>
-          <a:p>
-            <a:r>
-              <a:rPr lang="en-US" dirty="0">
-                <a:latin typeface="Times New Roman" panose="02020603050405020304" pitchFamily="18" charset="0"/>
-                <a:cs typeface="Times New Roman" panose="02020603050405020304" pitchFamily="18" charset="0"/>
-              </a:rPr>
-              <a:t>Generate graphical reports </a:t>
-            </a:r>
-          </a:p>
-          <a:p>
-            <a:r>
-              <a:rPr lang="en-US" dirty="0">
-                <a:latin typeface="Times New Roman" panose="02020603050405020304" pitchFamily="18" charset="0"/>
-                <a:cs typeface="Times New Roman" panose="02020603050405020304" pitchFamily="18" charset="0"/>
-              </a:rPr>
-              <a:t>Support managerial decision-making</a:t>
-            </a:r>
-          </a:p>
-          <a:p>
-            <a:endParaRPr lang="en-US" dirty="0">
-              <a:latin typeface="Times New Roman" panose="02020603050405020304" pitchFamily="18" charset="0"/>
-              <a:cs typeface="Times New Roman" panose="02020603050405020304" pitchFamily="18" charset="0"/>
-            </a:endParaRPr>
+            <a:pPr lvl="0"/>
+            <a:r>
+              <a:rPr lang="en-US" dirty="0">
+                <a:latin typeface="Times New Roman" panose="02020603050405020304" pitchFamily="18" charset="0"/>
+                <a:cs typeface="Times New Roman" panose="02020603050405020304" pitchFamily="18" charset="0"/>
+              </a:rPr>
+              <a:t>To develop an inventory database. </a:t>
+            </a:r>
+          </a:p>
+          <a:p>
+            <a:pPr lvl="0"/>
+            <a:r>
+              <a:rPr lang="en-US" dirty="0">
+                <a:latin typeface="Times New Roman" panose="02020603050405020304" pitchFamily="18" charset="0"/>
+                <a:cs typeface="Times New Roman" panose="02020603050405020304" pitchFamily="18" charset="0"/>
+              </a:rPr>
+              <a:t>To record product information. </a:t>
+            </a:r>
+          </a:p>
+          <a:p>
+            <a:pPr lvl="0"/>
+            <a:r>
+              <a:rPr lang="en-US" dirty="0">
+                <a:latin typeface="Times New Roman" panose="02020603050405020304" pitchFamily="18" charset="0"/>
+                <a:cs typeface="Times New Roman" panose="02020603050405020304" pitchFamily="18" charset="0"/>
+              </a:rPr>
+              <a:t>To monitor available stock. </a:t>
+            </a:r>
+          </a:p>
+          <a:p>
+            <a:pPr lvl="0"/>
+            <a:r>
+              <a:rPr lang="en-US" dirty="0">
+                <a:latin typeface="Times New Roman" panose="02020603050405020304" pitchFamily="18" charset="0"/>
+                <a:cs typeface="Times New Roman" panose="02020603050405020304" pitchFamily="18" charset="0"/>
+              </a:rPr>
+              <a:t>To calculate sales automatically. </a:t>
+            </a:r>
+          </a:p>
+          <a:p>
+            <a:pPr lvl="0"/>
+            <a:r>
+              <a:rPr lang="en-US" dirty="0">
+                <a:latin typeface="Times New Roman" panose="02020603050405020304" pitchFamily="18" charset="0"/>
+                <a:cs typeface="Times New Roman" panose="02020603050405020304" pitchFamily="18" charset="0"/>
+              </a:rPr>
+              <a:t>To generate receipts for individual sales.</a:t>
+            </a:r>
+          </a:p>
+          <a:p>
+            <a:pPr lvl="0"/>
+            <a:r>
+              <a:rPr lang="en-US" dirty="0">
+                <a:latin typeface="Times New Roman" panose="02020603050405020304" pitchFamily="18" charset="0"/>
+                <a:cs typeface="Times New Roman" panose="02020603050405020304" pitchFamily="18" charset="0"/>
+              </a:rPr>
+              <a:t>To compute income generated. </a:t>
+            </a:r>
+          </a:p>
+          <a:p>
+            <a:pPr lvl="0"/>
+            <a:r>
+              <a:rPr lang="en-US" dirty="0">
+                <a:latin typeface="Times New Roman" panose="02020603050405020304" pitchFamily="18" charset="0"/>
+                <a:cs typeface="Times New Roman" panose="02020603050405020304" pitchFamily="18" charset="0"/>
+              </a:rPr>
+              <a:t>To calculate profit earned. </a:t>
+            </a:r>
+          </a:p>
+          <a:p>
+            <a:pPr lvl="0"/>
+            <a:r>
+              <a:rPr lang="en-US" dirty="0">
+                <a:latin typeface="Times New Roman" panose="02020603050405020304" pitchFamily="18" charset="0"/>
+                <a:cs typeface="Times New Roman" panose="02020603050405020304" pitchFamily="18" charset="0"/>
+              </a:rPr>
+              <a:t>To detect products with low inventory. </a:t>
+            </a:r>
+          </a:p>
+          <a:p>
+            <a:pPr lvl="0"/>
+            <a:r>
+              <a:rPr lang="en-US" dirty="0">
+                <a:latin typeface="Times New Roman" panose="02020603050405020304" pitchFamily="18" charset="0"/>
+                <a:cs typeface="Times New Roman" panose="02020603050405020304" pitchFamily="18" charset="0"/>
+              </a:rPr>
+              <a:t>To generate graphical reports. </a:t>
+            </a:r>
+          </a:p>
+          <a:p>
+            <a:pPr lvl="0"/>
+            <a:r>
+              <a:rPr lang="en-US" dirty="0">
+                <a:latin typeface="Times New Roman" panose="02020603050405020304" pitchFamily="18" charset="0"/>
+                <a:cs typeface="Times New Roman" panose="02020603050405020304" pitchFamily="18" charset="0"/>
+              </a:rPr>
+              <a:t>To improve business decision-making. </a:t>
+            </a:r>
           </a:p>
         </p:txBody>
       </p:sp>
@@ -9468,7 +9649,7 @@
           <p:cNvPr id="2" name="Title 1">
             <a:extLst>
               <a:ext uri="{FF2B5EF4-FFF2-40B4-BE49-F238E27FC236}">
-                <a16:creationId xmlns:a16="http://schemas.microsoft.com/office/drawing/2014/main" id="{EB5152E1-145B-72A9-767B-677C7D419B36}"/>
+                <a16:creationId xmlns:a16="http://schemas.microsoft.com/office/drawing/2014/main" id="{187FD446-6B9A-CF56-5113-5BB60FA05A9B}"/>
               </a:ext>
             </a:extLst>
           </p:cNvPr>
@@ -9489,7 +9670,7 @@
                 <a:latin typeface="Times New Roman" panose="02020603050405020304" pitchFamily="18" charset="0"/>
                 <a:cs typeface="Times New Roman" panose="02020603050405020304" pitchFamily="18" charset="0"/>
               </a:rPr>
-              <a:t>Advantages</a:t>
+              <a:t>Scope of the Study</a:t>
             </a:r>
           </a:p>
         </p:txBody>
@@ -9499,7 +9680,7 @@
           <p:cNvPr id="3" name="Content Placeholder 2">
             <a:extLst>
               <a:ext uri="{FF2B5EF4-FFF2-40B4-BE49-F238E27FC236}">
-                <a16:creationId xmlns:a16="http://schemas.microsoft.com/office/drawing/2014/main" id="{1901124D-366F-F799-FEF5-36478DA067AF}"/>
+                <a16:creationId xmlns:a16="http://schemas.microsoft.com/office/drawing/2014/main" id="{20DF6BCA-CD4F-98E4-FDA7-1FADEB2A9FD8}"/>
               </a:ext>
             </a:extLst>
           </p:cNvPr>
@@ -9510,81 +9691,113 @@
             <p:ph idx="1"/>
           </p:nvPr>
         </p:nvSpPr>
-        <p:spPr/>
+        <p:spPr>
+          <a:xfrm>
+            <a:off x="1295401" y="2556931"/>
+            <a:ext cx="9601196" cy="3700649"/>
+          </a:xfrm>
+        </p:spPr>
         <p:txBody>
           <a:bodyPr>
-            <a:normAutofit lnSpcReduction="10000"/>
+            <a:normAutofit fontScale="85000" lnSpcReduction="20000"/>
           </a:bodyPr>
           <a:lstStyle/>
           <a:p>
-            <a:r>
-              <a:rPr lang="en-US" dirty="0">
-                <a:latin typeface="Times New Roman" panose="02020603050405020304" pitchFamily="18" charset="0"/>
-                <a:cs typeface="Times New Roman" panose="02020603050405020304" pitchFamily="18" charset="0"/>
-              </a:rPr>
-              <a:t>Accurate inventory records </a:t>
-            </a:r>
-          </a:p>
-          <a:p>
-            <a:r>
-              <a:rPr lang="en-US" dirty="0">
-                <a:latin typeface="Times New Roman" panose="02020603050405020304" pitchFamily="18" charset="0"/>
-                <a:cs typeface="Times New Roman" panose="02020603050405020304" pitchFamily="18" charset="0"/>
-              </a:rPr>
-              <a:t>Faster stock monitoring </a:t>
-            </a:r>
-          </a:p>
-          <a:p>
-            <a:r>
-              <a:rPr lang="en-US" dirty="0">
-                <a:latin typeface="Times New Roman" panose="02020603050405020304" pitchFamily="18" charset="0"/>
-                <a:cs typeface="Times New Roman" panose="02020603050405020304" pitchFamily="18" charset="0"/>
-              </a:rPr>
-              <a:t>Reduced paperwork </a:t>
-            </a:r>
-          </a:p>
-          <a:p>
-            <a:r>
-              <a:rPr lang="en-US" dirty="0">
-                <a:latin typeface="Times New Roman" panose="02020603050405020304" pitchFamily="18" charset="0"/>
-                <a:cs typeface="Times New Roman" panose="02020603050405020304" pitchFamily="18" charset="0"/>
-              </a:rPr>
-              <a:t>Improved productivity </a:t>
-            </a:r>
-          </a:p>
-          <a:p>
-            <a:r>
-              <a:rPr lang="en-US" dirty="0">
-                <a:latin typeface="Times New Roman" panose="02020603050405020304" pitchFamily="18" charset="0"/>
-                <a:cs typeface="Times New Roman" panose="02020603050405020304" pitchFamily="18" charset="0"/>
-              </a:rPr>
-              <a:t>Better financial analysis </a:t>
-            </a:r>
-          </a:p>
-          <a:p>
-            <a:r>
-              <a:rPr lang="en-US" dirty="0">
-                <a:latin typeface="Times New Roman" panose="02020603050405020304" pitchFamily="18" charset="0"/>
-                <a:cs typeface="Times New Roman" panose="02020603050405020304" pitchFamily="18" charset="0"/>
-              </a:rPr>
-              <a:t>Easy business monitoring </a:t>
-            </a:r>
-          </a:p>
-          <a:p>
-            <a:r>
-              <a:rPr lang="en-US" dirty="0">
-                <a:latin typeface="Times New Roman" panose="02020603050405020304" pitchFamily="18" charset="0"/>
-                <a:cs typeface="Times New Roman" panose="02020603050405020304" pitchFamily="18" charset="0"/>
-              </a:rPr>
-              <a:t>Supports informed decision-making  </a:t>
-            </a:r>
+            <a:pPr marL="0" indent="0">
+              <a:buNone/>
+            </a:pPr>
+            <a:r>
+              <a:rPr lang="en-US" dirty="0">
+                <a:latin typeface="Times New Roman" panose="02020603050405020304" pitchFamily="18" charset="0"/>
+                <a:cs typeface="Times New Roman" panose="02020603050405020304" pitchFamily="18" charset="0"/>
+              </a:rPr>
+              <a:t>The system provides:</a:t>
+            </a:r>
+          </a:p>
+          <a:p>
+            <a:r>
+              <a:rPr lang="en-US" dirty="0">
+                <a:latin typeface="Times New Roman" panose="02020603050405020304" pitchFamily="18" charset="0"/>
+                <a:cs typeface="Times New Roman" panose="02020603050405020304" pitchFamily="18" charset="0"/>
+              </a:rPr>
+              <a:t>Product registration </a:t>
+            </a:r>
+          </a:p>
+          <a:p>
+            <a:r>
+              <a:rPr lang="en-US" dirty="0">
+                <a:latin typeface="Times New Roman" panose="02020603050405020304" pitchFamily="18" charset="0"/>
+                <a:cs typeface="Times New Roman" panose="02020603050405020304" pitchFamily="18" charset="0"/>
+              </a:rPr>
+              <a:t>Inventory monitoring </a:t>
+            </a:r>
+          </a:p>
+          <a:p>
+            <a:r>
+              <a:rPr lang="en-US" dirty="0">
+                <a:latin typeface="Times New Roman" panose="02020603050405020304" pitchFamily="18" charset="0"/>
+                <a:cs typeface="Times New Roman" panose="02020603050405020304" pitchFamily="18" charset="0"/>
+              </a:rPr>
+              <a:t>Sales recording </a:t>
+            </a:r>
+          </a:p>
+          <a:p>
+            <a:r>
+              <a:rPr lang="en-US" dirty="0">
+                <a:latin typeface="Times New Roman" panose="02020603050405020304" pitchFamily="18" charset="0"/>
+                <a:cs typeface="Times New Roman" panose="02020603050405020304" pitchFamily="18" charset="0"/>
+              </a:rPr>
+              <a:t>Income calculation </a:t>
+            </a:r>
+          </a:p>
+          <a:p>
+            <a:r>
+              <a:rPr lang="en-US" dirty="0">
+                <a:latin typeface="Times New Roman" panose="02020603050405020304" pitchFamily="18" charset="0"/>
+                <a:cs typeface="Times New Roman" panose="02020603050405020304" pitchFamily="18" charset="0"/>
+              </a:rPr>
+              <a:t>Profit computation </a:t>
+            </a:r>
+          </a:p>
+          <a:p>
+            <a:r>
+              <a:rPr lang="en-US" dirty="0">
+                <a:latin typeface="Times New Roman" panose="02020603050405020304" pitchFamily="18" charset="0"/>
+                <a:cs typeface="Times New Roman" panose="02020603050405020304" pitchFamily="18" charset="0"/>
+              </a:rPr>
+              <a:t>Low-stock alerts </a:t>
+            </a:r>
+          </a:p>
+          <a:p>
+            <a:r>
+              <a:rPr lang="en-US" dirty="0">
+                <a:latin typeface="Times New Roman" panose="02020603050405020304" pitchFamily="18" charset="0"/>
+                <a:cs typeface="Times New Roman" panose="02020603050405020304" pitchFamily="18" charset="0"/>
+              </a:rPr>
+              <a:t>Dashboard visualization </a:t>
+            </a:r>
+          </a:p>
+          <a:p>
+            <a:r>
+              <a:rPr lang="en-US" dirty="0">
+                <a:latin typeface="Times New Roman" panose="02020603050405020304" pitchFamily="18" charset="0"/>
+                <a:cs typeface="Times New Roman" panose="02020603050405020304" pitchFamily="18" charset="0"/>
+              </a:rPr>
+              <a:t>Business performance reporting</a:t>
+            </a:r>
+          </a:p>
+          <a:p>
+            <a:endParaRPr lang="en-US" dirty="0">
+              <a:latin typeface="Times New Roman" panose="02020603050405020304" pitchFamily="18" charset="0"/>
+              <a:cs typeface="Times New Roman" panose="02020603050405020304" pitchFamily="18" charset="0"/>
+            </a:endParaRPr>
           </a:p>
         </p:txBody>
       </p:sp>
     </p:spTree>
     <p:extLst>
       <p:ext uri="{BB962C8B-B14F-4D97-AF65-F5344CB8AC3E}">
-        <p14:creationId xmlns:p14="http://schemas.microsoft.com/office/powerpoint/2010/main" val="3793920599"/>
+        <p14:creationId xmlns:p14="http://schemas.microsoft.com/office/powerpoint/2010/main" val="1624596919"/>
       </p:ext>
     </p:extLst>
   </p:cSld>
